--- a/docs/export/Presentacion-Kin-Solar-Guatemala.pptx
+++ b/docs/export/Presentacion-Kin-Solar-Guatemala.pptx
@@ -20,10 +20,9 @@
     <p:sldId id="268" r:id="rId14"/>
     <p:sldId id="269" r:id="rId15"/>
     <p:sldId id="270" r:id="rId16"/>
-    <p:sldId id="271" r:id="rId17"/>
   </p:sldIdLst>
   <p:notesMasterIdLst>
-    <p:notesMasterId r:id="rId18"/>
+    <p:notesMasterId r:id="rId17"/>
   </p:notesMasterIdLst>
   <p:sldSz cx="12191695" cy="6858000"/>
   <p:notesSz cx="6858000" cy="12191695"/>
@@ -1069,94 +1068,6 @@
             <a:fld id="{F7021451-1387-4CA6-816F-3879F97B5CBC}" type="slidenum">
               <a:rPr lang="en-US"/>
               <a:t>15</a:t>
-            </a:fld>
-            <a:endParaRPr lang="en-US"/>
-          </a:p>
-        </p:txBody>
-      </p:sp>
-    </p:spTree>
-    <p:extLst>
-      <p:ext uri="{BB962C8B-B14F-4D97-AF65-F5344CB8AC3E}">
-        <p14:creationId xmlns:p14="http://schemas.microsoft.com/office/powerpoint/2010/main" val="1024086991"/>
-      </p:ext>
-    </p:extLst>
-  </p:cSld>
-  <p:clrMapOvr>
-    <a:masterClrMapping/>
-  </p:clrMapOvr>
-</p:notes>
-</file>
-
-<file path=ppt/notesSlides/notesSlide16.xml><?xml version="1.0" encoding="utf-8"?>
-<p:notes xmlns:a="http://schemas.openxmlformats.org/drawingml/2006/main" xmlns:r="http://schemas.openxmlformats.org/officeDocument/2006/relationships" xmlns:p="http://schemas.openxmlformats.org/presentationml/2006/main">
-  <p:cSld>
-    <p:spTree>
-      <p:nvGrpSpPr>
-        <p:cNvPr id="1" name=""/>
-        <p:cNvGrpSpPr/>
-        <p:nvPr/>
-      </p:nvGrpSpPr>
-      <p:grpSpPr>
-        <a:xfrm>
-          <a:off x="0" y="0"/>
-          <a:ext cx="0" cy="0"/>
-          <a:chOff x="0" y="0"/>
-          <a:chExt cx="0" cy="0"/>
-        </a:xfrm>
-      </p:grpSpPr>
-      <p:sp>
-        <p:nvSpPr>
-          <p:cNvPr id="2" name="Slide Image Placeholder 1"/>
-          <p:cNvSpPr>
-            <a:spLocks noGrp="1" noRot="1" noChangeAspect="1"/>
-          </p:cNvSpPr>
-          <p:nvPr>
-            <p:ph type="sldImg"/>
-          </p:nvPr>
-        </p:nvSpPr>
-        <p:spPr/>
-      </p:sp>
-      <p:sp>
-        <p:nvSpPr>
-          <p:cNvPr id="3" name="Notes Placeholder 2"/>
-          <p:cNvSpPr>
-            <a:spLocks noGrp="1"/>
-          </p:cNvSpPr>
-          <p:nvPr>
-            <p:ph type="body" idx="1"/>
-          </p:nvPr>
-        </p:nvSpPr>
-        <p:spPr/>
-        <p:txBody>
-          <a:bodyPr/>
-          <a:lstStyle/>
-          <a:p>
-            <a:r>
-              <a:rPr lang="en-US" dirty="0"/>
-              <a:t/>
-            </a:r>
-            <a:endParaRPr lang="en-US" dirty="0"/>
-          </a:p>
-        </p:txBody>
-      </p:sp>
-      <p:sp>
-        <p:nvSpPr>
-          <p:cNvPr id="4" name="Slide Number Placeholder 3"/>
-          <p:cNvSpPr>
-            <a:spLocks noGrp="1"/>
-          </p:cNvSpPr>
-          <p:nvPr>
-            <p:ph type="sldNum" sz="quarter" idx="10"/>
-          </p:nvPr>
-        </p:nvSpPr>
-        <p:spPr/>
-        <p:txBody>
-          <a:bodyPr/>
-          <a:lstStyle/>
-          <a:p>
-            <a:fld id="{F7021451-1387-4CA6-816F-3879F97B5CBC}" type="slidenum">
-              <a:rPr lang="en-US"/>
-              <a:t>16</a:t>
             </a:fld>
             <a:endParaRPr lang="en-US"/>
           </a:p>
@@ -2301,7 +2212,7 @@
         <p:spPr>
           <a:xfrm>
             <a:off x="502920" y="1078992"/>
-            <a:ext cx="3657600" cy="274320"/>
+            <a:ext cx="4572000" cy="274320"/>
           </a:xfrm>
           <a:prstGeom prst="rect">
             <a:avLst/>
@@ -2444,9 +2355,33 @@
           </a:p>
         </p:txBody>
       </p:sp>
+      <p:sp>
+        <p:nvSpPr>
+          <p:cNvPr id="10" name="Shape 7"/>
+          <p:cNvSpPr/>
+          <p:nvPr/>
+        </p:nvSpPr>
+        <p:spPr>
+          <a:xfrm>
+            <a:off x="6263640" y="1600200"/>
+            <a:ext cx="5440680" cy="4160520"/>
+          </a:xfrm>
+          <a:prstGeom prst="roundRect">
+            <a:avLst>
+              <a:gd name="adj" fmla="val 1099"/>
+            </a:avLst>
+          </a:prstGeom>
+          <a:ln w="19050">
+            <a:solidFill>
+              <a:srgbClr val="FBBF24"/>
+            </a:solidFill>
+            <a:prstDash val="solid"/>
+          </a:ln>
+        </p:spPr>
+      </p:sp>
       <p:pic>
         <p:nvPicPr>
-          <p:cNvPr id="10" name="Image 1" descr="C:\Users\ACER NITRO\Desktop\DIA DEL PROGRAMADOR IA\public\images\kin-logo-blanco.png">    </p:cNvPr>
+          <p:cNvPr id="11" name="Image 1" descr="C:\Users\ACER NITRO\Desktop\DIA DEL PROGRAMADOR IA\docs\evidencias\pptx\01-login.png">    </p:cNvPr>
           <p:cNvPicPr>
             <a:picLocks noChangeAspect="1"/>
           </p:cNvPicPr>
@@ -2459,8 +2394,8 @@
         </p:blipFill>
         <p:spPr>
           <a:xfrm>
-            <a:off x="502920" y="1737360"/>
-            <a:ext cx="3108960" cy="1298448"/>
+            <a:off x="6318504" y="1655064"/>
+            <a:ext cx="5330952" cy="3776472"/>
           </a:xfrm>
           <a:prstGeom prst="rect">
             <a:avLst/>
@@ -2469,30 +2404,92 @@
       </p:pic>
       <p:sp>
         <p:nvSpPr>
-          <p:cNvPr id="11" name="Text 7"/>
-          <p:cNvSpPr/>
-          <p:nvPr/>
-        </p:nvSpPr>
-        <p:spPr>
-          <a:xfrm>
-            <a:off x="502920" y="3063240"/>
-            <a:ext cx="8229600" cy="822960"/>
-          </a:xfrm>
-          <a:prstGeom prst="rect">
-            <a:avLst/>
-          </a:prstGeom>
-          <a:noFill/>
-          <a:ln/>
-        </p:spPr>
-        <p:txBody>
-          <a:bodyPr wrap="square" rtlCol="0" anchor="ctr"/>
-          <a:lstStyle/>
-          <a:p>
-            <a:pPr indent="0" marL="0">
-              <a:buNone/>
-            </a:pPr>
-            <a:r>
-              <a:rPr lang="en-US" sz="3600" b="1" dirty="0">
+          <p:cNvPr id="12" name="Text 8"/>
+          <p:cNvSpPr/>
+          <p:nvPr/>
+        </p:nvSpPr>
+        <p:spPr>
+          <a:xfrm>
+            <a:off x="6355080" y="5449824"/>
+            <a:ext cx="5257800" cy="274320"/>
+          </a:xfrm>
+          <a:prstGeom prst="rect">
+            <a:avLst/>
+          </a:prstGeom>
+          <a:noFill/>
+          <a:ln/>
+        </p:spPr>
+        <p:txBody>
+          <a:bodyPr wrap="square" rtlCol="0" anchor="ctr"/>
+          <a:lstStyle/>
+          <a:p>
+            <a:pPr indent="0" marL="0">
+              <a:buNone/>
+            </a:pPr>
+            <a:r>
+              <a:rPr lang="en-US" sz="950" i="1" dirty="0">
+                <a:solidFill>
+                  <a:srgbClr val="A1AEC2"/>
+                </a:solidFill>
+                <a:latin typeface="Arial" pitchFamily="34" charset="0"/>
+                <a:ea typeface="Arial" pitchFamily="34" charset="-122"/>
+                <a:cs typeface="Arial" pitchFamily="34" charset="-120"/>
+              </a:rPr>
+              <a:t>Pantalla de inicio de sesión de K'in Solar Guatemala</a:t>
+            </a:r>
+            <a:endParaRPr lang="en-US" sz="950" dirty="0"/>
+          </a:p>
+        </p:txBody>
+      </p:sp>
+      <p:pic>
+        <p:nvPicPr>
+          <p:cNvPr id="13" name="Image 2" descr="C:\Users\ACER NITRO\Desktop\DIA DEL PROGRAMADOR IA\public\images\kin-logo-blanco.png">    </p:cNvPr>
+          <p:cNvPicPr>
+            <a:picLocks noChangeAspect="1"/>
+          </p:cNvPicPr>
+          <p:nvPr/>
+        </p:nvPicPr>
+        <p:blipFill>
+          <a:blip r:embed="rId3"/>
+          <a:srcRect l="0" r="0" t="0" b="0"/>
+          <a:stretch/>
+        </p:blipFill>
+        <p:spPr>
+          <a:xfrm>
+            <a:off x="502920" y="1600200"/>
+            <a:ext cx="2743200" cy="1143000"/>
+          </a:xfrm>
+          <a:prstGeom prst="rect">
+            <a:avLst/>
+          </a:prstGeom>
+        </p:spPr>
+      </p:pic>
+      <p:sp>
+        <p:nvSpPr>
+          <p:cNvPr id="14" name="Text 9"/>
+          <p:cNvSpPr/>
+          <p:nvPr/>
+        </p:nvSpPr>
+        <p:spPr>
+          <a:xfrm>
+            <a:off x="502920" y="2788920"/>
+            <a:ext cx="5486400" cy="685800"/>
+          </a:xfrm>
+          <a:prstGeom prst="rect">
+            <a:avLst/>
+          </a:prstGeom>
+          <a:noFill/>
+          <a:ln/>
+        </p:spPr>
+        <p:txBody>
+          <a:bodyPr wrap="square" rtlCol="0" anchor="ctr"/>
+          <a:lstStyle/>
+          <a:p>
+            <a:pPr indent="0" marL="0">
+              <a:buNone/>
+            </a:pPr>
+            <a:r>
+              <a:rPr lang="en-US" sz="3200" b="1" dirty="0">
                 <a:solidFill>
                   <a:srgbClr val="EDF2FA"/>
                 </a:solidFill>
@@ -2506,7 +2503,7 @@
               <a:buNone/>
             </a:pPr>
             <a:r>
-              <a:rPr lang="en-US" sz="3600" b="1" dirty="0">
+              <a:rPr lang="en-US" sz="3200" b="1" dirty="0">
                 <a:solidFill>
                   <a:srgbClr val="FBBF24"/>
                 </a:solidFill>
@@ -2516,36 +2513,36 @@
               </a:rPr>
               <a:t>Guatemala</a:t>
             </a:r>
-            <a:endParaRPr lang="en-US" sz="3600" dirty="0"/>
-          </a:p>
-        </p:txBody>
-      </p:sp>
-      <p:sp>
-        <p:nvSpPr>
-          <p:cNvPr id="12" name="Text 8"/>
-          <p:cNvSpPr/>
-          <p:nvPr/>
-        </p:nvSpPr>
-        <p:spPr>
-          <a:xfrm>
-            <a:off x="502920" y="3840480"/>
-            <a:ext cx="8229600" cy="822960"/>
-          </a:xfrm>
-          <a:prstGeom prst="rect">
-            <a:avLst/>
-          </a:prstGeom>
-          <a:noFill/>
-          <a:ln/>
-        </p:spPr>
-        <p:txBody>
-          <a:bodyPr wrap="square" rtlCol="0" anchor="ctr"/>
-          <a:lstStyle/>
-          <a:p>
-            <a:pPr indent="0" marL="0">
-              <a:buNone/>
-            </a:pPr>
-            <a:r>
-              <a:rPr lang="en-US" sz="1400" dirty="0">
+            <a:endParaRPr lang="en-US" sz="3200" dirty="0"/>
+          </a:p>
+        </p:txBody>
+      </p:sp>
+      <p:sp>
+        <p:nvSpPr>
+          <p:cNvPr id="15" name="Text 10"/>
+          <p:cNvSpPr/>
+          <p:nvPr/>
+        </p:nvSpPr>
+        <p:spPr>
+          <a:xfrm>
+            <a:off x="502920" y="3474720"/>
+            <a:ext cx="5577840" cy="914400"/>
+          </a:xfrm>
+          <a:prstGeom prst="rect">
+            <a:avLst/>
+          </a:prstGeom>
+          <a:noFill/>
+          <a:ln/>
+        </p:spPr>
+        <p:txBody>
+          <a:bodyPr wrap="square" rtlCol="0" anchor="ctr"/>
+          <a:lstStyle/>
+          <a:p>
+            <a:pPr indent="0" marL="0">
+              <a:buNone/>
+            </a:pPr>
+            <a:r>
+              <a:rPr lang="en-US" sz="1300" dirty="0">
                 <a:solidFill>
                   <a:srgbClr val="A1AEC2"/>
                 </a:solidFill>
@@ -2555,19 +2552,19 @@
               </a:rPr>
               <a:t>Plataforma centralizada de trazabilidad, monitoreo en tiempo real y proyección energética fotovoltaica en los 22 departamentos de Guatemala.</a:t>
             </a:r>
-            <a:endParaRPr lang="en-US" sz="1400" dirty="0"/>
-          </a:p>
-        </p:txBody>
-      </p:sp>
-      <p:sp>
-        <p:nvSpPr>
-          <p:cNvPr id="13" name="Shape 9"/>
-          <p:cNvSpPr/>
-          <p:nvPr/>
-        </p:nvSpPr>
-        <p:spPr>
-          <a:xfrm>
-            <a:off x="502920" y="4800600"/>
+            <a:endParaRPr lang="en-US" sz="1300" dirty="0"/>
+          </a:p>
+        </p:txBody>
+      </p:sp>
+      <p:sp>
+        <p:nvSpPr>
+          <p:cNvPr id="16" name="Shape 11"/>
+          <p:cNvSpPr/>
+          <p:nvPr/>
+        </p:nvSpPr>
+        <p:spPr>
+          <a:xfrm>
+            <a:off x="502920" y="4480560"/>
             <a:ext cx="1920240" cy="310896"/>
           </a:xfrm>
           <a:prstGeom prst="roundRect">
@@ -2583,13 +2580,13 @@
       </p:sp>
       <p:sp>
         <p:nvSpPr>
-          <p:cNvPr id="14" name="Text 10"/>
-          <p:cNvSpPr/>
-          <p:nvPr/>
-        </p:nvSpPr>
-        <p:spPr>
-          <a:xfrm>
-            <a:off x="502920" y="4800600"/>
+          <p:cNvPr id="17" name="Text 12"/>
+          <p:cNvSpPr/>
+          <p:nvPr/>
+        </p:nvSpPr>
+        <p:spPr>
+          <a:xfrm>
+            <a:off x="502920" y="4480560"/>
             <a:ext cx="1920240" cy="310896"/>
           </a:xfrm>
           <a:prstGeom prst="rect">
@@ -2622,13 +2619,13 @@
       </p:sp>
       <p:sp>
         <p:nvSpPr>
-          <p:cNvPr id="15" name="Shape 11"/>
-          <p:cNvSpPr/>
-          <p:nvPr/>
-        </p:nvSpPr>
-        <p:spPr>
-          <a:xfrm>
-            <a:off x="2587752" y="4800600"/>
+          <p:cNvPr id="18" name="Shape 13"/>
+          <p:cNvSpPr/>
+          <p:nvPr/>
+        </p:nvSpPr>
+        <p:spPr>
+          <a:xfrm>
+            <a:off x="2560320" y="4480560"/>
             <a:ext cx="1531620" cy="310896"/>
           </a:xfrm>
           <a:prstGeom prst="roundRect">
@@ -2644,13 +2641,13 @@
       </p:sp>
       <p:sp>
         <p:nvSpPr>
-          <p:cNvPr id="16" name="Text 12"/>
-          <p:cNvSpPr/>
-          <p:nvPr/>
-        </p:nvSpPr>
-        <p:spPr>
-          <a:xfrm>
-            <a:off x="2587752" y="4800600"/>
+          <p:cNvPr id="19" name="Text 14"/>
+          <p:cNvSpPr/>
+          <p:nvPr/>
+        </p:nvSpPr>
+        <p:spPr>
+          <a:xfrm>
+            <a:off x="2560320" y="4480560"/>
             <a:ext cx="1531620" cy="310896"/>
           </a:xfrm>
           <a:prstGeom prst="rect">
@@ -2683,14 +2680,14 @@
       </p:sp>
       <p:sp>
         <p:nvSpPr>
-          <p:cNvPr id="17" name="Shape 13"/>
-          <p:cNvSpPr/>
-          <p:nvPr/>
-        </p:nvSpPr>
-        <p:spPr>
-          <a:xfrm>
-            <a:off x="4283964" y="4800600"/>
-            <a:ext cx="1842516" cy="310896"/>
+          <p:cNvPr id="20" name="Shape 15"/>
+          <p:cNvSpPr/>
+          <p:nvPr/>
+        </p:nvSpPr>
+        <p:spPr>
+          <a:xfrm>
+            <a:off x="4229100" y="4480560"/>
+            <a:ext cx="1280160" cy="310896"/>
           </a:xfrm>
           <a:prstGeom prst="roundRect">
             <a:avLst>
@@ -2705,14 +2702,14 @@
       </p:sp>
       <p:sp>
         <p:nvSpPr>
-          <p:cNvPr id="18" name="Text 14"/>
-          <p:cNvSpPr/>
-          <p:nvPr/>
-        </p:nvSpPr>
-        <p:spPr>
-          <a:xfrm>
-            <a:off x="4283964" y="4800600"/>
-            <a:ext cx="1842516" cy="310896"/>
+          <p:cNvPr id="21" name="Text 16"/>
+          <p:cNvSpPr/>
+          <p:nvPr/>
+        </p:nvSpPr>
+        <p:spPr>
+          <a:xfrm>
+            <a:off x="4229100" y="4480560"/>
+            <a:ext cx="1280160" cy="310896"/>
           </a:xfrm>
           <a:prstGeom prst="rect">
             <a:avLst/>
@@ -2736,7 +2733,7 @@
                 <a:ea typeface="Arial" pitchFamily="34" charset="-122"/>
                 <a:cs typeface="Arial" pitchFamily="34" charset="-120"/>
               </a:rPr>
-              <a:t>Servidor MCP Propio</a:t>
+              <a:t>MCP Propio</a:t>
             </a:r>
             <a:endParaRPr lang="en-US" sz="1000" dirty="0"/>
           </a:p>
@@ -2744,14 +2741,14 @@
       </p:sp>
       <p:sp>
         <p:nvSpPr>
-          <p:cNvPr id="19" name="Shape 15"/>
-          <p:cNvSpPr/>
-          <p:nvPr/>
-        </p:nvSpPr>
-        <p:spPr>
-          <a:xfrm>
-            <a:off x="6291072" y="4800600"/>
-            <a:ext cx="1687068" cy="310896"/>
+          <p:cNvPr id="22" name="Shape 17"/>
+          <p:cNvSpPr/>
+          <p:nvPr/>
+        </p:nvSpPr>
+        <p:spPr>
+          <a:xfrm>
+            <a:off x="5646420" y="4480560"/>
+            <a:ext cx="1280160" cy="310896"/>
           </a:xfrm>
           <a:prstGeom prst="roundRect">
             <a:avLst>
@@ -2766,14 +2763,14 @@
       </p:sp>
       <p:sp>
         <p:nvSpPr>
-          <p:cNvPr id="20" name="Text 16"/>
-          <p:cNvSpPr/>
-          <p:nvPr/>
-        </p:nvSpPr>
-        <p:spPr>
-          <a:xfrm>
-            <a:off x="6291072" y="4800600"/>
-            <a:ext cx="1687068" cy="310896"/>
+          <p:cNvPr id="23" name="Text 18"/>
+          <p:cNvSpPr/>
+          <p:nvPr/>
+        </p:nvSpPr>
+        <p:spPr>
+          <a:xfrm>
+            <a:off x="5646420" y="4480560"/>
+            <a:ext cx="1280160" cy="310896"/>
           </a:xfrm>
           <a:prstGeom prst="rect">
             <a:avLst/>
@@ -2797,7 +2794,7 @@
                 <a:ea typeface="Arial" pitchFamily="34" charset="-122"/>
                 <a:cs typeface="Arial" pitchFamily="34" charset="-120"/>
               </a:rPr>
-              <a:t>OWASP Top 10:2025</a:t>
+              <a:t>OWASP 2025</a:t>
             </a:r>
             <a:endParaRPr lang="en-US" sz="1000" dirty="0"/>
           </a:p>
@@ -2805,14 +2802,14 @@
       </p:sp>
       <p:sp>
         <p:nvSpPr>
-          <p:cNvPr id="21" name="Shape 17"/>
-          <p:cNvSpPr/>
-          <p:nvPr/>
-        </p:nvSpPr>
-        <p:spPr>
-          <a:xfrm>
-            <a:off x="8142732" y="4800600"/>
-            <a:ext cx="1376172" cy="310896"/>
+          <p:cNvPr id="24" name="Shape 19"/>
+          <p:cNvSpPr/>
+          <p:nvPr/>
+        </p:nvSpPr>
+        <p:spPr>
+          <a:xfrm>
+            <a:off x="7063740" y="4480560"/>
+            <a:ext cx="1280160" cy="310896"/>
           </a:xfrm>
           <a:prstGeom prst="roundRect">
             <a:avLst>
@@ -2827,14 +2824,14 @@
       </p:sp>
       <p:sp>
         <p:nvSpPr>
-          <p:cNvPr id="22" name="Text 18"/>
-          <p:cNvSpPr/>
-          <p:nvPr/>
-        </p:nvSpPr>
-        <p:spPr>
-          <a:xfrm>
-            <a:off x="8142732" y="4800600"/>
-            <a:ext cx="1376172" cy="310896"/>
+          <p:cNvPr id="25" name="Text 20"/>
+          <p:cNvSpPr/>
+          <p:nvPr/>
+        </p:nvSpPr>
+        <p:spPr>
+          <a:xfrm>
+            <a:off x="7063740" y="4480560"/>
+            <a:ext cx="1280160" cy="310896"/>
           </a:xfrm>
           <a:prstGeom prst="rect">
             <a:avLst/>
@@ -2858,7 +2855,7 @@
                 <a:ea typeface="Arial" pitchFamily="34" charset="-122"/>
                 <a:cs typeface="Arial" pitchFamily="34" charset="-120"/>
               </a:rPr>
-              <a:t>ISO/IEC 25010</a:t>
+              <a:t>ISO 25010</a:t>
             </a:r>
             <a:endParaRPr lang="en-US" sz="1000" dirty="0"/>
           </a:p>
@@ -2866,18 +2863,18 @@
       </p:sp>
       <p:sp>
         <p:nvSpPr>
-          <p:cNvPr id="23" name="Shape 19"/>
-          <p:cNvSpPr/>
-          <p:nvPr/>
-        </p:nvSpPr>
-        <p:spPr>
-          <a:xfrm>
-            <a:off x="9052560" y="1737360"/>
-            <a:ext cx="2651760" cy="3291840"/>
+          <p:cNvPr id="26" name="Shape 21"/>
+          <p:cNvSpPr/>
+          <p:nvPr/>
+        </p:nvSpPr>
+        <p:spPr>
+          <a:xfrm>
+            <a:off x="502920" y="4983480"/>
+            <a:ext cx="5577840" cy="1691640"/>
           </a:xfrm>
           <a:prstGeom prst="roundRect">
             <a:avLst>
-              <a:gd name="adj" fmla="val 2759"/>
+              <a:gd name="adj" fmla="val 4324"/>
             </a:avLst>
           </a:prstGeom>
           <a:solidFill>
@@ -2893,14 +2890,14 @@
       </p:sp>
       <p:sp>
         <p:nvSpPr>
-          <p:cNvPr id="24" name="Text 20"/>
-          <p:cNvSpPr/>
-          <p:nvPr/>
-        </p:nvSpPr>
-        <p:spPr>
-          <a:xfrm>
-            <a:off x="9217152" y="1847088"/>
-            <a:ext cx="2322576" cy="320040"/>
+          <p:cNvPr id="27" name="Text 22"/>
+          <p:cNvSpPr/>
+          <p:nvPr/>
+        </p:nvSpPr>
+        <p:spPr>
+          <a:xfrm>
+            <a:off x="667512" y="5093208"/>
+            <a:ext cx="5248656" cy="320040"/>
           </a:xfrm>
           <a:prstGeom prst="rect">
             <a:avLst/>
@@ -2932,14 +2929,14 @@
       </p:sp>
       <p:sp>
         <p:nvSpPr>
-          <p:cNvPr id="25" name="Text 21"/>
-          <p:cNvSpPr/>
-          <p:nvPr/>
-        </p:nvSpPr>
-        <p:spPr>
-          <a:xfrm>
-            <a:off x="9217152" y="2176272"/>
-            <a:ext cx="2322576" cy="2743200"/>
+          <p:cNvPr id="28" name="Text 23"/>
+          <p:cNvSpPr/>
+          <p:nvPr/>
+        </p:nvSpPr>
+        <p:spPr>
+          <a:xfrm>
+            <a:off x="667512" y="5422392"/>
+            <a:ext cx="5248656" cy="1143000"/>
           </a:xfrm>
           <a:prstGeom prst="rect">
             <a:avLst/>
@@ -2977,6 +2974,17 @@
               </a:lnSpc>
               <a:buNone/>
             </a:pPr>
+            <a:r>
+              <a:rPr lang="en-US" sz="1050" dirty="0">
+                <a:solidFill>
+                  <a:srgbClr val="A1AEC2"/>
+                </a:solidFill>
+                <a:latin typeface="Arial" pitchFamily="34" charset="0"/>
+                <a:ea typeface="Arial" pitchFamily="34" charset="-122"/>
+                <a:cs typeface="Arial" pitchFamily="34" charset="-120"/>
+              </a:rPr>
+              <a:t>• Cero detección automática de fallas en tiempo real.</a:t>
+            </a:r>
             <a:endParaRPr lang="en-US" sz="1050" dirty="0"/>
           </a:p>
           <a:p>
@@ -2995,65 +3003,7 @@
                 <a:ea typeface="Arial" pitchFamily="34" charset="-122"/>
                 <a:cs typeface="Arial" pitchFamily="34" charset="-120"/>
               </a:rPr>
-              <a:t>• Cero detección automática de fallas.</a:t>
-            </a:r>
-            <a:endParaRPr lang="en-US" sz="1050" dirty="0"/>
-          </a:p>
-          <a:p>
-            <a:pPr indent="0" marL="0">
-              <a:lnSpc>
-                <a:spcPct val="115000"/>
-              </a:lnSpc>
-              <a:buNone/>
-            </a:pPr>
-            <a:endParaRPr lang="en-US" sz="1050" dirty="0"/>
-          </a:p>
-          <a:p>
-            <a:pPr indent="0" marL="0">
-              <a:lnSpc>
-                <a:spcPct val="115000"/>
-              </a:lnSpc>
-              <a:buNone/>
-            </a:pPr>
-            <a:r>
-              <a:rPr lang="en-US" sz="1050" dirty="0">
-                <a:solidFill>
-                  <a:srgbClr val="A1AEC2"/>
-                </a:solidFill>
-                <a:latin typeface="Arial" pitchFamily="34" charset="0"/>
-                <a:ea typeface="Arial" pitchFamily="34" charset="-122"/>
-                <a:cs typeface="Arial" pitchFamily="34" charset="-120"/>
-              </a:rPr>
-              <a:t>• Sin trazabilidad de CO₂ evitado.</a:t>
-            </a:r>
-            <a:endParaRPr lang="en-US" sz="1050" dirty="0"/>
-          </a:p>
-          <a:p>
-            <a:pPr indent="0" marL="0">
-              <a:lnSpc>
-                <a:spcPct val="115000"/>
-              </a:lnSpc>
-              <a:buNone/>
-            </a:pPr>
-            <a:endParaRPr lang="en-US" sz="1050" dirty="0"/>
-          </a:p>
-          <a:p>
-            <a:pPr indent="0" marL="0">
-              <a:lnSpc>
-                <a:spcPct val="115000"/>
-              </a:lnSpc>
-              <a:buNone/>
-            </a:pPr>
-            <a:r>
-              <a:rPr lang="en-US" sz="1050" dirty="0">
-                <a:solidFill>
-                  <a:srgbClr val="A1AEC2"/>
-                </a:solidFill>
-                <a:latin typeface="Arial" pitchFamily="34" charset="0"/>
-                <a:ea typeface="Arial" pitchFamily="34" charset="-122"/>
-                <a:cs typeface="Arial" pitchFamily="34" charset="-120"/>
-              </a:rPr>
-              <a:t>• Imposible proyectar producción futura.</a:t>
+              <a:t>• Sin trazabilidad de CO₂ evitado ni proyección de producción futura.</a:t>
             </a:r>
             <a:endParaRPr lang="en-US" sz="1050" dirty="0"/>
           </a:p>
@@ -3167,7 +3117,7 @@
                 <a:ea typeface="Arial" pitchFamily="34" charset="-122"/>
                 <a:cs typeface="Arial" pitchFamily="34" charset="-120"/>
               </a:rPr>
-              <a:t>10 · DEMOSTRACIÓN EN VIVO</a:t>
+              <a:t>10 · FUNCIONALIDAD (SEGURIDAD)</a:t>
             </a:r>
             <a:endParaRPr lang="en-US" sz="1200" dirty="0"/>
           </a:p>
@@ -3206,7 +3156,7 @@
                 <a:ea typeface="Arial" pitchFamily="34" charset="-122"/>
                 <a:cs typeface="Arial" pitchFamily="34" charset="-120"/>
               </a:rPr>
-              <a:t>Modelo SMA-SF (Seasonal Moving Average – Solar Forecast)</a:t>
+              <a:t>Cumplimiento Estricto OWASP Top 10:2025</a:t>
             </a:r>
             <a:endParaRPr lang="en-US" sz="2200" dirty="0"/>
           </a:p>
@@ -3221,7 +3171,7 @@
         <p:spPr>
           <a:xfrm>
             <a:off x="502920" y="1078992"/>
-            <a:ext cx="3657600" cy="274320"/>
+            <a:ext cx="4572000" cy="274320"/>
           </a:xfrm>
           <a:prstGeom prst="rect">
             <a:avLst/>
@@ -3245,7 +3195,7 @@
                 <a:ea typeface="Arial" pitchFamily="34" charset="-122"/>
                 <a:cs typeface="Arial" pitchFamily="34" charset="-120"/>
               </a:rPr>
-              <a:t>5:30 – 6:30 · Andy</a:t>
+              <a:t>Diapositiva de referencia · Carlos</a:t>
             </a:r>
             <a:endParaRPr lang="en-US" sz="1100" dirty="0"/>
           </a:p>
@@ -3330,7 +3280,7 @@
                 <a:ea typeface="Arial" pitchFamily="34" charset="-122"/>
                 <a:cs typeface="Arial" pitchFamily="34" charset="-120"/>
               </a:rPr>
-              <a:t>Orador: Andy</a:t>
+              <a:t>Orador: Carlos</a:t>
             </a:r>
             <a:endParaRPr lang="en-US" sz="1000" dirty="0"/>
           </a:p>
@@ -3369,7 +3319,7 @@
                 <a:ea typeface="Arial" pitchFamily="34" charset="-122"/>
                 <a:cs typeface="Arial" pitchFamily="34" charset="-120"/>
               </a:rPr>
-              <a:t>Funcionalidad (25%)</a:t>
+              <a:t>10 Controles Verificados por PR</a:t>
             </a:r>
             <a:endParaRPr lang="en-US" sz="1000" dirty="0"/>
           </a:p>
@@ -3384,11 +3334,11 @@
         <p:spPr>
           <a:xfrm>
             <a:off x="502920" y="1600200"/>
-            <a:ext cx="11201400" cy="1005840"/>
+            <a:ext cx="5532120" cy="1234440"/>
           </a:xfrm>
           <a:prstGeom prst="roundRect">
             <a:avLst>
-              <a:gd name="adj" fmla="val 7273"/>
+              <a:gd name="adj" fmla="val 5926"/>
             </a:avLst>
           </a:prstGeom>
           <a:solidFill>
@@ -3411,7 +3361,7 @@
         <p:spPr>
           <a:xfrm>
             <a:off x="667512" y="1709928"/>
-            <a:ext cx="10872216" cy="320040"/>
+            <a:ext cx="5202936" cy="320040"/>
           </a:xfrm>
           <a:prstGeom prst="rect">
             <a:avLst/>
@@ -3435,7 +3385,7 @@
                 <a:ea typeface="Arial" pitchFamily="34" charset="-122"/>
                 <a:cs typeface="Arial" pitchFamily="34" charset="-120"/>
               </a:rPr>
-              <a:t>Fórmula Predictiva Ponderada</a:t>
+              <a:t>A01 Access Control</a:t>
             </a:r>
             <a:endParaRPr lang="en-US" sz="1250" dirty="0"/>
           </a:p>
@@ -3450,7 +3400,7 @@
         <p:spPr>
           <a:xfrm>
             <a:off x="667512" y="2039112"/>
-            <a:ext cx="10872216" cy="457200"/>
+            <a:ext cx="5202936" cy="685800"/>
           </a:xfrm>
           <a:prstGeom prst="rect">
             <a:avLst/>
@@ -3477,7 +3427,7 @@
                 <a:ea typeface="Arial" pitchFamily="34" charset="-122"/>
                 <a:cs typeface="Arial" pitchFamily="34" charset="-120"/>
               </a:rPr>
-              <a:t>Base = 0.50·M(t-1) + 0.30·M(t-2) + 0.20·M(t-3)     →     Proyección = Base × F(estación)</a:t>
+              <a:t>auth + Policy en cada método. RBAC Admin/Operador/Visualizador.</a:t>
             </a:r>
             <a:endParaRPr lang="en-US" sz="1050" dirty="0"/>
           </a:p>
@@ -3491,12 +3441,12 @@
         </p:nvSpPr>
         <p:spPr>
           <a:xfrm>
-            <a:off x="502920" y="2743200"/>
-            <a:ext cx="5486400" cy="1371600"/>
+            <a:off x="6172200" y="1600200"/>
+            <a:ext cx="5532120" cy="1234440"/>
           </a:xfrm>
           <a:prstGeom prst="roundRect">
             <a:avLst>
-              <a:gd name="adj" fmla="val 5333"/>
+              <a:gd name="adj" fmla="val 5926"/>
             </a:avLst>
           </a:prstGeom>
           <a:solidFill>
@@ -3518,8 +3468,8 @@
         </p:nvSpPr>
         <p:spPr>
           <a:xfrm>
-            <a:off x="667512" y="2852928"/>
-            <a:ext cx="5157216" cy="320040"/>
+            <a:off x="6336792" y="1709928"/>
+            <a:ext cx="5202936" cy="320040"/>
           </a:xfrm>
           <a:prstGeom prst="rect">
             <a:avLst/>
@@ -3543,7 +3493,7 @@
                 <a:ea typeface="Arial" pitchFamily="34" charset="-122"/>
                 <a:cs typeface="Arial" pitchFamily="34" charset="-120"/>
               </a:rPr>
-              <a:t>Época Seca (Nov–Abr)</a:t>
+              <a:t>A02 Misconfiguration</a:t>
             </a:r>
             <a:endParaRPr lang="en-US" sz="1250" dirty="0"/>
           </a:p>
@@ -3557,8 +3507,8 @@
         </p:nvSpPr>
         <p:spPr>
           <a:xfrm>
-            <a:off x="667512" y="3182112"/>
-            <a:ext cx="5157216" cy="822960"/>
+            <a:off x="6336792" y="2039112"/>
+            <a:ext cx="5202936" cy="685800"/>
           </a:xfrm>
           <a:prstGeom prst="rect">
             <a:avLst/>
@@ -3585,7 +3535,7 @@
                 <a:ea typeface="Arial" pitchFamily="34" charset="-122"/>
                 <a:cs typeface="Arial" pitchFamily="34" charset="-120"/>
               </a:rPr>
-              <a:t>Factor = 1.20  (+20% radiación directa)</a:t>
+              <a:t>Cero secretos en código. Seeders leen de .env vía config/seed.php.</a:t>
             </a:r>
             <a:endParaRPr lang="en-US" sz="1050" dirty="0"/>
           </a:p>
@@ -3599,12 +3549,12 @@
         </p:nvSpPr>
         <p:spPr>
           <a:xfrm>
-            <a:off x="6217920" y="2743200"/>
-            <a:ext cx="5486400" cy="1371600"/>
+            <a:off x="502920" y="2971800"/>
+            <a:ext cx="5532120" cy="1234440"/>
           </a:xfrm>
           <a:prstGeom prst="roundRect">
             <a:avLst>
-              <a:gd name="adj" fmla="val 5333"/>
+              <a:gd name="adj" fmla="val 5926"/>
             </a:avLst>
           </a:prstGeom>
           <a:solidFill>
@@ -3626,8 +3576,8 @@
         </p:nvSpPr>
         <p:spPr>
           <a:xfrm>
-            <a:off x="6382512" y="2852928"/>
-            <a:ext cx="5157216" cy="320040"/>
+            <a:off x="667512" y="3081528"/>
+            <a:ext cx="5202936" cy="320040"/>
           </a:xfrm>
           <a:prstGeom prst="rect">
             <a:avLst/>
@@ -3651,7 +3601,7 @@
                 <a:ea typeface="Arial" pitchFamily="34" charset="-122"/>
                 <a:cs typeface="Arial" pitchFamily="34" charset="-120"/>
               </a:rPr>
-              <a:t>Época Lluviosa (May–Oct)</a:t>
+              <a:t>A04 Cryptographic Failures</a:t>
             </a:r>
             <a:endParaRPr lang="en-US" sz="1250" dirty="0"/>
           </a:p>
@@ -3665,8 +3615,8 @@
         </p:nvSpPr>
         <p:spPr>
           <a:xfrm>
-            <a:off x="6382512" y="3182112"/>
-            <a:ext cx="5157216" cy="822960"/>
+            <a:off x="667512" y="3410712"/>
+            <a:ext cx="5202936" cy="685800"/>
           </a:xfrm>
           <a:prstGeom prst="rect">
             <a:avLst/>
@@ -3693,7 +3643,7 @@
                 <a:ea typeface="Arial" pitchFamily="34" charset="-122"/>
                 <a:cs typeface="Arial" pitchFamily="34" charset="-120"/>
               </a:rPr>
-              <a:t>Factor = 0.88  (–12% cobertura nubosa)</a:t>
+              <a:t>Bcrypt rounds 12. hash_equals() en comparación de API keys.</a:t>
             </a:r>
             <a:endParaRPr lang="en-US" sz="1050" dirty="0"/>
           </a:p>
@@ -3707,12 +3657,12 @@
         </p:nvSpPr>
         <p:spPr>
           <a:xfrm>
-            <a:off x="502920" y="4251960"/>
-            <a:ext cx="11201400" cy="1371600"/>
+            <a:off x="6172200" y="2971800"/>
+            <a:ext cx="5532120" cy="1234440"/>
           </a:xfrm>
           <a:prstGeom prst="roundRect">
             <a:avLst>
-              <a:gd name="adj" fmla="val 5333"/>
+              <a:gd name="adj" fmla="val 5926"/>
             </a:avLst>
           </a:prstGeom>
           <a:solidFill>
@@ -3734,8 +3684,8 @@
         </p:nvSpPr>
         <p:spPr>
           <a:xfrm>
-            <a:off x="667512" y="4361688"/>
-            <a:ext cx="10872216" cy="320040"/>
+            <a:off x="6336792" y="3081528"/>
+            <a:ext cx="5202936" cy="320040"/>
           </a:xfrm>
           <a:prstGeom prst="rect">
             <a:avLst/>
@@ -3759,7 +3709,7 @@
                 <a:ea typeface="Arial" pitchFamily="34" charset="-122"/>
                 <a:cs typeface="Arial" pitchFamily="34" charset="-120"/>
               </a:rPr>
-              <a:t>Fallback Nominal y Verificación</a:t>
+              <a:t>A05 Injection</a:t>
             </a:r>
             <a:endParaRPr lang="en-US" sz="1250" dirty="0"/>
           </a:p>
@@ -3773,8 +3723,8 @@
         </p:nvSpPr>
         <p:spPr>
           <a:xfrm>
-            <a:off x="667512" y="4690872"/>
-            <a:ext cx="10872216" cy="822960"/>
+            <a:off x="6336792" y="3410712"/>
+            <a:ext cx="5202936" cy="685800"/>
           </a:xfrm>
           <a:prstGeom prst="rect">
             <a:avLst/>
@@ -3801,7 +3751,223 @@
                 <a:ea typeface="Arial" pitchFamily="34" charset="-122"/>
                 <a:cs typeface="Arial" pitchFamily="34" charset="-120"/>
               </a:rPr>
-              <a:t>Sin 3 mediciones históricas → Capacidad (kW) × 140 HSP. En /forecasts se contrasta la proyección contra el dato real histórico registrado — nunca una caja negra.</a:t>
+              <a:t>FormRequests estrictos. 100% Eloquent ORM. Cero SQL concatenado.</a:t>
+            </a:r>
+            <a:endParaRPr lang="en-US" sz="1050" dirty="0"/>
+          </a:p>
+        </p:txBody>
+      </p:sp>
+      <p:sp>
+        <p:nvSpPr>
+          <p:cNvPr id="23" name="Shape 20"/>
+          <p:cNvSpPr/>
+          <p:nvPr/>
+        </p:nvSpPr>
+        <p:spPr>
+          <a:xfrm>
+            <a:off x="502920" y="4343400"/>
+            <a:ext cx="5532120" cy="1234440"/>
+          </a:xfrm>
+          <a:prstGeom prst="roundRect">
+            <a:avLst>
+              <a:gd name="adj" fmla="val 5926"/>
+            </a:avLst>
+          </a:prstGeom>
+          <a:solidFill>
+            <a:srgbClr val="F8FAFC"/>
+          </a:solidFill>
+          <a:ln w="12700">
+            <a:solidFill>
+              <a:srgbClr val="E2E8F0"/>
+            </a:solidFill>
+            <a:prstDash val="solid"/>
+          </a:ln>
+        </p:spPr>
+      </p:sp>
+      <p:sp>
+        <p:nvSpPr>
+          <p:cNvPr id="24" name="Text 21"/>
+          <p:cNvSpPr/>
+          <p:nvPr/>
+        </p:nvSpPr>
+        <p:spPr>
+          <a:xfrm>
+            <a:off x="667512" y="4453128"/>
+            <a:ext cx="5202936" cy="320040"/>
+          </a:xfrm>
+          <a:prstGeom prst="rect">
+            <a:avLst/>
+          </a:prstGeom>
+          <a:noFill/>
+          <a:ln/>
+        </p:spPr>
+        <p:txBody>
+          <a:bodyPr wrap="square" rtlCol="0" anchor="ctr"/>
+          <a:lstStyle/>
+          <a:p>
+            <a:pPr indent="0" marL="0">
+              <a:buNone/>
+            </a:pPr>
+            <a:r>
+              <a:rPr lang="en-US" sz="1250" b="1" dirty="0">
+                <a:solidFill>
+                  <a:srgbClr val="A65A00"/>
+                </a:solidFill>
+                <a:latin typeface="Arial" pitchFamily="34" charset="0"/>
+                <a:ea typeface="Arial" pitchFamily="34" charset="-122"/>
+                <a:cs typeface="Arial" pitchFamily="34" charset="-120"/>
+              </a:rPr>
+              <a:t>A06 Insecure Design</a:t>
+            </a:r>
+            <a:endParaRPr lang="en-US" sz="1250" dirty="0"/>
+          </a:p>
+        </p:txBody>
+      </p:sp>
+      <p:sp>
+        <p:nvSpPr>
+          <p:cNvPr id="25" name="Text 22"/>
+          <p:cNvSpPr/>
+          <p:nvPr/>
+        </p:nvSpPr>
+        <p:spPr>
+          <a:xfrm>
+            <a:off x="667512" y="4782312"/>
+            <a:ext cx="5202936" cy="685800"/>
+          </a:xfrm>
+          <a:prstGeom prst="rect">
+            <a:avLst/>
+          </a:prstGeom>
+          <a:noFill/>
+          <a:ln/>
+        </p:spPr>
+        <p:txBody>
+          <a:bodyPr wrap="square" rtlCol="0" anchor="t"/>
+          <a:lstStyle/>
+          <a:p>
+            <a:pPr indent="0" marL="0">
+              <a:lnSpc>
+                <a:spcPct val="115000"/>
+              </a:lnSpc>
+              <a:buNone/>
+            </a:pPr>
+            <a:r>
+              <a:rPr lang="en-US" sz="1050" dirty="0">
+                <a:solidFill>
+                  <a:srgbClr val="526175"/>
+                </a:solidFill>
+                <a:latin typeface="Arial" pitchFamily="34" charset="0"/>
+                <a:ea typeface="Arial" pitchFamily="34" charset="-122"/>
+                <a:cs typeface="Arial" pitchFamily="34" charset="-120"/>
+              </a:rPr>
+              <a:t>lockForUpdate contra condiciones de carrera. Rate limiting login/API.</a:t>
+            </a:r>
+            <a:endParaRPr lang="en-US" sz="1050" dirty="0"/>
+          </a:p>
+        </p:txBody>
+      </p:sp>
+      <p:sp>
+        <p:nvSpPr>
+          <p:cNvPr id="26" name="Shape 23"/>
+          <p:cNvSpPr/>
+          <p:nvPr/>
+        </p:nvSpPr>
+        <p:spPr>
+          <a:xfrm>
+            <a:off x="6172200" y="4343400"/>
+            <a:ext cx="5532120" cy="1234440"/>
+          </a:xfrm>
+          <a:prstGeom prst="roundRect">
+            <a:avLst>
+              <a:gd name="adj" fmla="val 5926"/>
+            </a:avLst>
+          </a:prstGeom>
+          <a:solidFill>
+            <a:srgbClr val="F8FAFC"/>
+          </a:solidFill>
+          <a:ln w="12700">
+            <a:solidFill>
+              <a:srgbClr val="E2E8F0"/>
+            </a:solidFill>
+            <a:prstDash val="solid"/>
+          </a:ln>
+        </p:spPr>
+      </p:sp>
+      <p:sp>
+        <p:nvSpPr>
+          <p:cNvPr id="27" name="Text 24"/>
+          <p:cNvSpPr/>
+          <p:nvPr/>
+        </p:nvSpPr>
+        <p:spPr>
+          <a:xfrm>
+            <a:off x="6336792" y="4453128"/>
+            <a:ext cx="5202936" cy="320040"/>
+          </a:xfrm>
+          <a:prstGeom prst="rect">
+            <a:avLst/>
+          </a:prstGeom>
+          <a:noFill/>
+          <a:ln/>
+        </p:spPr>
+        <p:txBody>
+          <a:bodyPr wrap="square" rtlCol="0" anchor="ctr"/>
+          <a:lstStyle/>
+          <a:p>
+            <a:pPr indent="0" marL="0">
+              <a:buNone/>
+            </a:pPr>
+            <a:r>
+              <a:rPr lang="en-US" sz="1250" b="1" dirty="0">
+                <a:solidFill>
+                  <a:srgbClr val="A65A00"/>
+                </a:solidFill>
+                <a:latin typeface="Arial" pitchFamily="34" charset="0"/>
+                <a:ea typeface="Arial" pitchFamily="34" charset="-122"/>
+                <a:cs typeface="Arial" pitchFamily="34" charset="-120"/>
+              </a:rPr>
+              <a:t>A09 Logging &amp; Alerting</a:t>
+            </a:r>
+            <a:endParaRPr lang="en-US" sz="1250" dirty="0"/>
+          </a:p>
+        </p:txBody>
+      </p:sp>
+      <p:sp>
+        <p:nvSpPr>
+          <p:cNvPr id="28" name="Text 25"/>
+          <p:cNvSpPr/>
+          <p:nvPr/>
+        </p:nvSpPr>
+        <p:spPr>
+          <a:xfrm>
+            <a:off x="6336792" y="4782312"/>
+            <a:ext cx="5202936" cy="685800"/>
+          </a:xfrm>
+          <a:prstGeom prst="rect">
+            <a:avLst/>
+          </a:prstGeom>
+          <a:noFill/>
+          <a:ln/>
+        </p:spPr>
+        <p:txBody>
+          <a:bodyPr wrap="square" rtlCol="0" anchor="t"/>
+          <a:lstStyle/>
+          <a:p>
+            <a:pPr indent="0" marL="0">
+              <a:lnSpc>
+                <a:spcPct val="115000"/>
+              </a:lnSpc>
+              <a:buNone/>
+            </a:pPr>
+            <a:r>
+              <a:rPr lang="en-US" sz="1050" dirty="0">
+                <a:solidFill>
+                  <a:srgbClr val="526175"/>
+                </a:solidFill>
+                <a:latin typeface="Arial" pitchFamily="34" charset="0"/>
+                <a:ea typeface="Arial" pitchFamily="34" charset="-122"/>
+                <a:cs typeface="Arial" pitchFamily="34" charset="-120"/>
+              </a:rPr>
+              <a:t>audit_logs con IP y User-Agent en cada evento sensible.</a:t>
             </a:r>
             <a:endParaRPr lang="en-US" sz="1050" dirty="0"/>
           </a:p>
@@ -3915,7 +4081,7 @@
                 <a:ea typeface="Arial" pitchFamily="34" charset="-122"/>
                 <a:cs typeface="Arial" pitchFamily="34" charset="-120"/>
               </a:rPr>
-              <a:t>11 · ORIGINALIDAD + USO DE IA (20% + 20%)</a:t>
+              <a:t>11 · EVIDENCIA EN VIVO</a:t>
             </a:r>
             <a:endParaRPr lang="en-US" sz="1200" dirty="0"/>
           </a:p>
@@ -3954,7 +4120,7 @@
                 <a:ea typeface="Arial" pitchFamily="34" charset="-122"/>
                 <a:cs typeface="Arial" pitchFamily="34" charset="-120"/>
               </a:rPr>
-              <a:t>La IA como Usuario Activo del Sistema</a:t>
+              <a:t>Control de Acceso Real: Error 403 por Rol</a:t>
             </a:r>
             <a:endParaRPr lang="en-US" sz="2200" dirty="0"/>
           </a:p>
@@ -3969,7 +4135,7 @@
         <p:spPr>
           <a:xfrm>
             <a:off x="502920" y="1078992"/>
-            <a:ext cx="3657600" cy="274320"/>
+            <a:ext cx="4572000" cy="274320"/>
           </a:xfrm>
           <a:prstGeom prst="rect">
             <a:avLst/>
@@ -3993,7 +4159,7 @@
                 <a:ea typeface="Arial" pitchFamily="34" charset="-122"/>
                 <a:cs typeface="Arial" pitchFamily="34" charset="-120"/>
               </a:rPr>
-              <a:t>6:30 – 7:15 · Carlos</a:t>
+              <a:t>Demo de 30 segundos · Carlos</a:t>
             </a:r>
             <a:endParaRPr lang="en-US" sz="1100" dirty="0"/>
           </a:p>
@@ -4117,7 +4283,7 @@
                 <a:ea typeface="Arial" pitchFamily="34" charset="-122"/>
                 <a:cs typeface="Arial" pitchFamily="34" charset="-120"/>
               </a:rPr>
-              <a:t>Servidor MCP Propio</a:t>
+              <a:t>OWASP A01 + A09</a:t>
             </a:r>
             <a:endParaRPr lang="en-US" sz="1000" dirty="0"/>
           </a:p>
@@ -4125,14 +4291,166 @@
       </p:sp>
       <p:sp>
         <p:nvSpPr>
-          <p:cNvPr id="11" name="Text 8"/>
-          <p:cNvSpPr/>
-          <p:nvPr/>
-        </p:nvSpPr>
-        <p:spPr>
-          <a:xfrm>
-            <a:off x="594360" y="1600200"/>
-            <a:ext cx="11002975" cy="4572000"/>
+          <p:cNvPr id="11" name="Shape 8"/>
+          <p:cNvSpPr/>
+          <p:nvPr/>
+        </p:nvSpPr>
+        <p:spPr>
+          <a:xfrm>
+            <a:off x="502920" y="1600200"/>
+            <a:ext cx="6675120" cy="4160520"/>
+          </a:xfrm>
+          <a:prstGeom prst="roundRect">
+            <a:avLst>
+              <a:gd name="adj" fmla="val 1099"/>
+            </a:avLst>
+          </a:prstGeom>
+          <a:ln w="19050">
+            <a:solidFill>
+              <a:srgbClr val="FBBF24"/>
+            </a:solidFill>
+            <a:prstDash val="solid"/>
+          </a:ln>
+        </p:spPr>
+      </p:sp>
+      <p:pic>
+        <p:nvPicPr>
+          <p:cNvPr id="12" name="Image 1" descr="C:\Users\ACER NITRO\Desktop\DIA DEL PROGRAMADOR IA\docs\evidencias\pptx\09-error-403.png">    </p:cNvPr>
+          <p:cNvPicPr>
+            <a:picLocks noChangeAspect="1"/>
+          </p:cNvPicPr>
+          <p:nvPr/>
+        </p:nvPicPr>
+        <p:blipFill>
+          <a:blip r:embed="rId2"/>
+          <a:srcRect l="0" r="0" t="0" b="0"/>
+          <a:stretch/>
+        </p:blipFill>
+        <p:spPr>
+          <a:xfrm>
+            <a:off x="557784" y="1655064"/>
+            <a:ext cx="6565392" cy="3776472"/>
+          </a:xfrm>
+          <a:prstGeom prst="rect">
+            <a:avLst/>
+          </a:prstGeom>
+        </p:spPr>
+      </p:pic>
+      <p:sp>
+        <p:nvSpPr>
+          <p:cNvPr id="13" name="Text 9"/>
+          <p:cNvSpPr/>
+          <p:nvPr/>
+        </p:nvSpPr>
+        <p:spPr>
+          <a:xfrm>
+            <a:off x="594360" y="5449824"/>
+            <a:ext cx="6492240" cy="274320"/>
+          </a:xfrm>
+          <a:prstGeom prst="rect">
+            <a:avLst/>
+          </a:prstGeom>
+          <a:noFill/>
+          <a:ln/>
+        </p:spPr>
+        <p:txBody>
+          <a:bodyPr wrap="square" rtlCol="0" anchor="ctr"/>
+          <a:lstStyle/>
+          <a:p>
+            <a:pPr indent="0" marL="0">
+              <a:buNone/>
+            </a:pPr>
+            <a:r>
+              <a:rPr lang="en-US" sz="950" i="1" dirty="0">
+                <a:solidFill>
+                  <a:srgbClr val="A1AEC2"/>
+                </a:solidFill>
+                <a:latin typeface="Arial" pitchFamily="34" charset="0"/>
+                <a:ea typeface="Arial" pitchFamily="34" charset="-122"/>
+                <a:cs typeface="Arial" pitchFamily="34" charset="-120"/>
+              </a:rPr>
+              <a:t>Usuario Visualizador intentando crear una granja: acceso denegado</a:t>
+            </a:r>
+            <a:endParaRPr lang="en-US" sz="950" dirty="0"/>
+          </a:p>
+        </p:txBody>
+      </p:sp>
+      <p:sp>
+        <p:nvSpPr>
+          <p:cNvPr id="14" name="Shape 10"/>
+          <p:cNvSpPr/>
+          <p:nvPr/>
+        </p:nvSpPr>
+        <p:spPr>
+          <a:xfrm>
+            <a:off x="7360920" y="1600200"/>
+            <a:ext cx="4343400" cy="1965960"/>
+          </a:xfrm>
+          <a:prstGeom prst="roundRect">
+            <a:avLst>
+              <a:gd name="adj" fmla="val 3721"/>
+            </a:avLst>
+          </a:prstGeom>
+          <a:solidFill>
+            <a:srgbClr val="182131"/>
+          </a:solidFill>
+          <a:ln w="12700">
+            <a:solidFill>
+              <a:srgbClr val="263143"/>
+            </a:solidFill>
+            <a:prstDash val="solid"/>
+          </a:ln>
+        </p:spPr>
+      </p:sp>
+      <p:sp>
+        <p:nvSpPr>
+          <p:cNvPr id="15" name="Text 11"/>
+          <p:cNvSpPr/>
+          <p:nvPr/>
+        </p:nvSpPr>
+        <p:spPr>
+          <a:xfrm>
+            <a:off x="7525512" y="1709928"/>
+            <a:ext cx="4014216" cy="320040"/>
+          </a:xfrm>
+          <a:prstGeom prst="rect">
+            <a:avLst/>
+          </a:prstGeom>
+          <a:noFill/>
+          <a:ln/>
+        </p:spPr>
+        <p:txBody>
+          <a:bodyPr wrap="square" rtlCol="0" anchor="ctr"/>
+          <a:lstStyle/>
+          <a:p>
+            <a:pPr indent="0" marL="0">
+              <a:buNone/>
+            </a:pPr>
+            <a:r>
+              <a:rPr lang="en-US" sz="1250" b="1" dirty="0">
+                <a:solidFill>
+                  <a:srgbClr val="FBBF24"/>
+                </a:solidFill>
+                <a:latin typeface="Arial" pitchFamily="34" charset="0"/>
+                <a:ea typeface="Arial" pitchFamily="34" charset="-122"/>
+                <a:cs typeface="Arial" pitchFamily="34" charset="-120"/>
+              </a:rPr>
+              <a:t>Lo que pasó</a:t>
+            </a:r>
+            <a:endParaRPr lang="en-US" sz="1250" dirty="0"/>
+          </a:p>
+        </p:txBody>
+      </p:sp>
+      <p:sp>
+        <p:nvSpPr>
+          <p:cNvPr id="16" name="Text 12"/>
+          <p:cNvSpPr/>
+          <p:nvPr/>
+        </p:nvSpPr>
+        <p:spPr>
+          <a:xfrm>
+            <a:off x="7525512" y="2039112"/>
+            <a:ext cx="4014216" cy="1417320"/>
           </a:xfrm>
           <a:prstGeom prst="rect">
             <a:avLst/>
@@ -4144,88 +4462,132 @@
           <a:bodyPr wrap="square" rtlCol="0" anchor="t"/>
           <a:lstStyle/>
           <a:p>
-            <a:pPr marL="342900" indent="-342900">
+            <a:pPr indent="0" marL="0">
               <a:lnSpc>
-                <a:spcPct val="125000"/>
+                <a:spcPct val="115000"/>
               </a:lnSpc>
-              <a:buSzPct val="100000"/>
-              <a:buChar char="•"/>
-            </a:pPr>
-            <a:r>
-              <a:rPr lang="en-US" sz="1500" dirty="0">
-                <a:solidFill>
-                  <a:srgbClr val="EDF2FA"/>
-                </a:solidFill>
-                <a:latin typeface="Arial" pitchFamily="34" charset="0"/>
-                <a:ea typeface="Arial" pitchFamily="34" charset="-122"/>
-                <a:cs typeface="Arial" pitchFamily="34" charset="-120"/>
-              </a:rPr>
-              <a:t>Servidor propio en Node.js (mcp-server/) con @modelcontextprotocol/sdk.</a:t>
-            </a:r>
-            <a:endParaRPr lang="en-US" sz="1500" dirty="0"/>
-          </a:p>
-          <a:p>
-            <a:pPr marL="342900" indent="-342900">
+              <a:buNone/>
+            </a:pPr>
+            <a:r>
+              <a:rPr lang="en-US" sz="1050" dirty="0">
+                <a:solidFill>
+                  <a:srgbClr val="A1AEC2"/>
+                </a:solidFill>
+                <a:latin typeface="Arial" pitchFamily="34" charset="0"/>
+                <a:ea typeface="Arial" pitchFamily="34" charset="-122"/>
+                <a:cs typeface="Arial" pitchFamily="34" charset="-120"/>
+              </a:rPr>
+              <a:t>El usuario evaluador@umg.edu.gt (rol Visualizador) navegó directamente a /farms/create escribiendo la URL. El sistema lo bloqueó aunque conociera la ruta exacta.</a:t>
+            </a:r>
+            <a:endParaRPr lang="en-US" sz="1050" dirty="0"/>
+          </a:p>
+        </p:txBody>
+      </p:sp>
+      <p:sp>
+        <p:nvSpPr>
+          <p:cNvPr id="17" name="Shape 13"/>
+          <p:cNvSpPr/>
+          <p:nvPr/>
+        </p:nvSpPr>
+        <p:spPr>
+          <a:xfrm>
+            <a:off x="7360920" y="3749040"/>
+            <a:ext cx="4343400" cy="2011680"/>
+          </a:xfrm>
+          <a:prstGeom prst="roundRect">
+            <a:avLst>
+              <a:gd name="adj" fmla="val 3636"/>
+            </a:avLst>
+          </a:prstGeom>
+          <a:solidFill>
+            <a:srgbClr val="182131"/>
+          </a:solidFill>
+          <a:ln w="12700">
+            <a:solidFill>
+              <a:srgbClr val="263143"/>
+            </a:solidFill>
+            <a:prstDash val="solid"/>
+          </a:ln>
+        </p:spPr>
+      </p:sp>
+      <p:sp>
+        <p:nvSpPr>
+          <p:cNvPr id="18" name="Text 14"/>
+          <p:cNvSpPr/>
+          <p:nvPr/>
+        </p:nvSpPr>
+        <p:spPr>
+          <a:xfrm>
+            <a:off x="7525512" y="3858768"/>
+            <a:ext cx="4014216" cy="320040"/>
+          </a:xfrm>
+          <a:prstGeom prst="rect">
+            <a:avLst/>
+          </a:prstGeom>
+          <a:noFill/>
+          <a:ln/>
+        </p:spPr>
+        <p:txBody>
+          <a:bodyPr wrap="square" rtlCol="0" anchor="ctr"/>
+          <a:lstStyle/>
+          <a:p>
+            <a:pPr indent="0" marL="0">
+              <a:buNone/>
+            </a:pPr>
+            <a:r>
+              <a:rPr lang="en-US" sz="1250" b="1" dirty="0">
+                <a:solidFill>
+                  <a:srgbClr val="FBBF24"/>
+                </a:solidFill>
+                <a:latin typeface="Arial" pitchFamily="34" charset="0"/>
+                <a:ea typeface="Arial" pitchFamily="34" charset="-122"/>
+                <a:cs typeface="Arial" pitchFamily="34" charset="-120"/>
+              </a:rPr>
+              <a:t>Lo que queda registrado</a:t>
+            </a:r>
+            <a:endParaRPr lang="en-US" sz="1250" dirty="0"/>
+          </a:p>
+        </p:txBody>
+      </p:sp>
+      <p:sp>
+        <p:nvSpPr>
+          <p:cNvPr id="19" name="Text 15"/>
+          <p:cNvSpPr/>
+          <p:nvPr/>
+        </p:nvSpPr>
+        <p:spPr>
+          <a:xfrm>
+            <a:off x="7525512" y="4187952"/>
+            <a:ext cx="4014216" cy="1463040"/>
+          </a:xfrm>
+          <a:prstGeom prst="rect">
+            <a:avLst/>
+          </a:prstGeom>
+          <a:noFill/>
+          <a:ln/>
+        </p:spPr>
+        <p:txBody>
+          <a:bodyPr wrap="square" rtlCol="0" anchor="t"/>
+          <a:lstStyle/>
+          <a:p>
+            <a:pPr indent="0" marL="0">
               <a:lnSpc>
-                <a:spcPct val="125000"/>
+                <a:spcPct val="115000"/>
               </a:lnSpc>
-              <a:buSzPct val="100000"/>
-              <a:buChar char="•"/>
-            </a:pPr>
-            <a:r>
-              <a:rPr lang="en-US" sz="1500" dirty="0">
-                <a:solidFill>
-                  <a:srgbClr val="EDF2FA"/>
-                </a:solidFill>
-                <a:latin typeface="Arial" pitchFamily="34" charset="0"/>
-                <a:ea typeface="Arial" pitchFamily="34" charset="-122"/>
-                <a:cs typeface="Arial" pitchFamily="34" charset="-120"/>
-              </a:rPr>
-              <a:t>3 herramientas: kin_solar_statistics, kin_solar_list_farms, kin_solar_register_generation.</a:t>
-            </a:r>
-            <a:endParaRPr lang="en-US" sz="1500" dirty="0"/>
-          </a:p>
-          <a:p>
-            <a:pPr marL="342900" indent="-342900">
-              <a:lnSpc>
-                <a:spcPct val="125000"/>
-              </a:lnSpc>
-              <a:buSzPct val="100000"/>
-              <a:buChar char="•"/>
-            </a:pPr>
-            <a:r>
-              <a:rPr lang="en-US" sz="1500" dirty="0">
-                <a:solidFill>
-                  <a:srgbClr val="EDF2FA"/>
-                </a:solidFill>
-                <a:latin typeface="Arial" pitchFamily="34" charset="0"/>
-                <a:ea typeface="Arial" pitchFamily="34" charset="-122"/>
-                <a:cs typeface="Arial" pitchFamily="34" charset="-120"/>
-              </a:rPr>
-              <a:t>Demo: "Registra una medición de 45,000 kWh para la Granja Villa Nueva" → la IA invoca la herramienta → se autentica con X-MCP-Key → se refleja al instante en el Dashboard.</a:t>
-            </a:r>
-            <a:endParaRPr lang="en-US" sz="1500" dirty="0"/>
-          </a:p>
-          <a:p>
-            <a:pPr marL="342900" indent="-342900">
-              <a:lnSpc>
-                <a:spcPct val="125000"/>
-              </a:lnSpc>
-              <a:buSzPct val="100000"/>
-              <a:buChar char="•"/>
-            </a:pPr>
-            <a:r>
-              <a:rPr lang="en-US" sz="1500" dirty="0">
-                <a:solidFill>
-                  <a:srgbClr val="EDF2FA"/>
-                </a:solidFill>
-                <a:latin typeface="Arial" pitchFamily="34" charset="0"/>
-                <a:ea typeface="Arial" pitchFamily="34" charset="-122"/>
-                <a:cs typeface="Arial" pitchFamily="34" charset="-120"/>
-              </a:rPr>
-              <a:t>Trazabilidad total: todo cambio queda en audit_logs, atribuido a mcp-agent@kinsolar.internal.</a:t>
-            </a:r>
-            <a:endParaRPr lang="en-US" sz="1500" dirty="0"/>
+              <a:buNone/>
+            </a:pPr>
+            <a:r>
+              <a:rPr lang="en-US" sz="1050" dirty="0">
+                <a:solidFill>
+                  <a:srgbClr val="A1AEC2"/>
+                </a:solidFill>
+                <a:latin typeface="Arial" pitchFamily="34" charset="0"/>
+                <a:ea typeface="Arial" pitchFamily="34" charset="-122"/>
+                <a:cs typeface="Arial" pitchFamily="34" charset="-120"/>
+              </a:rPr>
+              <a:t>El intento se guarda en audit_logs con usuario, IP, User-Agent y timestamp exacto — control A09 de OWASP Top 10:2025, verificable en producción.</a:t>
+            </a:r>
+            <a:endParaRPr lang="en-US" sz="1050" dirty="0"/>
           </a:p>
         </p:txBody>
       </p:sp>
@@ -4337,7 +4699,7 @@
                 <a:ea typeface="Arial" pitchFamily="34" charset="-122"/>
                 <a:cs typeface="Arial" pitchFamily="34" charset="-120"/>
               </a:rPr>
-              <a:t>12 · ORIGINALIDAD + UI/UX</a:t>
+              <a:t>12 · USO DE INTELIGENCIA ARTIFICIAL (20%)</a:t>
             </a:r>
             <a:endParaRPr lang="en-US" sz="1200" dirty="0"/>
           </a:p>
@@ -4376,7 +4738,7 @@
                 <a:ea typeface="Arial" pitchFamily="34" charset="-122"/>
                 <a:cs typeface="Arial" pitchFamily="34" charset="-120"/>
               </a:rPr>
-              <a:t>Lo que Nadie nos Pidió, pero Construimos</a:t>
+              <a:t>Desarrollo Incremental y Disciplinado con 5 Agentes de IA</a:t>
             </a:r>
             <a:endParaRPr lang="en-US" sz="2200" dirty="0"/>
           </a:p>
@@ -4391,7 +4753,7 @@
         <p:spPr>
           <a:xfrm>
             <a:off x="502920" y="1078992"/>
-            <a:ext cx="3657600" cy="274320"/>
+            <a:ext cx="4572000" cy="274320"/>
           </a:xfrm>
           <a:prstGeom prst="rect">
             <a:avLst/>
@@ -4415,7 +4777,7 @@
                 <a:ea typeface="Arial" pitchFamily="34" charset="-122"/>
                 <a:cs typeface="Arial" pitchFamily="34" charset="-120"/>
               </a:rPr>
-              <a:t>7:15 – 8:00 · Andy</a:t>
+              <a:t>Diapositiva de referencia · Carlos</a:t>
             </a:r>
             <a:endParaRPr lang="en-US" sz="1100" dirty="0"/>
           </a:p>
@@ -4500,7 +4862,7 @@
                 <a:ea typeface="Arial" pitchFamily="34" charset="-122"/>
                 <a:cs typeface="Arial" pitchFamily="34" charset="-120"/>
               </a:rPr>
-              <a:t>Orador: Andy</a:t>
+              <a:t>Orador: Carlos</a:t>
             </a:r>
             <a:endParaRPr lang="en-US" sz="1000" dirty="0"/>
           </a:p>
@@ -4539,7 +4901,7 @@
                 <a:ea typeface="Arial" pitchFamily="34" charset="-122"/>
                 <a:cs typeface="Arial" pitchFamily="34" charset="-120"/>
               </a:rPr>
-              <a:t>Creatividad y Valor Añadido</a:t>
+              <a:t>Metodología del Equipo</a:t>
             </a:r>
             <a:endParaRPr lang="en-US" sz="1000" dirty="0"/>
           </a:p>
@@ -4554,11 +4916,11 @@
         <p:spPr>
           <a:xfrm>
             <a:off x="502920" y="1600200"/>
-            <a:ext cx="3657600" cy="1600200"/>
+            <a:ext cx="3566160" cy="1737360"/>
           </a:xfrm>
           <a:prstGeom prst="roundRect">
             <a:avLst>
-              <a:gd name="adj" fmla="val 4571"/>
+              <a:gd name="adj" fmla="val 4211"/>
             </a:avLst>
           </a:prstGeom>
           <a:solidFill>
@@ -4581,7 +4943,7 @@
         <p:spPr>
           <a:xfrm>
             <a:off x="667512" y="1709928"/>
-            <a:ext cx="3328416" cy="320040"/>
+            <a:ext cx="3236976" cy="320040"/>
           </a:xfrm>
           <a:prstGeom prst="rect">
             <a:avLst/>
@@ -4605,7 +4967,7 @@
                 <a:ea typeface="Arial" pitchFamily="34" charset="-122"/>
                 <a:cs typeface="Arial" pitchFamily="34" charset="-120"/>
               </a:rPr>
-              <a:t>Laboratorio SCADA IoT</a:t>
+              <a:t>5 Agentes en Paralelo</a:t>
             </a:r>
             <a:endParaRPr lang="en-US" sz="1250" dirty="0"/>
           </a:p>
@@ -4620,7 +4982,7 @@
         <p:spPr>
           <a:xfrm>
             <a:off x="667512" y="2039112"/>
-            <a:ext cx="3328416" cy="1051560"/>
+            <a:ext cx="3236976" cy="1188720"/>
           </a:xfrm>
           <a:prstGeom prst="rect">
             <a:avLst/>
@@ -4647,10 +5009,50 @@
                 <a:ea typeface="Arial" pitchFamily="34" charset="-122"/>
                 <a:cs typeface="Arial" pitchFamily="34" charset="-120"/>
               </a:rPr>
-              <a:t>Simula fallas de inversores en vivo, con osciloscopio visual.</a:t>
+              <a:t>Claude Code ×2 (Andy y Carlos)</a:t>
             </a:r>
             <a:endParaRPr lang="en-US" sz="1050" dirty="0"/>
           </a:p>
+          <a:p>
+            <a:pPr indent="0" marL="0">
+              <a:lnSpc>
+                <a:spcPct val="115000"/>
+              </a:lnSpc>
+              <a:buNone/>
+            </a:pPr>
+            <a:r>
+              <a:rPr lang="en-US" sz="1050" dirty="0">
+                <a:solidFill>
+                  <a:srgbClr val="526175"/>
+                </a:solidFill>
+                <a:latin typeface="Arial" pitchFamily="34" charset="0"/>
+                <a:ea typeface="Arial" pitchFamily="34" charset="-122"/>
+                <a:cs typeface="Arial" pitchFamily="34" charset="-120"/>
+              </a:rPr>
+              <a:t>Codex (Carlos)</a:t>
+            </a:r>
+            <a:endParaRPr lang="en-US" sz="1050" dirty="0"/>
+          </a:p>
+          <a:p>
+            <a:pPr indent="0" marL="0">
+              <a:lnSpc>
+                <a:spcPct val="115000"/>
+              </a:lnSpc>
+              <a:buNone/>
+            </a:pPr>
+            <a:r>
+              <a:rPr lang="en-US" sz="1050" dirty="0">
+                <a:solidFill>
+                  <a:srgbClr val="526175"/>
+                </a:solidFill>
+                <a:latin typeface="Arial" pitchFamily="34" charset="0"/>
+                <a:ea typeface="Arial" pitchFamily="34" charset="-122"/>
+                <a:cs typeface="Arial" pitchFamily="34" charset="-120"/>
+              </a:rPr>
+              <a:t>Antigravity ×2 (Andy y Carlos)</a:t>
+            </a:r>
+            <a:endParaRPr lang="en-US" sz="1050" dirty="0"/>
+          </a:p>
         </p:txBody>
       </p:sp>
       <p:sp>
@@ -4661,12 +5063,12 @@
         </p:nvSpPr>
         <p:spPr>
           <a:xfrm>
-            <a:off x="4343400" y="1600200"/>
-            <a:ext cx="3657600" cy="1600200"/>
+            <a:off x="4251960" y="1600200"/>
+            <a:ext cx="3566160" cy="1737360"/>
           </a:xfrm>
           <a:prstGeom prst="roundRect">
             <a:avLst>
-              <a:gd name="adj" fmla="val 4571"/>
+              <a:gd name="adj" fmla="val 4211"/>
             </a:avLst>
           </a:prstGeom>
           <a:solidFill>
@@ -4688,8 +5090,8 @@
         </p:nvSpPr>
         <p:spPr>
           <a:xfrm>
-            <a:off x="4507992" y="1709928"/>
-            <a:ext cx="3328416" cy="320040"/>
+            <a:off x="4416552" y="1709928"/>
+            <a:ext cx="3236976" cy="320040"/>
           </a:xfrm>
           <a:prstGeom prst="rect">
             <a:avLst/>
@@ -4713,7 +5115,7 @@
                 <a:ea typeface="Arial" pitchFamily="34" charset="-122"/>
                 <a:cs typeface="Arial" pitchFamily="34" charset="-120"/>
               </a:rPr>
-              <a:t>Campanita Web Audio API</a:t>
+              <a:t>Ramas y Pull Requests</a:t>
             </a:r>
             <a:endParaRPr lang="en-US" sz="1250" dirty="0"/>
           </a:p>
@@ -4727,8 +5129,8 @@
         </p:nvSpPr>
         <p:spPr>
           <a:xfrm>
-            <a:off x="4507992" y="2039112"/>
-            <a:ext cx="3328416" cy="1051560"/>
+            <a:off x="4416552" y="2039112"/>
+            <a:ext cx="3236976" cy="1188720"/>
           </a:xfrm>
           <a:prstGeom prst="rect">
             <a:avLst/>
@@ -4755,10 +5157,50 @@
                 <a:ea typeface="Arial" pitchFamily="34" charset="-122"/>
                 <a:cs typeface="Arial" pitchFamily="34" charset="-120"/>
               </a:rPr>
-              <a:t>Aviso sonoro nativo del navegador ante nueva alerta.</a:t>
+              <a:t>Decenas de PRs fusionados sobre master.</a:t>
             </a:r>
             <a:endParaRPr lang="en-US" sz="1050" dirty="0"/>
           </a:p>
+          <a:p>
+            <a:pPr indent="0" marL="0">
+              <a:lnSpc>
+                <a:spcPct val="115000"/>
+              </a:lnSpc>
+              <a:buNone/>
+            </a:pPr>
+            <a:r>
+              <a:rPr lang="en-US" sz="1050" dirty="0">
+                <a:solidFill>
+                  <a:srgbClr val="526175"/>
+                </a:solidFill>
+                <a:latin typeface="Arial" pitchFamily="34" charset="0"/>
+                <a:ea typeface="Arial" pitchFamily="34" charset="-122"/>
+                <a:cs typeface="Arial" pitchFamily="34" charset="-120"/>
+              </a:rPr>
+              <a:t>Cero commits directos a master.</a:t>
+            </a:r>
+            <a:endParaRPr lang="en-US" sz="1050" dirty="0"/>
+          </a:p>
+          <a:p>
+            <a:pPr indent="0" marL="0">
+              <a:lnSpc>
+                <a:spcPct val="115000"/>
+              </a:lnSpc>
+              <a:buNone/>
+            </a:pPr>
+            <a:r>
+              <a:rPr lang="en-US" sz="1050" dirty="0">
+                <a:solidFill>
+                  <a:srgbClr val="526175"/>
+                </a:solidFill>
+                <a:latin typeface="Arial" pitchFamily="34" charset="0"/>
+                <a:ea typeface="Arial" pitchFamily="34" charset="-122"/>
+                <a:cs typeface="Arial" pitchFamily="34" charset="-120"/>
+              </a:rPr>
+              <a:t>Revisión cruzada obligatoria.</a:t>
+            </a:r>
+            <a:endParaRPr lang="en-US" sz="1050" dirty="0"/>
+          </a:p>
         </p:txBody>
       </p:sp>
       <p:sp>
@@ -4769,12 +5211,12 @@
         </p:nvSpPr>
         <p:spPr>
           <a:xfrm>
-            <a:off x="8183880" y="1600200"/>
-            <a:ext cx="3657600" cy="1600200"/>
+            <a:off x="8001000" y="1600200"/>
+            <a:ext cx="3703320" cy="1737360"/>
           </a:xfrm>
           <a:prstGeom prst="roundRect">
             <a:avLst>
-              <a:gd name="adj" fmla="val 4571"/>
+              <a:gd name="adj" fmla="val 4211"/>
             </a:avLst>
           </a:prstGeom>
           <a:solidFill>
@@ -4796,8 +5238,8 @@
         </p:nvSpPr>
         <p:spPr>
           <a:xfrm>
-            <a:off x="8348472" y="1709928"/>
-            <a:ext cx="3328416" cy="320040"/>
+            <a:off x="8165592" y="1709928"/>
+            <a:ext cx="3374136" cy="320040"/>
           </a:xfrm>
           <a:prstGeom prst="rect">
             <a:avLst/>
@@ -4821,7 +5263,7 @@
                 <a:ea typeface="Arial" pitchFamily="34" charset="-122"/>
                 <a:cs typeface="Arial" pitchFamily="34" charset="-120"/>
               </a:rPr>
-              <a:t>Tema Claro / Oscuro Real</a:t>
+              <a:t>Bitácora de Prompts</a:t>
             </a:r>
             <a:endParaRPr lang="en-US" sz="1250" dirty="0"/>
           </a:p>
@@ -4835,8 +5277,8 @@
         </p:nvSpPr>
         <p:spPr>
           <a:xfrm>
-            <a:off x="8348472" y="2039112"/>
-            <a:ext cx="3328416" cy="1051560"/>
+            <a:off x="8165592" y="2039112"/>
+            <a:ext cx="3374136" cy="1188720"/>
           </a:xfrm>
           <a:prstGeom prst="rect">
             <a:avLst/>
@@ -4863,7 +5305,7 @@
                 <a:ea typeface="Arial" pitchFamily="34" charset="-122"/>
                 <a:cs typeface="Arial" pitchFamily="34" charset="-120"/>
               </a:rPr>
-              <a:t>Tokens de diseño completos — igual que esta presentación.</a:t>
+              <a:t>+1000 líneas: cada prompt, la salida de la IA y la corrección humana obligatoria.</a:t>
             </a:r>
             <a:endParaRPr lang="en-US" sz="1050" dirty="0"/>
           </a:p>
@@ -4877,12 +5319,12 @@
         </p:nvSpPr>
         <p:spPr>
           <a:xfrm>
-            <a:off x="502920" y="3383280"/>
-            <a:ext cx="3657600" cy="1600200"/>
+            <a:off x="502920" y="3520440"/>
+            <a:ext cx="11201400" cy="1737360"/>
           </a:xfrm>
           <a:prstGeom prst="roundRect">
             <a:avLst>
-              <a:gd name="adj" fmla="val 4571"/>
+              <a:gd name="adj" fmla="val 4211"/>
             </a:avLst>
           </a:prstGeom>
           <a:solidFill>
@@ -4904,8 +5346,8 @@
         </p:nvSpPr>
         <p:spPr>
           <a:xfrm>
-            <a:off x="667512" y="3493008"/>
-            <a:ext cx="3328416" cy="320040"/>
+            <a:off x="667512" y="3630168"/>
+            <a:ext cx="10872216" cy="320040"/>
           </a:xfrm>
           <a:prstGeom prst="rect">
             <a:avLst/>
@@ -4929,7 +5371,7 @@
                 <a:ea typeface="Arial" pitchFamily="34" charset="-122"/>
                 <a:cs typeface="Arial" pitchFamily="34" charset="-120"/>
               </a:rPr>
-              <a:t>Navegación Móvil Nativa</a:t>
+              <a:t>¿Cómo coordinamos 5 agentes sin conflictos?</a:t>
             </a:r>
             <a:endParaRPr lang="en-US" sz="1250" dirty="0"/>
           </a:p>
@@ -4943,8 +5385,8 @@
         </p:nvSpPr>
         <p:spPr>
           <a:xfrm>
-            <a:off x="667512" y="3822192"/>
-            <a:ext cx="3328416" cy="1051560"/>
+            <a:off x="667512" y="3959352"/>
+            <a:ext cx="10872216" cy="1188720"/>
           </a:xfrm>
           <a:prstGeom prst="rect">
             <a:avLst/>
@@ -4971,264 +5413,9 @@
                 <a:ea typeface="Arial" pitchFamily="34" charset="-122"/>
                 <a:cs typeface="Arial" pitchFamily="34" charset="-120"/>
               </a:rPr>
-              <a:t>Barra inferior tipo app, cero scroll horizontal desde 360px.</a:t>
+              <a:t>Contratos de interfaz congelados en la Hora 1: esquema de base de datos, nombres de rutas y sistema de diseño. Cada agente con zona de propiedad exclusiva de carpetas. La IA escribió buena parte del código — incluyendo esta misma presentación; las decisiones de arquitectura, el modelo de datos y los controles de seguridad los tomamos y verificamos nosotros, y cada corrección queda en la bitácora, no solo en la memoria del equipo.</a:t>
             </a:r>
             <a:endParaRPr lang="en-US" sz="1050" dirty="0"/>
-          </a:p>
-        </p:txBody>
-      </p:sp>
-      <p:sp>
-        <p:nvSpPr>
-          <p:cNvPr id="23" name="Shape 20"/>
-          <p:cNvSpPr/>
-          <p:nvPr/>
-        </p:nvSpPr>
-        <p:spPr>
-          <a:xfrm>
-            <a:off x="4343400" y="3383280"/>
-            <a:ext cx="3657600" cy="1600200"/>
-          </a:xfrm>
-          <a:prstGeom prst="roundRect">
-            <a:avLst>
-              <a:gd name="adj" fmla="val 4571"/>
-            </a:avLst>
-          </a:prstGeom>
-          <a:solidFill>
-            <a:srgbClr val="F8FAFC"/>
-          </a:solidFill>
-          <a:ln w="12700">
-            <a:solidFill>
-              <a:srgbClr val="E2E8F0"/>
-            </a:solidFill>
-            <a:prstDash val="solid"/>
-          </a:ln>
-        </p:spPr>
-      </p:sp>
-      <p:sp>
-        <p:nvSpPr>
-          <p:cNvPr id="24" name="Text 21"/>
-          <p:cNvSpPr/>
-          <p:nvPr/>
-        </p:nvSpPr>
-        <p:spPr>
-          <a:xfrm>
-            <a:off x="4507992" y="3493008"/>
-            <a:ext cx="3328416" cy="320040"/>
-          </a:xfrm>
-          <a:prstGeom prst="rect">
-            <a:avLst/>
-          </a:prstGeom>
-          <a:noFill/>
-          <a:ln/>
-        </p:spPr>
-        <p:txBody>
-          <a:bodyPr wrap="square" rtlCol="0" anchor="ctr"/>
-          <a:lstStyle/>
-          <a:p>
-            <a:pPr indent="0" marL="0">
-              <a:buNone/>
-            </a:pPr>
-            <a:r>
-              <a:rPr lang="en-US" sz="1250" b="1" dirty="0">
-                <a:solidFill>
-                  <a:srgbClr val="A65A00"/>
-                </a:solidFill>
-                <a:latin typeface="Arial" pitchFamily="34" charset="0"/>
-                <a:ea typeface="Arial" pitchFamily="34" charset="-122"/>
-                <a:cs typeface="Arial" pitchFamily="34" charset="-120"/>
-              </a:rPr>
-              <a:t>Cliente de API Externo</a:t>
-            </a:r>
-            <a:endParaRPr lang="en-US" sz="1250" dirty="0"/>
-          </a:p>
-        </p:txBody>
-      </p:sp>
-      <p:sp>
-        <p:nvSpPr>
-          <p:cNvPr id="25" name="Text 22"/>
-          <p:cNvSpPr/>
-          <p:nvPr/>
-        </p:nvSpPr>
-        <p:spPr>
-          <a:xfrm>
-            <a:off x="4507992" y="3822192"/>
-            <a:ext cx="3328416" cy="1051560"/>
-          </a:xfrm>
-          <a:prstGeom prst="rect">
-            <a:avLst/>
-          </a:prstGeom>
-          <a:noFill/>
-          <a:ln/>
-        </p:spPr>
-        <p:txBody>
-          <a:bodyPr wrap="square" rtlCol="0" anchor="t"/>
-          <a:lstStyle/>
-          <a:p>
-            <a:pPr indent="0" marL="0">
-              <a:lnSpc>
-                <a:spcPct val="115000"/>
-              </a:lnSpc>
-              <a:buNone/>
-            </a:pPr>
-            <a:r>
-              <a:rPr lang="en-US" sz="1050" dirty="0">
-                <a:solidFill>
-                  <a:srgbClr val="526175"/>
-                </a:solidFill>
-                <a:latin typeface="Arial" pitchFamily="34" charset="0"/>
-                <a:ea typeface="Arial" pitchFamily="34" charset="-122"/>
-                <a:cs typeface="Arial" pitchFamily="34" charset="-120"/>
-              </a:rPr>
-              <a:t>public/api-demo.html consume la API sin backend propio.</a:t>
-            </a:r>
-            <a:endParaRPr lang="en-US" sz="1050" dirty="0"/>
-          </a:p>
-        </p:txBody>
-      </p:sp>
-      <p:sp>
-        <p:nvSpPr>
-          <p:cNvPr id="26" name="Shape 23"/>
-          <p:cNvSpPr/>
-          <p:nvPr/>
-        </p:nvSpPr>
-        <p:spPr>
-          <a:xfrm>
-            <a:off x="8183880" y="3383280"/>
-            <a:ext cx="3657600" cy="1600200"/>
-          </a:xfrm>
-          <a:prstGeom prst="roundRect">
-            <a:avLst>
-              <a:gd name="adj" fmla="val 4571"/>
-            </a:avLst>
-          </a:prstGeom>
-          <a:solidFill>
-            <a:srgbClr val="F8FAFC"/>
-          </a:solidFill>
-          <a:ln w="12700">
-            <a:solidFill>
-              <a:srgbClr val="E2E8F0"/>
-            </a:solidFill>
-            <a:prstDash val="solid"/>
-          </a:ln>
-        </p:spPr>
-      </p:sp>
-      <p:sp>
-        <p:nvSpPr>
-          <p:cNvPr id="27" name="Text 24"/>
-          <p:cNvSpPr/>
-          <p:nvPr/>
-        </p:nvSpPr>
-        <p:spPr>
-          <a:xfrm>
-            <a:off x="8348472" y="3493008"/>
-            <a:ext cx="3328416" cy="320040"/>
-          </a:xfrm>
-          <a:prstGeom prst="rect">
-            <a:avLst/>
-          </a:prstGeom>
-          <a:noFill/>
-          <a:ln/>
-        </p:spPr>
-        <p:txBody>
-          <a:bodyPr wrap="square" rtlCol="0" anchor="ctr"/>
-          <a:lstStyle/>
-          <a:p>
-            <a:pPr indent="0" marL="0">
-              <a:buNone/>
-            </a:pPr>
-            <a:r>
-              <a:rPr lang="en-US" sz="1250" b="1" dirty="0">
-                <a:solidFill>
-                  <a:srgbClr val="A65A00"/>
-                </a:solidFill>
-                <a:latin typeface="Arial" pitchFamily="34" charset="0"/>
-                <a:ea typeface="Arial" pitchFamily="34" charset="-122"/>
-                <a:cs typeface="Arial" pitchFamily="34" charset="-120"/>
-              </a:rPr>
-              <a:t>Identidad Maya-Solar</a:t>
-            </a:r>
-            <a:endParaRPr lang="en-US" sz="1250" dirty="0"/>
-          </a:p>
-        </p:txBody>
-      </p:sp>
-      <p:sp>
-        <p:nvSpPr>
-          <p:cNvPr id="28" name="Text 25"/>
-          <p:cNvSpPr/>
-          <p:nvPr/>
-        </p:nvSpPr>
-        <p:spPr>
-          <a:xfrm>
-            <a:off x="8348472" y="3822192"/>
-            <a:ext cx="3328416" cy="1051560"/>
-          </a:xfrm>
-          <a:prstGeom prst="rect">
-            <a:avLst/>
-          </a:prstGeom>
-          <a:noFill/>
-          <a:ln/>
-        </p:spPr>
-        <p:txBody>
-          <a:bodyPr wrap="square" rtlCol="0" anchor="t"/>
-          <a:lstStyle/>
-          <a:p>
-            <a:pPr indent="0" marL="0">
-              <a:lnSpc>
-                <a:spcPct val="115000"/>
-              </a:lnSpc>
-              <a:buNone/>
-            </a:pPr>
-            <a:r>
-              <a:rPr lang="en-US" sz="1050" dirty="0">
-                <a:solidFill>
-                  <a:srgbClr val="526175"/>
-                </a:solidFill>
-                <a:latin typeface="Arial" pitchFamily="34" charset="0"/>
-                <a:ea typeface="Arial" pitchFamily="34" charset="-122"/>
-                <a:cs typeface="Arial" pitchFamily="34" charset="-120"/>
-              </a:rPr>
-              <a:t>Nombre, glifo y paleta como síntesis conceptual del producto.</a:t>
-            </a:r>
-            <a:endParaRPr lang="en-US" sz="1050" dirty="0"/>
-          </a:p>
-        </p:txBody>
-      </p:sp>
-      <p:sp>
-        <p:nvSpPr>
-          <p:cNvPr id="29" name="Text 26"/>
-          <p:cNvSpPr/>
-          <p:nvPr/>
-        </p:nvSpPr>
-        <p:spPr>
-          <a:xfrm>
-            <a:off x="502920" y="5029200"/>
-            <a:ext cx="11201400" cy="365760"/>
-          </a:xfrm>
-          <a:prstGeom prst="rect">
-            <a:avLst/>
-          </a:prstGeom>
-          <a:noFill/>
-          <a:ln/>
-        </p:spPr>
-        <p:txBody>
-          <a:bodyPr wrap="square" rtlCol="0" anchor="ctr"/>
-          <a:lstStyle/>
-          <a:p>
-            <a:pPr indent="0" marL="0">
-              <a:buNone/>
-            </a:pPr>
-            <a:r>
-              <a:rPr lang="en-US" sz="1100" i="1" dirty="0">
-                <a:solidFill>
-                  <a:srgbClr val="526175"/>
-                </a:solidFill>
-                <a:latin typeface="Arial" pitchFamily="34" charset="0"/>
-                <a:ea typeface="Arial" pitchFamily="34" charset="-122"/>
-                <a:cs typeface="Arial" pitchFamily="34" charset="-120"/>
-              </a:rPr>
-              <a:t>Documentado con honestidad en el ERS como RF-18 / RF-19 — no oculto como si fuera alcance original.</a:t>
-            </a:r>
-            <a:endParaRPr lang="en-US" sz="1100" dirty="0"/>
           </a:p>
         </p:txBody>
       </p:sp>
@@ -5340,7 +5527,7 @@
                 <a:ea typeface="Arial" pitchFamily="34" charset="-122"/>
                 <a:cs typeface="Arial" pitchFamily="34" charset="-120"/>
               </a:rPr>
-              <a:t>13 · FUNCIONALIDAD (SEGURIDAD)</a:t>
+              <a:t>13 · TRANSICIÓN A LA DEMOSTRACIÓN</a:t>
             </a:r>
             <a:endParaRPr lang="en-US" sz="1200" dirty="0"/>
           </a:p>
@@ -5379,7 +5566,7 @@
                 <a:ea typeface="Arial" pitchFamily="34" charset="-122"/>
                 <a:cs typeface="Arial" pitchFamily="34" charset="-120"/>
               </a:rPr>
-              <a:t>Cumplimiento Estricto OWASP Top 10:2025</a:t>
+              <a:t>Los Módulos que Vamos a Presentar en Vivo</a:t>
             </a:r>
             <a:endParaRPr lang="en-US" sz="2200" dirty="0"/>
           </a:p>
@@ -5394,7 +5581,7 @@
         <p:spPr>
           <a:xfrm>
             <a:off x="502920" y="1078992"/>
-            <a:ext cx="3657600" cy="274320"/>
+            <a:ext cx="4572000" cy="274320"/>
           </a:xfrm>
           <a:prstGeom prst="rect">
             <a:avLst/>
@@ -5418,7 +5605,7 @@
                 <a:ea typeface="Arial" pitchFamily="34" charset="-122"/>
                 <a:cs typeface="Arial" pitchFamily="34" charset="-120"/>
               </a:rPr>
-              <a:t>8:00 – 8:45 · Carlos</a:t>
+              <a:t>A continuación: demo sobre la URL pública · Ambos</a:t>
             </a:r>
             <a:endParaRPr lang="en-US" sz="1100" dirty="0"/>
           </a:p>
@@ -5503,7 +5690,7 @@
                 <a:ea typeface="Arial" pitchFamily="34" charset="-122"/>
                 <a:cs typeface="Arial" pitchFamily="34" charset="-120"/>
               </a:rPr>
-              <a:t>Orador: Carlos</a:t>
+              <a:t>Orador: Ambos</a:t>
             </a:r>
             <a:endParaRPr lang="en-US" sz="1000" dirty="0"/>
           </a:p>
@@ -5542,7 +5729,7 @@
                 <a:ea typeface="Arial" pitchFamily="34" charset="-122"/>
                 <a:cs typeface="Arial" pitchFamily="34" charset="-120"/>
               </a:rPr>
-              <a:t>10 Controles Verificados por PR</a:t>
+              <a:t>kin-solar-guatemala.duckdns.org</a:t>
             </a:r>
             <a:endParaRPr lang="en-US" sz="1000" dirty="0"/>
           </a:p>
@@ -5556,12 +5743,12 @@
         </p:nvSpPr>
         <p:spPr>
           <a:xfrm>
-            <a:off x="502920" y="1600200"/>
-            <a:ext cx="3657600" cy="1600200"/>
+            <a:off x="502920" y="1554480"/>
+            <a:ext cx="2697480" cy="1234440"/>
           </a:xfrm>
           <a:prstGeom prst="roundRect">
             <a:avLst>
-              <a:gd name="adj" fmla="val 4571"/>
+              <a:gd name="adj" fmla="val 5185"/>
             </a:avLst>
           </a:prstGeom>
           <a:solidFill>
@@ -5577,99 +5764,157 @@
       </p:sp>
       <p:sp>
         <p:nvSpPr>
-          <p:cNvPr id="12" name="Text 9"/>
-          <p:cNvSpPr/>
-          <p:nvPr/>
-        </p:nvSpPr>
-        <p:spPr>
-          <a:xfrm>
-            <a:off x="667512" y="1709928"/>
-            <a:ext cx="3328416" cy="320040"/>
-          </a:xfrm>
-          <a:prstGeom prst="rect">
-            <a:avLst/>
-          </a:prstGeom>
-          <a:noFill/>
-          <a:ln/>
-        </p:spPr>
-        <p:txBody>
-          <a:bodyPr wrap="square" rtlCol="0" anchor="ctr"/>
-          <a:lstStyle/>
-          <a:p>
-            <a:pPr indent="0" marL="0">
-              <a:buNone/>
-            </a:pPr>
-            <a:r>
-              <a:rPr lang="en-US" sz="1250" b="1" dirty="0">
-                <a:solidFill>
-                  <a:srgbClr val="FBBF24"/>
-                </a:solidFill>
-                <a:latin typeface="Arial" pitchFamily="34" charset="0"/>
-                <a:ea typeface="Arial" pitchFamily="34" charset="-122"/>
-                <a:cs typeface="Arial" pitchFamily="34" charset="-120"/>
-              </a:rPr>
-              <a:t>A01 Access Control</a:t>
-            </a:r>
-            <a:endParaRPr lang="en-US" sz="1250" dirty="0"/>
-          </a:p>
-        </p:txBody>
-      </p:sp>
-      <p:sp>
-        <p:nvSpPr>
-          <p:cNvPr id="13" name="Text 10"/>
-          <p:cNvSpPr/>
-          <p:nvPr/>
-        </p:nvSpPr>
-        <p:spPr>
-          <a:xfrm>
-            <a:off x="667512" y="2039112"/>
-            <a:ext cx="3328416" cy="1051560"/>
-          </a:xfrm>
-          <a:prstGeom prst="rect">
-            <a:avLst/>
-          </a:prstGeom>
-          <a:noFill/>
-          <a:ln/>
-        </p:spPr>
-        <p:txBody>
-          <a:bodyPr wrap="square" rtlCol="0" anchor="t"/>
-          <a:lstStyle/>
-          <a:p>
-            <a:pPr indent="0" marL="0">
-              <a:lnSpc>
-                <a:spcPct val="115000"/>
-              </a:lnSpc>
-              <a:buNone/>
-            </a:pPr>
-            <a:r>
-              <a:rPr lang="en-US" sz="1050" dirty="0">
-                <a:solidFill>
-                  <a:srgbClr val="A1AEC2"/>
-                </a:solidFill>
-                <a:latin typeface="Arial" pitchFamily="34" charset="0"/>
-                <a:ea typeface="Arial" pitchFamily="34" charset="-122"/>
-                <a:cs typeface="Arial" pitchFamily="34" charset="-120"/>
-              </a:rPr>
-              <a:t>auth + Policy en cada método. RBAC Admin/Operador/Visualizador.</a:t>
-            </a:r>
-            <a:endParaRPr lang="en-US" sz="1050" dirty="0"/>
-          </a:p>
-        </p:txBody>
-      </p:sp>
-      <p:sp>
-        <p:nvSpPr>
-          <p:cNvPr id="14" name="Shape 11"/>
-          <p:cNvSpPr/>
-          <p:nvPr/>
-        </p:nvSpPr>
-        <p:spPr>
-          <a:xfrm>
-            <a:off x="4343400" y="1600200"/>
-            <a:ext cx="3657600" cy="1600200"/>
+          <p:cNvPr id="12" name="Shape 9"/>
+          <p:cNvSpPr/>
+          <p:nvPr/>
+        </p:nvSpPr>
+        <p:spPr>
+          <a:xfrm>
+            <a:off x="630936" y="1664208"/>
+            <a:ext cx="310896" cy="310896"/>
           </a:xfrm>
           <a:prstGeom prst="roundRect">
             <a:avLst>
-              <a:gd name="adj" fmla="val 4571"/>
+              <a:gd name="adj" fmla="val 50000"/>
+            </a:avLst>
+          </a:prstGeom>
+          <a:solidFill>
+            <a:srgbClr val="FBBF24"/>
+          </a:solidFill>
+          <a:ln/>
+        </p:spPr>
+      </p:sp>
+      <p:sp>
+        <p:nvSpPr>
+          <p:cNvPr id="13" name="Text 10"/>
+          <p:cNvSpPr/>
+          <p:nvPr/>
+        </p:nvSpPr>
+        <p:spPr>
+          <a:xfrm>
+            <a:off x="630936" y="1664208"/>
+            <a:ext cx="310896" cy="310896"/>
+          </a:xfrm>
+          <a:prstGeom prst="rect">
+            <a:avLst/>
+          </a:prstGeom>
+          <a:noFill/>
+          <a:ln/>
+        </p:spPr>
+        <p:txBody>
+          <a:bodyPr wrap="square" rtlCol="0" anchor="ctr"/>
+          <a:lstStyle/>
+          <a:p>
+            <a:pPr algn="ctr" indent="0" marL="0">
+              <a:buNone/>
+            </a:pPr>
+            <a:r>
+              <a:rPr lang="en-US" sz="1200" b="1" dirty="0">
+                <a:solidFill>
+                  <a:srgbClr val="0B0F17"/>
+                </a:solidFill>
+                <a:latin typeface="Arial" pitchFamily="34" charset="0"/>
+                <a:ea typeface="Arial" pitchFamily="34" charset="-122"/>
+                <a:cs typeface="Arial" pitchFamily="34" charset="-120"/>
+              </a:rPr>
+              <a:t>1</a:t>
+            </a:r>
+            <a:endParaRPr lang="en-US" sz="1200" dirty="0"/>
+          </a:p>
+        </p:txBody>
+      </p:sp>
+      <p:sp>
+        <p:nvSpPr>
+          <p:cNvPr id="14" name="Text 11"/>
+          <p:cNvSpPr/>
+          <p:nvPr/>
+        </p:nvSpPr>
+        <p:spPr>
+          <a:xfrm>
+            <a:off x="630936" y="2029968"/>
+            <a:ext cx="2441448" cy="365760"/>
+          </a:xfrm>
+          <a:prstGeom prst="rect">
+            <a:avLst/>
+          </a:prstGeom>
+          <a:noFill/>
+          <a:ln/>
+        </p:spPr>
+        <p:txBody>
+          <a:bodyPr wrap="square" rtlCol="0" anchor="ctr"/>
+          <a:lstStyle/>
+          <a:p>
+            <a:pPr indent="0" marL="0">
+              <a:buNone/>
+            </a:pPr>
+            <a:r>
+              <a:rPr lang="en-US" sz="1100" b="1" dirty="0">
+                <a:solidFill>
+                  <a:srgbClr val="EDF2FA"/>
+                </a:solidFill>
+                <a:latin typeface="Arial" pitchFamily="34" charset="0"/>
+                <a:ea typeface="Arial" pitchFamily="34" charset="-122"/>
+                <a:cs typeface="Arial" pitchFamily="34" charset="-120"/>
+              </a:rPr>
+              <a:t>Dashboard Nacional</a:t>
+            </a:r>
+            <a:endParaRPr lang="en-US" sz="1100" dirty="0"/>
+          </a:p>
+        </p:txBody>
+      </p:sp>
+      <p:sp>
+        <p:nvSpPr>
+          <p:cNvPr id="15" name="Text 12"/>
+          <p:cNvSpPr/>
+          <p:nvPr/>
+        </p:nvSpPr>
+        <p:spPr>
+          <a:xfrm>
+            <a:off x="630936" y="2395728"/>
+            <a:ext cx="2441448" cy="365760"/>
+          </a:xfrm>
+          <a:prstGeom prst="rect">
+            <a:avLst/>
+          </a:prstGeom>
+          <a:noFill/>
+          <a:ln/>
+        </p:spPr>
+        <p:txBody>
+          <a:bodyPr wrap="square" rtlCol="0" anchor="ctr"/>
+          <a:lstStyle/>
+          <a:p>
+            <a:pPr indent="0" marL="0">
+              <a:buNone/>
+            </a:pPr>
+            <a:r>
+              <a:rPr lang="en-US" sz="900" dirty="0">
+                <a:solidFill>
+                  <a:srgbClr val="A1AEC2"/>
+                </a:solidFill>
+                <a:latin typeface="Arial" pitchFamily="34" charset="0"/>
+                <a:ea typeface="Arial" pitchFamily="34" charset="-122"/>
+                <a:cs typeface="Arial" pitchFamily="34" charset="-120"/>
+              </a:rPr>
+              <a:t>6 KPIs + ranking departamental</a:t>
+            </a:r>
+            <a:endParaRPr lang="en-US" sz="900" dirty="0"/>
+          </a:p>
+        </p:txBody>
+      </p:sp>
+      <p:sp>
+        <p:nvSpPr>
+          <p:cNvPr id="16" name="Shape 13"/>
+          <p:cNvSpPr/>
+          <p:nvPr/>
+        </p:nvSpPr>
+        <p:spPr>
+          <a:xfrm>
+            <a:off x="3337560" y="1554480"/>
+            <a:ext cx="2697480" cy="1234440"/>
+          </a:xfrm>
+          <a:prstGeom prst="roundRect">
+            <a:avLst>
+              <a:gd name="adj" fmla="val 5185"/>
             </a:avLst>
           </a:prstGeom>
           <a:solidFill>
@@ -5685,99 +5930,157 @@
       </p:sp>
       <p:sp>
         <p:nvSpPr>
-          <p:cNvPr id="15" name="Text 12"/>
-          <p:cNvSpPr/>
-          <p:nvPr/>
-        </p:nvSpPr>
-        <p:spPr>
-          <a:xfrm>
-            <a:off x="4507992" y="1709928"/>
-            <a:ext cx="3328416" cy="320040"/>
-          </a:xfrm>
-          <a:prstGeom prst="rect">
-            <a:avLst/>
-          </a:prstGeom>
-          <a:noFill/>
-          <a:ln/>
-        </p:spPr>
-        <p:txBody>
-          <a:bodyPr wrap="square" rtlCol="0" anchor="ctr"/>
-          <a:lstStyle/>
-          <a:p>
-            <a:pPr indent="0" marL="0">
-              <a:buNone/>
-            </a:pPr>
-            <a:r>
-              <a:rPr lang="en-US" sz="1250" b="1" dirty="0">
-                <a:solidFill>
-                  <a:srgbClr val="FBBF24"/>
-                </a:solidFill>
-                <a:latin typeface="Arial" pitchFamily="34" charset="0"/>
-                <a:ea typeface="Arial" pitchFamily="34" charset="-122"/>
-                <a:cs typeface="Arial" pitchFamily="34" charset="-120"/>
-              </a:rPr>
-              <a:t>A02 Misconfiguration</a:t>
-            </a:r>
-            <a:endParaRPr lang="en-US" sz="1250" dirty="0"/>
-          </a:p>
-        </p:txBody>
-      </p:sp>
-      <p:sp>
-        <p:nvSpPr>
-          <p:cNvPr id="16" name="Text 13"/>
-          <p:cNvSpPr/>
-          <p:nvPr/>
-        </p:nvSpPr>
-        <p:spPr>
-          <a:xfrm>
-            <a:off x="4507992" y="2039112"/>
-            <a:ext cx="3328416" cy="1051560"/>
-          </a:xfrm>
-          <a:prstGeom prst="rect">
-            <a:avLst/>
-          </a:prstGeom>
-          <a:noFill/>
-          <a:ln/>
-        </p:spPr>
-        <p:txBody>
-          <a:bodyPr wrap="square" rtlCol="0" anchor="t"/>
-          <a:lstStyle/>
-          <a:p>
-            <a:pPr indent="0" marL="0">
-              <a:lnSpc>
-                <a:spcPct val="115000"/>
-              </a:lnSpc>
-              <a:buNone/>
-            </a:pPr>
-            <a:r>
-              <a:rPr lang="en-US" sz="1050" dirty="0">
-                <a:solidFill>
-                  <a:srgbClr val="A1AEC2"/>
-                </a:solidFill>
-                <a:latin typeface="Arial" pitchFamily="34" charset="0"/>
-                <a:ea typeface="Arial" pitchFamily="34" charset="-122"/>
-                <a:cs typeface="Arial" pitchFamily="34" charset="-120"/>
-              </a:rPr>
-              <a:t>Cero secretos en código. Seeders leen de .env vía config/seed.php.</a:t>
-            </a:r>
-            <a:endParaRPr lang="en-US" sz="1050" dirty="0"/>
-          </a:p>
-        </p:txBody>
-      </p:sp>
-      <p:sp>
-        <p:nvSpPr>
           <p:cNvPr id="17" name="Shape 14"/>
           <p:cNvSpPr/>
           <p:nvPr/>
         </p:nvSpPr>
         <p:spPr>
           <a:xfrm>
-            <a:off x="8183880" y="1600200"/>
-            <a:ext cx="3657600" cy="1600200"/>
+            <a:off x="3465576" y="1664208"/>
+            <a:ext cx="310896" cy="310896"/>
           </a:xfrm>
           <a:prstGeom prst="roundRect">
             <a:avLst>
-              <a:gd name="adj" fmla="val 4571"/>
+              <a:gd name="adj" fmla="val 50000"/>
+            </a:avLst>
+          </a:prstGeom>
+          <a:solidFill>
+            <a:srgbClr val="FBBF24"/>
+          </a:solidFill>
+          <a:ln/>
+        </p:spPr>
+      </p:sp>
+      <p:sp>
+        <p:nvSpPr>
+          <p:cNvPr id="18" name="Text 15"/>
+          <p:cNvSpPr/>
+          <p:nvPr/>
+        </p:nvSpPr>
+        <p:spPr>
+          <a:xfrm>
+            <a:off x="3465576" y="1664208"/>
+            <a:ext cx="310896" cy="310896"/>
+          </a:xfrm>
+          <a:prstGeom prst="rect">
+            <a:avLst/>
+          </a:prstGeom>
+          <a:noFill/>
+          <a:ln/>
+        </p:spPr>
+        <p:txBody>
+          <a:bodyPr wrap="square" rtlCol="0" anchor="ctr"/>
+          <a:lstStyle/>
+          <a:p>
+            <a:pPr algn="ctr" indent="0" marL="0">
+              <a:buNone/>
+            </a:pPr>
+            <a:r>
+              <a:rPr lang="en-US" sz="1200" b="1" dirty="0">
+                <a:solidFill>
+                  <a:srgbClr val="0B0F17"/>
+                </a:solidFill>
+                <a:latin typeface="Arial" pitchFamily="34" charset="0"/>
+                <a:ea typeface="Arial" pitchFamily="34" charset="-122"/>
+                <a:cs typeface="Arial" pitchFamily="34" charset="-120"/>
+              </a:rPr>
+              <a:t>2</a:t>
+            </a:r>
+            <a:endParaRPr lang="en-US" sz="1200" dirty="0"/>
+          </a:p>
+        </p:txBody>
+      </p:sp>
+      <p:sp>
+        <p:nvSpPr>
+          <p:cNvPr id="19" name="Text 16"/>
+          <p:cNvSpPr/>
+          <p:nvPr/>
+        </p:nvSpPr>
+        <p:spPr>
+          <a:xfrm>
+            <a:off x="3465576" y="2029968"/>
+            <a:ext cx="2441448" cy="365760"/>
+          </a:xfrm>
+          <a:prstGeom prst="rect">
+            <a:avLst/>
+          </a:prstGeom>
+          <a:noFill/>
+          <a:ln/>
+        </p:spPr>
+        <p:txBody>
+          <a:bodyPr wrap="square" rtlCol="0" anchor="ctr"/>
+          <a:lstStyle/>
+          <a:p>
+            <a:pPr indent="0" marL="0">
+              <a:buNone/>
+            </a:pPr>
+            <a:r>
+              <a:rPr lang="en-US" sz="1100" b="1" dirty="0">
+                <a:solidFill>
+                  <a:srgbClr val="EDF2FA"/>
+                </a:solidFill>
+                <a:latin typeface="Arial" pitchFamily="34" charset="0"/>
+                <a:ea typeface="Arial" pitchFamily="34" charset="-122"/>
+                <a:cs typeface="Arial" pitchFamily="34" charset="-120"/>
+              </a:rPr>
+              <a:t>Mapa Interactivo</a:t>
+            </a:r>
+            <a:endParaRPr lang="en-US" sz="1100" dirty="0"/>
+          </a:p>
+        </p:txBody>
+      </p:sp>
+      <p:sp>
+        <p:nvSpPr>
+          <p:cNvPr id="20" name="Text 17"/>
+          <p:cNvSpPr/>
+          <p:nvPr/>
+        </p:nvSpPr>
+        <p:spPr>
+          <a:xfrm>
+            <a:off x="3465576" y="2395728"/>
+            <a:ext cx="2441448" cy="365760"/>
+          </a:xfrm>
+          <a:prstGeom prst="rect">
+            <a:avLst/>
+          </a:prstGeom>
+          <a:noFill/>
+          <a:ln/>
+        </p:spPr>
+        <p:txBody>
+          <a:bodyPr wrap="square" rtlCol="0" anchor="ctr"/>
+          <a:lstStyle/>
+          <a:p>
+            <a:pPr indent="0" marL="0">
+              <a:buNone/>
+            </a:pPr>
+            <a:r>
+              <a:rPr lang="en-US" sz="900" dirty="0">
+                <a:solidFill>
+                  <a:srgbClr val="A1AEC2"/>
+                </a:solidFill>
+                <a:latin typeface="Arial" pitchFamily="34" charset="0"/>
+                <a:ea typeface="Arial" pitchFamily="34" charset="-122"/>
+                <a:cs typeface="Arial" pitchFamily="34" charset="-120"/>
+              </a:rPr>
+              <a:t>22 departamentos, pines por kW</a:t>
+            </a:r>
+            <a:endParaRPr lang="en-US" sz="900" dirty="0"/>
+          </a:p>
+        </p:txBody>
+      </p:sp>
+      <p:sp>
+        <p:nvSpPr>
+          <p:cNvPr id="21" name="Shape 18"/>
+          <p:cNvSpPr/>
+          <p:nvPr/>
+        </p:nvSpPr>
+        <p:spPr>
+          <a:xfrm>
+            <a:off x="6172200" y="1554480"/>
+            <a:ext cx="2697480" cy="1234440"/>
+          </a:xfrm>
+          <a:prstGeom prst="roundRect">
+            <a:avLst>
+              <a:gd name="adj" fmla="val 5185"/>
             </a:avLst>
           </a:prstGeom>
           <a:solidFill>
@@ -5793,99 +6096,157 @@
       </p:sp>
       <p:sp>
         <p:nvSpPr>
-          <p:cNvPr id="18" name="Text 15"/>
-          <p:cNvSpPr/>
-          <p:nvPr/>
-        </p:nvSpPr>
-        <p:spPr>
-          <a:xfrm>
-            <a:off x="8348472" y="1709928"/>
-            <a:ext cx="3328416" cy="320040"/>
-          </a:xfrm>
-          <a:prstGeom prst="rect">
-            <a:avLst/>
-          </a:prstGeom>
-          <a:noFill/>
-          <a:ln/>
-        </p:spPr>
-        <p:txBody>
-          <a:bodyPr wrap="square" rtlCol="0" anchor="ctr"/>
-          <a:lstStyle/>
-          <a:p>
-            <a:pPr indent="0" marL="0">
-              <a:buNone/>
-            </a:pPr>
-            <a:r>
-              <a:rPr lang="en-US" sz="1250" b="1" dirty="0">
-                <a:solidFill>
-                  <a:srgbClr val="FBBF24"/>
-                </a:solidFill>
-                <a:latin typeface="Arial" pitchFamily="34" charset="0"/>
-                <a:ea typeface="Arial" pitchFamily="34" charset="-122"/>
-                <a:cs typeface="Arial" pitchFamily="34" charset="-120"/>
-              </a:rPr>
-              <a:t>A04 Cryptographic Failures</a:t>
-            </a:r>
-            <a:endParaRPr lang="en-US" sz="1250" dirty="0"/>
-          </a:p>
-        </p:txBody>
-      </p:sp>
-      <p:sp>
-        <p:nvSpPr>
-          <p:cNvPr id="19" name="Text 16"/>
-          <p:cNvSpPr/>
-          <p:nvPr/>
-        </p:nvSpPr>
-        <p:spPr>
-          <a:xfrm>
-            <a:off x="8348472" y="2039112"/>
-            <a:ext cx="3328416" cy="1051560"/>
-          </a:xfrm>
-          <a:prstGeom prst="rect">
-            <a:avLst/>
-          </a:prstGeom>
-          <a:noFill/>
-          <a:ln/>
-        </p:spPr>
-        <p:txBody>
-          <a:bodyPr wrap="square" rtlCol="0" anchor="t"/>
-          <a:lstStyle/>
-          <a:p>
-            <a:pPr indent="0" marL="0">
-              <a:lnSpc>
-                <a:spcPct val="115000"/>
-              </a:lnSpc>
-              <a:buNone/>
-            </a:pPr>
-            <a:r>
-              <a:rPr lang="en-US" sz="1050" dirty="0">
-                <a:solidFill>
-                  <a:srgbClr val="A1AEC2"/>
-                </a:solidFill>
-                <a:latin typeface="Arial" pitchFamily="34" charset="0"/>
-                <a:ea typeface="Arial" pitchFamily="34" charset="-122"/>
-                <a:cs typeface="Arial" pitchFamily="34" charset="-120"/>
-              </a:rPr>
-              <a:t>Bcrypt rounds 12. hash_equals() en comparación de API keys.</a:t>
-            </a:r>
-            <a:endParaRPr lang="en-US" sz="1050" dirty="0"/>
-          </a:p>
-        </p:txBody>
-      </p:sp>
-      <p:sp>
-        <p:nvSpPr>
-          <p:cNvPr id="20" name="Shape 17"/>
-          <p:cNvSpPr/>
-          <p:nvPr/>
-        </p:nvSpPr>
-        <p:spPr>
-          <a:xfrm>
-            <a:off x="502920" y="3383280"/>
-            <a:ext cx="3657600" cy="1600200"/>
+          <p:cNvPr id="22" name="Shape 19"/>
+          <p:cNvSpPr/>
+          <p:nvPr/>
+        </p:nvSpPr>
+        <p:spPr>
+          <a:xfrm>
+            <a:off x="6300216" y="1664208"/>
+            <a:ext cx="310896" cy="310896"/>
           </a:xfrm>
           <a:prstGeom prst="roundRect">
             <a:avLst>
-              <a:gd name="adj" fmla="val 4571"/>
+              <a:gd name="adj" fmla="val 50000"/>
+            </a:avLst>
+          </a:prstGeom>
+          <a:solidFill>
+            <a:srgbClr val="FBBF24"/>
+          </a:solidFill>
+          <a:ln/>
+        </p:spPr>
+      </p:sp>
+      <p:sp>
+        <p:nvSpPr>
+          <p:cNvPr id="23" name="Text 20"/>
+          <p:cNvSpPr/>
+          <p:nvPr/>
+        </p:nvSpPr>
+        <p:spPr>
+          <a:xfrm>
+            <a:off x="6300216" y="1664208"/>
+            <a:ext cx="310896" cy="310896"/>
+          </a:xfrm>
+          <a:prstGeom prst="rect">
+            <a:avLst/>
+          </a:prstGeom>
+          <a:noFill/>
+          <a:ln/>
+        </p:spPr>
+        <p:txBody>
+          <a:bodyPr wrap="square" rtlCol="0" anchor="ctr"/>
+          <a:lstStyle/>
+          <a:p>
+            <a:pPr algn="ctr" indent="0" marL="0">
+              <a:buNone/>
+            </a:pPr>
+            <a:r>
+              <a:rPr lang="en-US" sz="1200" b="1" dirty="0">
+                <a:solidFill>
+                  <a:srgbClr val="0B0F17"/>
+                </a:solidFill>
+                <a:latin typeface="Arial" pitchFamily="34" charset="0"/>
+                <a:ea typeface="Arial" pitchFamily="34" charset="-122"/>
+                <a:cs typeface="Arial" pitchFamily="34" charset="-120"/>
+              </a:rPr>
+              <a:t>3</a:t>
+            </a:r>
+            <a:endParaRPr lang="en-US" sz="1200" dirty="0"/>
+          </a:p>
+        </p:txBody>
+      </p:sp>
+      <p:sp>
+        <p:nvSpPr>
+          <p:cNvPr id="24" name="Text 21"/>
+          <p:cNvSpPr/>
+          <p:nvPr/>
+        </p:nvSpPr>
+        <p:spPr>
+          <a:xfrm>
+            <a:off x="6300216" y="2029968"/>
+            <a:ext cx="2441448" cy="365760"/>
+          </a:xfrm>
+          <a:prstGeom prst="rect">
+            <a:avLst/>
+          </a:prstGeom>
+          <a:noFill/>
+          <a:ln/>
+        </p:spPr>
+        <p:txBody>
+          <a:bodyPr wrap="square" rtlCol="0" anchor="ctr"/>
+          <a:lstStyle/>
+          <a:p>
+            <a:pPr indent="0" marL="0">
+              <a:buNone/>
+            </a:pPr>
+            <a:r>
+              <a:rPr lang="en-US" sz="1100" b="1" dirty="0">
+                <a:solidFill>
+                  <a:srgbClr val="EDF2FA"/>
+                </a:solidFill>
+                <a:latin typeface="Arial" pitchFamily="34" charset="0"/>
+                <a:ea typeface="Arial" pitchFamily="34" charset="-122"/>
+                <a:cs typeface="Arial" pitchFamily="34" charset="-120"/>
+              </a:rPr>
+              <a:t>Granjas y Paneles</a:t>
+            </a:r>
+            <a:endParaRPr lang="en-US" sz="1100" dirty="0"/>
+          </a:p>
+        </p:txBody>
+      </p:sp>
+      <p:sp>
+        <p:nvSpPr>
+          <p:cNvPr id="25" name="Text 22"/>
+          <p:cNvSpPr/>
+          <p:nvPr/>
+        </p:nvSpPr>
+        <p:spPr>
+          <a:xfrm>
+            <a:off x="6300216" y="2395728"/>
+            <a:ext cx="2441448" cy="365760"/>
+          </a:xfrm>
+          <a:prstGeom prst="rect">
+            <a:avLst/>
+          </a:prstGeom>
+          <a:noFill/>
+          <a:ln/>
+        </p:spPr>
+        <p:txBody>
+          <a:bodyPr wrap="square" rtlCol="0" anchor="ctr"/>
+          <a:lstStyle/>
+          <a:p>
+            <a:pPr indent="0" marL="0">
+              <a:buNone/>
+            </a:pPr>
+            <a:r>
+              <a:rPr lang="en-US" sz="900" dirty="0">
+                <a:solidFill>
+                  <a:srgbClr val="A1AEC2"/>
+                </a:solidFill>
+                <a:latin typeface="Arial" pitchFamily="34" charset="0"/>
+                <a:ea typeface="Arial" pitchFamily="34" charset="-122"/>
+                <a:cs typeface="Arial" pitchFamily="34" charset="-120"/>
+              </a:rPr>
+              <a:t>CRUD con capacidad automática</a:t>
+            </a:r>
+            <a:endParaRPr lang="en-US" sz="900" dirty="0"/>
+          </a:p>
+        </p:txBody>
+      </p:sp>
+      <p:sp>
+        <p:nvSpPr>
+          <p:cNvPr id="26" name="Shape 23"/>
+          <p:cNvSpPr/>
+          <p:nvPr/>
+        </p:nvSpPr>
+        <p:spPr>
+          <a:xfrm>
+            <a:off x="9006840" y="1554480"/>
+            <a:ext cx="2697480" cy="1234440"/>
+          </a:xfrm>
+          <a:prstGeom prst="roundRect">
+            <a:avLst>
+              <a:gd name="adj" fmla="val 5185"/>
             </a:avLst>
           </a:prstGeom>
           <a:solidFill>
@@ -5901,99 +6262,157 @@
       </p:sp>
       <p:sp>
         <p:nvSpPr>
-          <p:cNvPr id="21" name="Text 18"/>
-          <p:cNvSpPr/>
-          <p:nvPr/>
-        </p:nvSpPr>
-        <p:spPr>
-          <a:xfrm>
-            <a:off x="667512" y="3493008"/>
-            <a:ext cx="3328416" cy="320040"/>
-          </a:xfrm>
-          <a:prstGeom prst="rect">
-            <a:avLst/>
-          </a:prstGeom>
-          <a:noFill/>
-          <a:ln/>
-        </p:spPr>
-        <p:txBody>
-          <a:bodyPr wrap="square" rtlCol="0" anchor="ctr"/>
-          <a:lstStyle/>
-          <a:p>
-            <a:pPr indent="0" marL="0">
-              <a:buNone/>
-            </a:pPr>
-            <a:r>
-              <a:rPr lang="en-US" sz="1250" b="1" dirty="0">
-                <a:solidFill>
-                  <a:srgbClr val="FBBF24"/>
-                </a:solidFill>
-                <a:latin typeface="Arial" pitchFamily="34" charset="0"/>
-                <a:ea typeface="Arial" pitchFamily="34" charset="-122"/>
-                <a:cs typeface="Arial" pitchFamily="34" charset="-120"/>
-              </a:rPr>
-              <a:t>A05 Injection</a:t>
-            </a:r>
-            <a:endParaRPr lang="en-US" sz="1250" dirty="0"/>
-          </a:p>
-        </p:txBody>
-      </p:sp>
-      <p:sp>
-        <p:nvSpPr>
-          <p:cNvPr id="22" name="Text 19"/>
-          <p:cNvSpPr/>
-          <p:nvPr/>
-        </p:nvSpPr>
-        <p:spPr>
-          <a:xfrm>
-            <a:off x="667512" y="3822192"/>
-            <a:ext cx="3328416" cy="1051560"/>
-          </a:xfrm>
-          <a:prstGeom prst="rect">
-            <a:avLst/>
-          </a:prstGeom>
-          <a:noFill/>
-          <a:ln/>
-        </p:spPr>
-        <p:txBody>
-          <a:bodyPr wrap="square" rtlCol="0" anchor="t"/>
-          <a:lstStyle/>
-          <a:p>
-            <a:pPr indent="0" marL="0">
-              <a:lnSpc>
-                <a:spcPct val="115000"/>
-              </a:lnSpc>
-              <a:buNone/>
-            </a:pPr>
-            <a:r>
-              <a:rPr lang="en-US" sz="1050" dirty="0">
-                <a:solidFill>
-                  <a:srgbClr val="A1AEC2"/>
-                </a:solidFill>
-                <a:latin typeface="Arial" pitchFamily="34" charset="0"/>
-                <a:ea typeface="Arial" pitchFamily="34" charset="-122"/>
-                <a:cs typeface="Arial" pitchFamily="34" charset="-120"/>
-              </a:rPr>
-              <a:t>FormRequests estrictos. 100% Eloquent ORM. Cero SQL concatenado.</a:t>
-            </a:r>
-            <a:endParaRPr lang="en-US" sz="1050" dirty="0"/>
-          </a:p>
-        </p:txBody>
-      </p:sp>
-      <p:sp>
-        <p:nvSpPr>
-          <p:cNvPr id="23" name="Shape 20"/>
-          <p:cNvSpPr/>
-          <p:nvPr/>
-        </p:nvSpPr>
-        <p:spPr>
-          <a:xfrm>
-            <a:off x="4343400" y="3383280"/>
-            <a:ext cx="3657600" cy="1600200"/>
+          <p:cNvPr id="27" name="Shape 24"/>
+          <p:cNvSpPr/>
+          <p:nvPr/>
+        </p:nvSpPr>
+        <p:spPr>
+          <a:xfrm>
+            <a:off x="9134856" y="1664208"/>
+            <a:ext cx="310896" cy="310896"/>
           </a:xfrm>
           <a:prstGeom prst="roundRect">
             <a:avLst>
-              <a:gd name="adj" fmla="val 4571"/>
+              <a:gd name="adj" fmla="val 50000"/>
+            </a:avLst>
+          </a:prstGeom>
+          <a:solidFill>
+            <a:srgbClr val="FBBF24"/>
+          </a:solidFill>
+          <a:ln/>
+        </p:spPr>
+      </p:sp>
+      <p:sp>
+        <p:nvSpPr>
+          <p:cNvPr id="28" name="Text 25"/>
+          <p:cNvSpPr/>
+          <p:nvPr/>
+        </p:nvSpPr>
+        <p:spPr>
+          <a:xfrm>
+            <a:off x="9134856" y="1664208"/>
+            <a:ext cx="310896" cy="310896"/>
+          </a:xfrm>
+          <a:prstGeom prst="rect">
+            <a:avLst/>
+          </a:prstGeom>
+          <a:noFill/>
+          <a:ln/>
+        </p:spPr>
+        <p:txBody>
+          <a:bodyPr wrap="square" rtlCol="0" anchor="ctr"/>
+          <a:lstStyle/>
+          <a:p>
+            <a:pPr algn="ctr" indent="0" marL="0">
+              <a:buNone/>
+            </a:pPr>
+            <a:r>
+              <a:rPr lang="en-US" sz="1200" b="1" dirty="0">
+                <a:solidFill>
+                  <a:srgbClr val="0B0F17"/>
+                </a:solidFill>
+                <a:latin typeface="Arial" pitchFamily="34" charset="0"/>
+                <a:ea typeface="Arial" pitchFamily="34" charset="-122"/>
+                <a:cs typeface="Arial" pitchFamily="34" charset="-120"/>
+              </a:rPr>
+              <a:t>4</a:t>
+            </a:r>
+            <a:endParaRPr lang="en-US" sz="1200" dirty="0"/>
+          </a:p>
+        </p:txBody>
+      </p:sp>
+      <p:sp>
+        <p:nvSpPr>
+          <p:cNvPr id="29" name="Text 26"/>
+          <p:cNvSpPr/>
+          <p:nvPr/>
+        </p:nvSpPr>
+        <p:spPr>
+          <a:xfrm>
+            <a:off x="9134856" y="2029968"/>
+            <a:ext cx="2441448" cy="365760"/>
+          </a:xfrm>
+          <a:prstGeom prst="rect">
+            <a:avLst/>
+          </a:prstGeom>
+          <a:noFill/>
+          <a:ln/>
+        </p:spPr>
+        <p:txBody>
+          <a:bodyPr wrap="square" rtlCol="0" anchor="ctr"/>
+          <a:lstStyle/>
+          <a:p>
+            <a:pPr indent="0" marL="0">
+              <a:buNone/>
+            </a:pPr>
+            <a:r>
+              <a:rPr lang="en-US" sz="1100" b="1" dirty="0">
+                <a:solidFill>
+                  <a:srgbClr val="EDF2FA"/>
+                </a:solidFill>
+                <a:latin typeface="Arial" pitchFamily="34" charset="0"/>
+                <a:ea typeface="Arial" pitchFamily="34" charset="-122"/>
+                <a:cs typeface="Arial" pitchFamily="34" charset="-120"/>
+              </a:rPr>
+              <a:t>Registro de Generación</a:t>
+            </a:r>
+            <a:endParaRPr lang="en-US" sz="1100" dirty="0"/>
+          </a:p>
+        </p:txBody>
+      </p:sp>
+      <p:sp>
+        <p:nvSpPr>
+          <p:cNvPr id="30" name="Text 27"/>
+          <p:cNvSpPr/>
+          <p:nvPr/>
+        </p:nvSpPr>
+        <p:spPr>
+          <a:xfrm>
+            <a:off x="9134856" y="2395728"/>
+            <a:ext cx="2441448" cy="365760"/>
+          </a:xfrm>
+          <a:prstGeom prst="rect">
+            <a:avLst/>
+          </a:prstGeom>
+          <a:noFill/>
+          <a:ln/>
+        </p:spPr>
+        <p:txBody>
+          <a:bodyPr wrap="square" rtlCol="0" anchor="ctr"/>
+          <a:lstStyle/>
+          <a:p>
+            <a:pPr indent="0" marL="0">
+              <a:buNone/>
+            </a:pPr>
+            <a:r>
+              <a:rPr lang="en-US" sz="900" dirty="0">
+                <a:solidFill>
+                  <a:srgbClr val="A1AEC2"/>
+                </a:solidFill>
+                <a:latin typeface="Arial" pitchFamily="34" charset="0"/>
+                <a:ea typeface="Arial" pitchFamily="34" charset="-122"/>
+                <a:cs typeface="Arial" pitchFamily="34" charset="-120"/>
+              </a:rPr>
+              <a:t>CO₂ automático + validación</a:t>
+            </a:r>
+            <a:endParaRPr lang="en-US" sz="900" dirty="0"/>
+          </a:p>
+        </p:txBody>
+      </p:sp>
+      <p:sp>
+        <p:nvSpPr>
+          <p:cNvPr id="31" name="Shape 28"/>
+          <p:cNvSpPr/>
+          <p:nvPr/>
+        </p:nvSpPr>
+        <p:spPr>
+          <a:xfrm>
+            <a:off x="502920" y="2926080"/>
+            <a:ext cx="2697480" cy="1234440"/>
+          </a:xfrm>
+          <a:prstGeom prst="roundRect">
+            <a:avLst>
+              <a:gd name="adj" fmla="val 5185"/>
             </a:avLst>
           </a:prstGeom>
           <a:solidFill>
@@ -6009,99 +6428,157 @@
       </p:sp>
       <p:sp>
         <p:nvSpPr>
-          <p:cNvPr id="24" name="Text 21"/>
-          <p:cNvSpPr/>
-          <p:nvPr/>
-        </p:nvSpPr>
-        <p:spPr>
-          <a:xfrm>
-            <a:off x="4507992" y="3493008"/>
-            <a:ext cx="3328416" cy="320040"/>
-          </a:xfrm>
-          <a:prstGeom prst="rect">
-            <a:avLst/>
-          </a:prstGeom>
-          <a:noFill/>
-          <a:ln/>
-        </p:spPr>
-        <p:txBody>
-          <a:bodyPr wrap="square" rtlCol="0" anchor="ctr"/>
-          <a:lstStyle/>
-          <a:p>
-            <a:pPr indent="0" marL="0">
-              <a:buNone/>
-            </a:pPr>
-            <a:r>
-              <a:rPr lang="en-US" sz="1250" b="1" dirty="0">
-                <a:solidFill>
-                  <a:srgbClr val="FBBF24"/>
-                </a:solidFill>
-                <a:latin typeface="Arial" pitchFamily="34" charset="0"/>
-                <a:ea typeface="Arial" pitchFamily="34" charset="-122"/>
-                <a:cs typeface="Arial" pitchFamily="34" charset="-120"/>
-              </a:rPr>
-              <a:t>A06 Insecure Design</a:t>
-            </a:r>
-            <a:endParaRPr lang="en-US" sz="1250" dirty="0"/>
-          </a:p>
-        </p:txBody>
-      </p:sp>
-      <p:sp>
-        <p:nvSpPr>
-          <p:cNvPr id="25" name="Text 22"/>
-          <p:cNvSpPr/>
-          <p:nvPr/>
-        </p:nvSpPr>
-        <p:spPr>
-          <a:xfrm>
-            <a:off x="4507992" y="3822192"/>
-            <a:ext cx="3328416" cy="1051560"/>
-          </a:xfrm>
-          <a:prstGeom prst="rect">
-            <a:avLst/>
-          </a:prstGeom>
-          <a:noFill/>
-          <a:ln/>
-        </p:spPr>
-        <p:txBody>
-          <a:bodyPr wrap="square" rtlCol="0" anchor="t"/>
-          <a:lstStyle/>
-          <a:p>
-            <a:pPr indent="0" marL="0">
-              <a:lnSpc>
-                <a:spcPct val="115000"/>
-              </a:lnSpc>
-              <a:buNone/>
-            </a:pPr>
-            <a:r>
-              <a:rPr lang="en-US" sz="1050" dirty="0">
-                <a:solidFill>
-                  <a:srgbClr val="A1AEC2"/>
-                </a:solidFill>
-                <a:latin typeface="Arial" pitchFamily="34" charset="0"/>
-                <a:ea typeface="Arial" pitchFamily="34" charset="-122"/>
-                <a:cs typeface="Arial" pitchFamily="34" charset="-120"/>
-              </a:rPr>
-              <a:t>lockForUpdate contra condiciones de carrera. Rate limiting login/API.</a:t>
-            </a:r>
-            <a:endParaRPr lang="en-US" sz="1050" dirty="0"/>
-          </a:p>
-        </p:txBody>
-      </p:sp>
-      <p:sp>
-        <p:nvSpPr>
-          <p:cNvPr id="26" name="Shape 23"/>
-          <p:cNvSpPr/>
-          <p:nvPr/>
-        </p:nvSpPr>
-        <p:spPr>
-          <a:xfrm>
-            <a:off x="8183880" y="3383280"/>
-            <a:ext cx="3657600" cy="1600200"/>
+          <p:cNvPr id="32" name="Shape 29"/>
+          <p:cNvSpPr/>
+          <p:nvPr/>
+        </p:nvSpPr>
+        <p:spPr>
+          <a:xfrm>
+            <a:off x="630936" y="3035808"/>
+            <a:ext cx="310896" cy="310896"/>
           </a:xfrm>
           <a:prstGeom prst="roundRect">
             <a:avLst>
-              <a:gd name="adj" fmla="val 4571"/>
+              <a:gd name="adj" fmla="val 50000"/>
+            </a:avLst>
+          </a:prstGeom>
+          <a:solidFill>
+            <a:srgbClr val="FBBF24"/>
+          </a:solidFill>
+          <a:ln/>
+        </p:spPr>
+      </p:sp>
+      <p:sp>
+        <p:nvSpPr>
+          <p:cNvPr id="33" name="Text 30"/>
+          <p:cNvSpPr/>
+          <p:nvPr/>
+        </p:nvSpPr>
+        <p:spPr>
+          <a:xfrm>
+            <a:off x="630936" y="3035808"/>
+            <a:ext cx="310896" cy="310896"/>
+          </a:xfrm>
+          <a:prstGeom prst="rect">
+            <a:avLst/>
+          </a:prstGeom>
+          <a:noFill/>
+          <a:ln/>
+        </p:spPr>
+        <p:txBody>
+          <a:bodyPr wrap="square" rtlCol="0" anchor="ctr"/>
+          <a:lstStyle/>
+          <a:p>
+            <a:pPr algn="ctr" indent="0" marL="0">
+              <a:buNone/>
+            </a:pPr>
+            <a:r>
+              <a:rPr lang="en-US" sz="1200" b="1" dirty="0">
+                <a:solidFill>
+                  <a:srgbClr val="0B0F17"/>
+                </a:solidFill>
+                <a:latin typeface="Arial" pitchFamily="34" charset="0"/>
+                <a:ea typeface="Arial" pitchFamily="34" charset="-122"/>
+                <a:cs typeface="Arial" pitchFamily="34" charset="-120"/>
+              </a:rPr>
+              <a:t>5</a:t>
+            </a:r>
+            <a:endParaRPr lang="en-US" sz="1200" dirty="0"/>
+          </a:p>
+        </p:txBody>
+      </p:sp>
+      <p:sp>
+        <p:nvSpPr>
+          <p:cNvPr id="34" name="Text 31"/>
+          <p:cNvSpPr/>
+          <p:nvPr/>
+        </p:nvSpPr>
+        <p:spPr>
+          <a:xfrm>
+            <a:off x="630936" y="3401568"/>
+            <a:ext cx="2441448" cy="365760"/>
+          </a:xfrm>
+          <a:prstGeom prst="rect">
+            <a:avLst/>
+          </a:prstGeom>
+          <a:noFill/>
+          <a:ln/>
+        </p:spPr>
+        <p:txBody>
+          <a:bodyPr wrap="square" rtlCol="0" anchor="ctr"/>
+          <a:lstStyle/>
+          <a:p>
+            <a:pPr indent="0" marL="0">
+              <a:buNone/>
+            </a:pPr>
+            <a:r>
+              <a:rPr lang="en-US" sz="1100" b="1" dirty="0">
+                <a:solidFill>
+                  <a:srgbClr val="EDF2FA"/>
+                </a:solidFill>
+                <a:latin typeface="Arial" pitchFamily="34" charset="0"/>
+                <a:ea typeface="Arial" pitchFamily="34" charset="-122"/>
+                <a:cs typeface="Arial" pitchFamily="34" charset="-120"/>
+              </a:rPr>
+              <a:t>Alertas de Desviación</a:t>
+            </a:r>
+            <a:endParaRPr lang="en-US" sz="1100" dirty="0"/>
+          </a:p>
+        </p:txBody>
+      </p:sp>
+      <p:sp>
+        <p:nvSpPr>
+          <p:cNvPr id="35" name="Text 32"/>
+          <p:cNvSpPr/>
+          <p:nvPr/>
+        </p:nvSpPr>
+        <p:spPr>
+          <a:xfrm>
+            <a:off x="630936" y="3767328"/>
+            <a:ext cx="2441448" cy="365760"/>
+          </a:xfrm>
+          <a:prstGeom prst="rect">
+            <a:avLst/>
+          </a:prstGeom>
+          <a:noFill/>
+          <a:ln/>
+        </p:spPr>
+        <p:txBody>
+          <a:bodyPr wrap="square" rtlCol="0" anchor="ctr"/>
+          <a:lstStyle/>
+          <a:p>
+            <a:pPr indent="0" marL="0">
+              <a:buNone/>
+            </a:pPr>
+            <a:r>
+              <a:rPr lang="en-US" sz="900" dirty="0">
+                <a:solidFill>
+                  <a:srgbClr val="A1AEC2"/>
+                </a:solidFill>
+                <a:latin typeface="Arial" pitchFamily="34" charset="0"/>
+                <a:ea typeface="Arial" pitchFamily="34" charset="-122"/>
+                <a:cs typeface="Arial" pitchFamily="34" charset="-120"/>
+              </a:rPr>
+              <a:t>Detección ≥20% + campanita</a:t>
+            </a:r>
+            <a:endParaRPr lang="en-US" sz="900" dirty="0"/>
+          </a:p>
+        </p:txBody>
+      </p:sp>
+      <p:sp>
+        <p:nvSpPr>
+          <p:cNvPr id="36" name="Shape 33"/>
+          <p:cNvSpPr/>
+          <p:nvPr/>
+        </p:nvSpPr>
+        <p:spPr>
+          <a:xfrm>
+            <a:off x="3337560" y="2926080"/>
+            <a:ext cx="2697480" cy="1234440"/>
+          </a:xfrm>
+          <a:prstGeom prst="roundRect">
+            <a:avLst>
+              <a:gd name="adj" fmla="val 5185"/>
             </a:avLst>
           </a:prstGeom>
           <a:solidFill>
@@ -6117,30 +6594,523 @@
       </p:sp>
       <p:sp>
         <p:nvSpPr>
-          <p:cNvPr id="27" name="Text 24"/>
-          <p:cNvSpPr/>
-          <p:nvPr/>
-        </p:nvSpPr>
-        <p:spPr>
-          <a:xfrm>
-            <a:off x="8348472" y="3493008"/>
-            <a:ext cx="3328416" cy="320040"/>
-          </a:xfrm>
-          <a:prstGeom prst="rect">
-            <a:avLst/>
-          </a:prstGeom>
-          <a:noFill/>
-          <a:ln/>
-        </p:spPr>
-        <p:txBody>
-          <a:bodyPr wrap="square" rtlCol="0" anchor="ctr"/>
-          <a:lstStyle/>
-          <a:p>
-            <a:pPr indent="0" marL="0">
-              <a:buNone/>
-            </a:pPr>
-            <a:r>
-              <a:rPr lang="en-US" sz="1250" b="1" dirty="0">
+          <p:cNvPr id="37" name="Shape 34"/>
+          <p:cNvSpPr/>
+          <p:nvPr/>
+        </p:nvSpPr>
+        <p:spPr>
+          <a:xfrm>
+            <a:off x="3465576" y="3035808"/>
+            <a:ext cx="310896" cy="310896"/>
+          </a:xfrm>
+          <a:prstGeom prst="roundRect">
+            <a:avLst>
+              <a:gd name="adj" fmla="val 50000"/>
+            </a:avLst>
+          </a:prstGeom>
+          <a:solidFill>
+            <a:srgbClr val="FBBF24"/>
+          </a:solidFill>
+          <a:ln/>
+        </p:spPr>
+      </p:sp>
+      <p:sp>
+        <p:nvSpPr>
+          <p:cNvPr id="38" name="Text 35"/>
+          <p:cNvSpPr/>
+          <p:nvPr/>
+        </p:nvSpPr>
+        <p:spPr>
+          <a:xfrm>
+            <a:off x="3465576" y="3035808"/>
+            <a:ext cx="310896" cy="310896"/>
+          </a:xfrm>
+          <a:prstGeom prst="rect">
+            <a:avLst/>
+          </a:prstGeom>
+          <a:noFill/>
+          <a:ln/>
+        </p:spPr>
+        <p:txBody>
+          <a:bodyPr wrap="square" rtlCol="0" anchor="ctr"/>
+          <a:lstStyle/>
+          <a:p>
+            <a:pPr algn="ctr" indent="0" marL="0">
+              <a:buNone/>
+            </a:pPr>
+            <a:r>
+              <a:rPr lang="en-US" sz="1200" b="1" dirty="0">
+                <a:solidFill>
+                  <a:srgbClr val="0B0F17"/>
+                </a:solidFill>
+                <a:latin typeface="Arial" pitchFamily="34" charset="0"/>
+                <a:ea typeface="Arial" pitchFamily="34" charset="-122"/>
+                <a:cs typeface="Arial" pitchFamily="34" charset="-120"/>
+              </a:rPr>
+              <a:t>6</a:t>
+            </a:r>
+            <a:endParaRPr lang="en-US" sz="1200" dirty="0"/>
+          </a:p>
+        </p:txBody>
+      </p:sp>
+      <p:sp>
+        <p:nvSpPr>
+          <p:cNvPr id="39" name="Text 36"/>
+          <p:cNvSpPr/>
+          <p:nvPr/>
+        </p:nvSpPr>
+        <p:spPr>
+          <a:xfrm>
+            <a:off x="3465576" y="3401568"/>
+            <a:ext cx="2441448" cy="365760"/>
+          </a:xfrm>
+          <a:prstGeom prst="rect">
+            <a:avLst/>
+          </a:prstGeom>
+          <a:noFill/>
+          <a:ln/>
+        </p:spPr>
+        <p:txBody>
+          <a:bodyPr wrap="square" rtlCol="0" anchor="ctr"/>
+          <a:lstStyle/>
+          <a:p>
+            <a:pPr indent="0" marL="0">
+              <a:buNone/>
+            </a:pPr>
+            <a:r>
+              <a:rPr lang="en-US" sz="1100" b="1" dirty="0">
+                <a:solidFill>
+                  <a:srgbClr val="EDF2FA"/>
+                </a:solidFill>
+                <a:latin typeface="Arial" pitchFamily="34" charset="0"/>
+                <a:ea typeface="Arial" pitchFamily="34" charset="-122"/>
+                <a:cs typeface="Arial" pitchFamily="34" charset="-120"/>
+              </a:rPr>
+              <a:t>Reportes Departamentales</a:t>
+            </a:r>
+            <a:endParaRPr lang="en-US" sz="1100" dirty="0"/>
+          </a:p>
+        </p:txBody>
+      </p:sp>
+      <p:sp>
+        <p:nvSpPr>
+          <p:cNvPr id="40" name="Text 37"/>
+          <p:cNvSpPr/>
+          <p:nvPr/>
+        </p:nvSpPr>
+        <p:spPr>
+          <a:xfrm>
+            <a:off x="3465576" y="3767328"/>
+            <a:ext cx="2441448" cy="365760"/>
+          </a:xfrm>
+          <a:prstGeom prst="rect">
+            <a:avLst/>
+          </a:prstGeom>
+          <a:noFill/>
+          <a:ln/>
+        </p:spPr>
+        <p:txBody>
+          <a:bodyPr wrap="square" rtlCol="0" anchor="ctr"/>
+          <a:lstStyle/>
+          <a:p>
+            <a:pPr indent="0" marL="0">
+              <a:buNone/>
+            </a:pPr>
+            <a:r>
+              <a:rPr lang="en-US" sz="900" dirty="0">
+                <a:solidFill>
+                  <a:srgbClr val="A1AEC2"/>
+                </a:solidFill>
+                <a:latin typeface="Arial" pitchFamily="34" charset="0"/>
+                <a:ea typeface="Arial" pitchFamily="34" charset="-122"/>
+                <a:cs typeface="Arial" pitchFamily="34" charset="-120"/>
+              </a:rPr>
+              <a:t>PDF, Excel y CSV</a:t>
+            </a:r>
+            <a:endParaRPr lang="en-US" sz="900" dirty="0"/>
+          </a:p>
+        </p:txBody>
+      </p:sp>
+      <p:sp>
+        <p:nvSpPr>
+          <p:cNvPr id="41" name="Shape 38"/>
+          <p:cNvSpPr/>
+          <p:nvPr/>
+        </p:nvSpPr>
+        <p:spPr>
+          <a:xfrm>
+            <a:off x="6172200" y="2926080"/>
+            <a:ext cx="2697480" cy="1234440"/>
+          </a:xfrm>
+          <a:prstGeom prst="roundRect">
+            <a:avLst>
+              <a:gd name="adj" fmla="val 5185"/>
+            </a:avLst>
+          </a:prstGeom>
+          <a:solidFill>
+            <a:srgbClr val="182131"/>
+          </a:solidFill>
+          <a:ln w="12700">
+            <a:solidFill>
+              <a:srgbClr val="263143"/>
+            </a:solidFill>
+            <a:prstDash val="solid"/>
+          </a:ln>
+        </p:spPr>
+      </p:sp>
+      <p:sp>
+        <p:nvSpPr>
+          <p:cNvPr id="42" name="Shape 39"/>
+          <p:cNvSpPr/>
+          <p:nvPr/>
+        </p:nvSpPr>
+        <p:spPr>
+          <a:xfrm>
+            <a:off x="6300216" y="3035808"/>
+            <a:ext cx="310896" cy="310896"/>
+          </a:xfrm>
+          <a:prstGeom prst="roundRect">
+            <a:avLst>
+              <a:gd name="adj" fmla="val 50000"/>
+            </a:avLst>
+          </a:prstGeom>
+          <a:solidFill>
+            <a:srgbClr val="FBBF24"/>
+          </a:solidFill>
+          <a:ln/>
+        </p:spPr>
+      </p:sp>
+      <p:sp>
+        <p:nvSpPr>
+          <p:cNvPr id="43" name="Text 40"/>
+          <p:cNvSpPr/>
+          <p:nvPr/>
+        </p:nvSpPr>
+        <p:spPr>
+          <a:xfrm>
+            <a:off x="6300216" y="3035808"/>
+            <a:ext cx="310896" cy="310896"/>
+          </a:xfrm>
+          <a:prstGeom prst="rect">
+            <a:avLst/>
+          </a:prstGeom>
+          <a:noFill/>
+          <a:ln/>
+        </p:spPr>
+        <p:txBody>
+          <a:bodyPr wrap="square" rtlCol="0" anchor="ctr"/>
+          <a:lstStyle/>
+          <a:p>
+            <a:pPr algn="ctr" indent="0" marL="0">
+              <a:buNone/>
+            </a:pPr>
+            <a:r>
+              <a:rPr lang="en-US" sz="1200" b="1" dirty="0">
+                <a:solidFill>
+                  <a:srgbClr val="0B0F17"/>
+                </a:solidFill>
+                <a:latin typeface="Arial" pitchFamily="34" charset="0"/>
+                <a:ea typeface="Arial" pitchFamily="34" charset="-122"/>
+                <a:cs typeface="Arial" pitchFamily="34" charset="-120"/>
+              </a:rPr>
+              <a:t>7</a:t>
+            </a:r>
+            <a:endParaRPr lang="en-US" sz="1200" dirty="0"/>
+          </a:p>
+        </p:txBody>
+      </p:sp>
+      <p:sp>
+        <p:nvSpPr>
+          <p:cNvPr id="44" name="Text 41"/>
+          <p:cNvSpPr/>
+          <p:nvPr/>
+        </p:nvSpPr>
+        <p:spPr>
+          <a:xfrm>
+            <a:off x="6300216" y="3401568"/>
+            <a:ext cx="2441448" cy="365760"/>
+          </a:xfrm>
+          <a:prstGeom prst="rect">
+            <a:avLst/>
+          </a:prstGeom>
+          <a:noFill/>
+          <a:ln/>
+        </p:spPr>
+        <p:txBody>
+          <a:bodyPr wrap="square" rtlCol="0" anchor="ctr"/>
+          <a:lstStyle/>
+          <a:p>
+            <a:pPr indent="0" marL="0">
+              <a:buNone/>
+            </a:pPr>
+            <a:r>
+              <a:rPr lang="en-US" sz="1100" b="1" dirty="0">
+                <a:solidFill>
+                  <a:srgbClr val="EDF2FA"/>
+                </a:solidFill>
+                <a:latin typeface="Arial" pitchFamily="34" charset="0"/>
+                <a:ea typeface="Arial" pitchFamily="34" charset="-122"/>
+                <a:cs typeface="Arial" pitchFamily="34" charset="-120"/>
+              </a:rPr>
+              <a:t>Proyección SMA-SF</a:t>
+            </a:r>
+            <a:endParaRPr lang="en-US" sz="1100" dirty="0"/>
+          </a:p>
+        </p:txBody>
+      </p:sp>
+      <p:sp>
+        <p:nvSpPr>
+          <p:cNvPr id="45" name="Text 42"/>
+          <p:cNvSpPr/>
+          <p:nvPr/>
+        </p:nvSpPr>
+        <p:spPr>
+          <a:xfrm>
+            <a:off x="6300216" y="3767328"/>
+            <a:ext cx="2441448" cy="365760"/>
+          </a:xfrm>
+          <a:prstGeom prst="rect">
+            <a:avLst/>
+          </a:prstGeom>
+          <a:noFill/>
+          <a:ln/>
+        </p:spPr>
+        <p:txBody>
+          <a:bodyPr wrap="square" rtlCol="0" anchor="ctr"/>
+          <a:lstStyle/>
+          <a:p>
+            <a:pPr indent="0" marL="0">
+              <a:buNone/>
+            </a:pPr>
+            <a:r>
+              <a:rPr lang="en-US" sz="900" dirty="0">
+                <a:solidFill>
+                  <a:srgbClr val="A1AEC2"/>
+                </a:solidFill>
+                <a:latin typeface="Arial" pitchFamily="34" charset="0"/>
+                <a:ea typeface="Arial" pitchFamily="34" charset="-122"/>
+                <a:cs typeface="Arial" pitchFamily="34" charset="-120"/>
+              </a:rPr>
+              <a:t>Estacionalidad guatemalteca</a:t>
+            </a:r>
+            <a:endParaRPr lang="en-US" sz="900" dirty="0"/>
+          </a:p>
+        </p:txBody>
+      </p:sp>
+      <p:sp>
+        <p:nvSpPr>
+          <p:cNvPr id="46" name="Shape 43"/>
+          <p:cNvSpPr/>
+          <p:nvPr/>
+        </p:nvSpPr>
+        <p:spPr>
+          <a:xfrm>
+            <a:off x="9006840" y="2926080"/>
+            <a:ext cx="2697480" cy="1234440"/>
+          </a:xfrm>
+          <a:prstGeom prst="roundRect">
+            <a:avLst>
+              <a:gd name="adj" fmla="val 5185"/>
+            </a:avLst>
+          </a:prstGeom>
+          <a:solidFill>
+            <a:srgbClr val="182131"/>
+          </a:solidFill>
+          <a:ln w="12700">
+            <a:solidFill>
+              <a:srgbClr val="263143"/>
+            </a:solidFill>
+            <a:prstDash val="solid"/>
+          </a:ln>
+        </p:spPr>
+      </p:sp>
+      <p:sp>
+        <p:nvSpPr>
+          <p:cNvPr id="47" name="Shape 44"/>
+          <p:cNvSpPr/>
+          <p:nvPr/>
+        </p:nvSpPr>
+        <p:spPr>
+          <a:xfrm>
+            <a:off x="9134856" y="3035808"/>
+            <a:ext cx="310896" cy="310896"/>
+          </a:xfrm>
+          <a:prstGeom prst="roundRect">
+            <a:avLst>
+              <a:gd name="adj" fmla="val 50000"/>
+            </a:avLst>
+          </a:prstGeom>
+          <a:solidFill>
+            <a:srgbClr val="FBBF24"/>
+          </a:solidFill>
+          <a:ln/>
+        </p:spPr>
+      </p:sp>
+      <p:sp>
+        <p:nvSpPr>
+          <p:cNvPr id="48" name="Text 45"/>
+          <p:cNvSpPr/>
+          <p:nvPr/>
+        </p:nvSpPr>
+        <p:spPr>
+          <a:xfrm>
+            <a:off x="9134856" y="3035808"/>
+            <a:ext cx="310896" cy="310896"/>
+          </a:xfrm>
+          <a:prstGeom prst="rect">
+            <a:avLst/>
+          </a:prstGeom>
+          <a:noFill/>
+          <a:ln/>
+        </p:spPr>
+        <p:txBody>
+          <a:bodyPr wrap="square" rtlCol="0" anchor="ctr"/>
+          <a:lstStyle/>
+          <a:p>
+            <a:pPr algn="ctr" indent="0" marL="0">
+              <a:buNone/>
+            </a:pPr>
+            <a:r>
+              <a:rPr lang="en-US" sz="1200" b="1" dirty="0">
+                <a:solidFill>
+                  <a:srgbClr val="0B0F17"/>
+                </a:solidFill>
+                <a:latin typeface="Arial" pitchFamily="34" charset="0"/>
+                <a:ea typeface="Arial" pitchFamily="34" charset="-122"/>
+                <a:cs typeface="Arial" pitchFamily="34" charset="-120"/>
+              </a:rPr>
+              <a:t>8</a:t>
+            </a:r>
+            <a:endParaRPr lang="en-US" sz="1200" dirty="0"/>
+          </a:p>
+        </p:txBody>
+      </p:sp>
+      <p:sp>
+        <p:nvSpPr>
+          <p:cNvPr id="49" name="Text 46"/>
+          <p:cNvSpPr/>
+          <p:nvPr/>
+        </p:nvSpPr>
+        <p:spPr>
+          <a:xfrm>
+            <a:off x="9134856" y="3401568"/>
+            <a:ext cx="2441448" cy="365760"/>
+          </a:xfrm>
+          <a:prstGeom prst="rect">
+            <a:avLst/>
+          </a:prstGeom>
+          <a:noFill/>
+          <a:ln/>
+        </p:spPr>
+        <p:txBody>
+          <a:bodyPr wrap="square" rtlCol="0" anchor="ctr"/>
+          <a:lstStyle/>
+          <a:p>
+            <a:pPr indent="0" marL="0">
+              <a:buNone/>
+            </a:pPr>
+            <a:r>
+              <a:rPr lang="en-US" sz="1100" b="1" dirty="0">
+                <a:solidFill>
+                  <a:srgbClr val="EDF2FA"/>
+                </a:solidFill>
+                <a:latin typeface="Arial" pitchFamily="34" charset="0"/>
+                <a:ea typeface="Arial" pitchFamily="34" charset="-122"/>
+                <a:cs typeface="Arial" pitchFamily="34" charset="-120"/>
+              </a:rPr>
+              <a:t>API REST + Servidor MCP</a:t>
+            </a:r>
+            <a:endParaRPr lang="en-US" sz="1100" dirty="0"/>
+          </a:p>
+        </p:txBody>
+      </p:sp>
+      <p:sp>
+        <p:nvSpPr>
+          <p:cNvPr id="50" name="Text 47"/>
+          <p:cNvSpPr/>
+          <p:nvPr/>
+        </p:nvSpPr>
+        <p:spPr>
+          <a:xfrm>
+            <a:off x="9134856" y="3767328"/>
+            <a:ext cx="2441448" cy="365760"/>
+          </a:xfrm>
+          <a:prstGeom prst="rect">
+            <a:avLst/>
+          </a:prstGeom>
+          <a:noFill/>
+          <a:ln/>
+        </p:spPr>
+        <p:txBody>
+          <a:bodyPr wrap="square" rtlCol="0" anchor="ctr"/>
+          <a:lstStyle/>
+          <a:p>
+            <a:pPr indent="0" marL="0">
+              <a:buNone/>
+            </a:pPr>
+            <a:r>
+              <a:rPr lang="en-US" sz="900" dirty="0">
+                <a:solidFill>
+                  <a:srgbClr val="A1AEC2"/>
+                </a:solidFill>
+                <a:latin typeface="Arial" pitchFamily="34" charset="0"/>
+                <a:ea typeface="Arial" pitchFamily="34" charset="-122"/>
+                <a:cs typeface="Arial" pitchFamily="34" charset="-120"/>
+              </a:rPr>
+              <a:t>Consumo externo e IA activa</a:t>
+            </a:r>
+            <a:endParaRPr lang="en-US" sz="900" dirty="0"/>
+          </a:p>
+        </p:txBody>
+      </p:sp>
+      <p:sp>
+        <p:nvSpPr>
+          <p:cNvPr id="51" name="Shape 48"/>
+          <p:cNvSpPr/>
+          <p:nvPr/>
+        </p:nvSpPr>
+        <p:spPr>
+          <a:xfrm>
+            <a:off x="502920" y="5989320"/>
+            <a:ext cx="11201400" cy="548640"/>
+          </a:xfrm>
+          <a:prstGeom prst="roundRect">
+            <a:avLst>
+              <a:gd name="adj" fmla="val 13333"/>
+            </a:avLst>
+          </a:prstGeom>
+          <a:solidFill>
+            <a:srgbClr val="3A2F12"/>
+          </a:solidFill>
+          <a:ln/>
+        </p:spPr>
+      </p:sp>
+      <p:sp>
+        <p:nvSpPr>
+          <p:cNvPr id="52" name="Text 49"/>
+          <p:cNvSpPr/>
+          <p:nvPr/>
+        </p:nvSpPr>
+        <p:spPr>
+          <a:xfrm>
+            <a:off x="640080" y="5989320"/>
+            <a:ext cx="10972800" cy="548640"/>
+          </a:xfrm>
+          <a:prstGeom prst="rect">
+            <a:avLst/>
+          </a:prstGeom>
+          <a:noFill/>
+          <a:ln/>
+        </p:spPr>
+        <p:txBody>
+          <a:bodyPr wrap="square" rtlCol="0" anchor="ctr"/>
+          <a:lstStyle/>
+          <a:p>
+            <a:pPr indent="0" marL="0">
+              <a:buNone/>
+            </a:pPr>
+            <a:r>
+              <a:rPr lang="en-US" sz="1200" b="1" dirty="0">
                 <a:solidFill>
                   <a:srgbClr val="FBBF24"/>
                 </a:solidFill>
@@ -6148,90 +7118,9 @@
                 <a:ea typeface="Arial" pitchFamily="34" charset="-122"/>
                 <a:cs typeface="Arial" pitchFamily="34" charset="-120"/>
               </a:rPr>
-              <a:t>A09 Logging &amp; Alerting</a:t>
-            </a:r>
-            <a:endParaRPr lang="en-US" sz="1250" dirty="0"/>
-          </a:p>
-        </p:txBody>
-      </p:sp>
-      <p:sp>
-        <p:nvSpPr>
-          <p:cNvPr id="28" name="Text 25"/>
-          <p:cNvSpPr/>
-          <p:nvPr/>
-        </p:nvSpPr>
-        <p:spPr>
-          <a:xfrm>
-            <a:off x="8348472" y="3822192"/>
-            <a:ext cx="3328416" cy="1051560"/>
-          </a:xfrm>
-          <a:prstGeom prst="rect">
-            <a:avLst/>
-          </a:prstGeom>
-          <a:noFill/>
-          <a:ln/>
-        </p:spPr>
-        <p:txBody>
-          <a:bodyPr wrap="square" rtlCol="0" anchor="t"/>
-          <a:lstStyle/>
-          <a:p>
-            <a:pPr indent="0" marL="0">
-              <a:lnSpc>
-                <a:spcPct val="115000"/>
-              </a:lnSpc>
-              <a:buNone/>
-            </a:pPr>
-            <a:r>
-              <a:rPr lang="en-US" sz="1050" dirty="0">
-                <a:solidFill>
-                  <a:srgbClr val="A1AEC2"/>
-                </a:solidFill>
-                <a:latin typeface="Arial" pitchFamily="34" charset="0"/>
-                <a:ea typeface="Arial" pitchFamily="34" charset="-122"/>
-                <a:cs typeface="Arial" pitchFamily="34" charset="-120"/>
-              </a:rPr>
-              <a:t>audit_logs con IP y User-Agent en cada evento sensible.</a:t>
-            </a:r>
-            <a:endParaRPr lang="en-US" sz="1050" dirty="0"/>
-          </a:p>
-        </p:txBody>
-      </p:sp>
-      <p:sp>
-        <p:nvSpPr>
-          <p:cNvPr id="29" name="Text 26"/>
-          <p:cNvSpPr/>
-          <p:nvPr/>
-        </p:nvSpPr>
-        <p:spPr>
-          <a:xfrm>
-            <a:off x="502920" y="5029200"/>
-            <a:ext cx="11201400" cy="365760"/>
-          </a:xfrm>
-          <a:prstGeom prst="rect">
-            <a:avLst/>
-          </a:prstGeom>
-          <a:noFill/>
-          <a:ln/>
-        </p:spPr>
-        <p:txBody>
-          <a:bodyPr wrap="square" rtlCol="0" anchor="ctr"/>
-          <a:lstStyle/>
-          <a:p>
-            <a:pPr indent="0" marL="0">
-              <a:buNone/>
-            </a:pPr>
-            <a:r>
-              <a:rPr lang="en-US" sz="1100" i="1" dirty="0">
-                <a:solidFill>
-                  <a:srgbClr val="A1AEC2"/>
-                </a:solidFill>
-                <a:latin typeface="Arial" pitchFamily="34" charset="0"/>
-                <a:ea typeface="Arial" pitchFamily="34" charset="-122"/>
-                <a:cs typeface="Arial" pitchFamily="34" charset="-120"/>
-              </a:rPr>
-              <a:t>Demo en vivo: usuario visualizador → /farms/create → 403 Prohibido, registrado en audit_logs (control A09).</a:t>
-            </a:r>
-            <a:endParaRPr lang="en-US" sz="1100" dirty="0"/>
+              <a:t>A continuación: demostración en vivo sobre la URL pública — no localhost, no un video de respaldo.</a:t>
+            </a:r>
+            <a:endParaRPr lang="en-US" sz="1200" dirty="0"/>
           </a:p>
         </p:txBody>
       </p:sp>
@@ -6343,7 +7232,7 @@
                 <a:ea typeface="Arial" pitchFamily="34" charset="-122"/>
                 <a:cs typeface="Arial" pitchFamily="34" charset="-120"/>
               </a:rPr>
-              <a:t>14 · USO DE INTELIGENCIA ARTIFICIAL (20%)</a:t>
+              <a:t>14 · CIERRE</a:t>
             </a:r>
             <a:endParaRPr lang="en-US" sz="1200" dirty="0"/>
           </a:p>
@@ -6382,7 +7271,7 @@
                 <a:ea typeface="Arial" pitchFamily="34" charset="-122"/>
                 <a:cs typeface="Arial" pitchFamily="34" charset="-120"/>
               </a:rPr>
-              <a:t>Desarrollo Incremental y Disciplinado con 5 Agentes de IA</a:t>
+              <a:t>Equipo de Desarrollo y Conclusión</a:t>
             </a:r>
             <a:endParaRPr lang="en-US" sz="2200" dirty="0"/>
           </a:p>
@@ -6397,7 +7286,7 @@
         <p:spPr>
           <a:xfrm>
             <a:off x="502920" y="1078992"/>
-            <a:ext cx="3657600" cy="274320"/>
+            <a:ext cx="4572000" cy="274320"/>
           </a:xfrm>
           <a:prstGeom prst="rect">
             <a:avLst/>
@@ -6421,7 +7310,7 @@
                 <a:ea typeface="Arial" pitchFamily="34" charset="-122"/>
                 <a:cs typeface="Arial" pitchFamily="34" charset="-120"/>
               </a:rPr>
-              <a:t>8:45 – 9:45 · Carlos</a:t>
+              <a:t>Después de la demo en vivo · Ambos</a:t>
             </a:r>
             <a:endParaRPr lang="en-US" sz="1100" dirty="0"/>
           </a:p>
@@ -6506,7 +7395,7 @@
                 <a:ea typeface="Arial" pitchFamily="34" charset="-122"/>
                 <a:cs typeface="Arial" pitchFamily="34" charset="-120"/>
               </a:rPr>
-              <a:t>Orador: Carlos</a:t>
+              <a:t>Orador: Ambos</a:t>
             </a:r>
             <a:endParaRPr lang="en-US" sz="1000" dirty="0"/>
           </a:p>
@@ -6545,7 +7434,7 @@
                 <a:ea typeface="Arial" pitchFamily="34" charset="-122"/>
                 <a:cs typeface="Arial" pitchFamily="34" charset="-120"/>
               </a:rPr>
-              <a:t>Metodología del Equipo</a:t>
+              <a:t>K'in Solar Guatemala · UMG 2026</a:t>
             </a:r>
             <a:endParaRPr lang="en-US" sz="1000" dirty="0"/>
           </a:p>
@@ -6560,11 +7449,11 @@
         <p:spPr>
           <a:xfrm>
             <a:off x="502920" y="1600200"/>
-            <a:ext cx="3566160" cy="1737360"/>
+            <a:ext cx="5440680" cy="2377440"/>
           </a:xfrm>
           <a:prstGeom prst="roundRect">
             <a:avLst>
-              <a:gd name="adj" fmla="val 4211"/>
+              <a:gd name="adj" fmla="val 3077"/>
             </a:avLst>
           </a:prstGeom>
           <a:solidFill>
@@ -6587,7 +7476,7 @@
         <p:spPr>
           <a:xfrm>
             <a:off x="667512" y="1709928"/>
-            <a:ext cx="3236976" cy="320040"/>
+            <a:ext cx="5111496" cy="320040"/>
           </a:xfrm>
           <a:prstGeom prst="rect">
             <a:avLst/>
@@ -6611,7 +7500,7 @@
                 <a:ea typeface="Arial" pitchFamily="34" charset="-122"/>
                 <a:cs typeface="Arial" pitchFamily="34" charset="-120"/>
               </a:rPr>
-              <a:t>5 Agentes en Paralelo</a:t>
+              <a:t>Andy Aquino</a:t>
             </a:r>
             <a:endParaRPr lang="en-US" sz="1250" dirty="0"/>
           </a:p>
@@ -6626,7 +7515,7 @@
         <p:spPr>
           <a:xfrm>
             <a:off x="667512" y="2039112"/>
-            <a:ext cx="3236976" cy="1188720"/>
+            <a:ext cx="5111496" cy="1828800"/>
           </a:xfrm>
           <a:prstGeom prst="rect">
             <a:avLst/>
@@ -6653,50 +7542,10 @@
                 <a:ea typeface="Arial" pitchFamily="34" charset="-122"/>
                 <a:cs typeface="Arial" pitchFamily="34" charset="-120"/>
               </a:rPr>
-              <a:t>Claude Code ×2 (Andy y Carlos)</a:t>
+              <a:t>Arquitectura de Datos, Integración Frontend UI/UX, Servidor MCP Propio, Despliegue en AWS EC2 y Demo.</a:t>
             </a:r>
             <a:endParaRPr lang="en-US" sz="1050" dirty="0"/>
           </a:p>
-          <a:p>
-            <a:pPr indent="0" marL="0">
-              <a:lnSpc>
-                <a:spcPct val="115000"/>
-              </a:lnSpc>
-              <a:buNone/>
-            </a:pPr>
-            <a:r>
-              <a:rPr lang="en-US" sz="1050" dirty="0">
-                <a:solidFill>
-                  <a:srgbClr val="526175"/>
-                </a:solidFill>
-                <a:latin typeface="Arial" pitchFamily="34" charset="0"/>
-                <a:ea typeface="Arial" pitchFamily="34" charset="-122"/>
-                <a:cs typeface="Arial" pitchFamily="34" charset="-120"/>
-              </a:rPr>
-              <a:t>Codex (Carlos)</a:t>
-            </a:r>
-            <a:endParaRPr lang="en-US" sz="1050" dirty="0"/>
-          </a:p>
-          <a:p>
-            <a:pPr indent="0" marL="0">
-              <a:lnSpc>
-                <a:spcPct val="115000"/>
-              </a:lnSpc>
-              <a:buNone/>
-            </a:pPr>
-            <a:r>
-              <a:rPr lang="en-US" sz="1050" dirty="0">
-                <a:solidFill>
-                  <a:srgbClr val="526175"/>
-                </a:solidFill>
-                <a:latin typeface="Arial" pitchFamily="34" charset="0"/>
-                <a:ea typeface="Arial" pitchFamily="34" charset="-122"/>
-                <a:cs typeface="Arial" pitchFamily="34" charset="-120"/>
-              </a:rPr>
-              <a:t>Antigravity ×2 (Andy y Carlos)</a:t>
-            </a:r>
-            <a:endParaRPr lang="en-US" sz="1050" dirty="0"/>
-          </a:p>
         </p:txBody>
       </p:sp>
       <p:sp>
@@ -6707,12 +7556,12 @@
         </p:nvSpPr>
         <p:spPr>
           <a:xfrm>
-            <a:off x="4251960" y="1600200"/>
-            <a:ext cx="3566160" cy="1737360"/>
+            <a:off x="6172200" y="1600200"/>
+            <a:ext cx="5532120" cy="2377440"/>
           </a:xfrm>
           <a:prstGeom prst="roundRect">
             <a:avLst>
-              <a:gd name="adj" fmla="val 4211"/>
+              <a:gd name="adj" fmla="val 3077"/>
             </a:avLst>
           </a:prstGeom>
           <a:solidFill>
@@ -6734,8 +7583,8 @@
         </p:nvSpPr>
         <p:spPr>
           <a:xfrm>
-            <a:off x="4416552" y="1709928"/>
-            <a:ext cx="3236976" cy="320040"/>
+            <a:off x="6336792" y="1709928"/>
+            <a:ext cx="5202936" cy="320040"/>
           </a:xfrm>
           <a:prstGeom prst="rect">
             <a:avLst/>
@@ -6759,7 +7608,7 @@
                 <a:ea typeface="Arial" pitchFamily="34" charset="-122"/>
                 <a:cs typeface="Arial" pitchFamily="34" charset="-120"/>
               </a:rPr>
-              <a:t>Ramas y Pull Requests</a:t>
+              <a:t>Carlos</a:t>
             </a:r>
             <a:endParaRPr lang="en-US" sz="1250" dirty="0"/>
           </a:p>
@@ -6773,8 +7622,8 @@
         </p:nvSpPr>
         <p:spPr>
           <a:xfrm>
-            <a:off x="4416552" y="2039112"/>
-            <a:ext cx="3236976" cy="1188720"/>
+            <a:off x="6336792" y="2039112"/>
+            <a:ext cx="5202936" cy="1828800"/>
           </a:xfrm>
           <a:prstGeom prst="rect">
             <a:avLst/>
@@ -6801,50 +7650,10 @@
                 <a:ea typeface="Arial" pitchFamily="34" charset="-122"/>
                 <a:cs typeface="Arial" pitchFamily="34" charset="-120"/>
               </a:rPr>
-              <a:t>Decenas de PRs fusionados sobre master.</a:t>
+              <a:t>Seguridad OWASP Top 10, Lógica de Negocio y Servicios, Auditoría de Calidad, Bitácora y Control de Versiones.</a:t>
             </a:r>
             <a:endParaRPr lang="en-US" sz="1050" dirty="0"/>
           </a:p>
-          <a:p>
-            <a:pPr indent="0" marL="0">
-              <a:lnSpc>
-                <a:spcPct val="115000"/>
-              </a:lnSpc>
-              <a:buNone/>
-            </a:pPr>
-            <a:r>
-              <a:rPr lang="en-US" sz="1050" dirty="0">
-                <a:solidFill>
-                  <a:srgbClr val="526175"/>
-                </a:solidFill>
-                <a:latin typeface="Arial" pitchFamily="34" charset="0"/>
-                <a:ea typeface="Arial" pitchFamily="34" charset="-122"/>
-                <a:cs typeface="Arial" pitchFamily="34" charset="-120"/>
-              </a:rPr>
-              <a:t>Cero commits directos a master.</a:t>
-            </a:r>
-            <a:endParaRPr lang="en-US" sz="1050" dirty="0"/>
-          </a:p>
-          <a:p>
-            <a:pPr indent="0" marL="0">
-              <a:lnSpc>
-                <a:spcPct val="115000"/>
-              </a:lnSpc>
-              <a:buNone/>
-            </a:pPr>
-            <a:r>
-              <a:rPr lang="en-US" sz="1050" dirty="0">
-                <a:solidFill>
-                  <a:srgbClr val="526175"/>
-                </a:solidFill>
-                <a:latin typeface="Arial" pitchFamily="34" charset="0"/>
-                <a:ea typeface="Arial" pitchFamily="34" charset="-122"/>
-                <a:cs typeface="Arial" pitchFamily="34" charset="-120"/>
-              </a:rPr>
-              <a:t>Revisión cruzada obligatoria.</a:t>
-            </a:r>
-            <a:endParaRPr lang="en-US" sz="1050" dirty="0"/>
-          </a:p>
         </p:txBody>
       </p:sp>
       <p:sp>
@@ -6855,20 +7664,20 @@
         </p:nvSpPr>
         <p:spPr>
           <a:xfrm>
-            <a:off x="8001000" y="1600200"/>
-            <a:ext cx="3703320" cy="1737360"/>
+            <a:off x="502920" y="4206240"/>
+            <a:ext cx="11201400" cy="1417320"/>
           </a:xfrm>
           <a:prstGeom prst="roundRect">
             <a:avLst>
-              <a:gd name="adj" fmla="val 4211"/>
+              <a:gd name="adj" fmla="val 5161"/>
             </a:avLst>
           </a:prstGeom>
           <a:solidFill>
-            <a:srgbClr val="F8FAFC"/>
+            <a:srgbClr val="FCE9CE"/>
           </a:solidFill>
           <a:ln w="12700">
             <a:solidFill>
-              <a:srgbClr val="E2E8F0"/>
+              <a:srgbClr val="A65A00"/>
             </a:solidFill>
             <a:prstDash val="solid"/>
           </a:ln>
@@ -6882,184 +7691,34 @@
         </p:nvSpPr>
         <p:spPr>
           <a:xfrm>
-            <a:off x="8165592" y="1709928"/>
-            <a:ext cx="3374136" cy="320040"/>
-          </a:xfrm>
-          <a:prstGeom prst="rect">
-            <a:avLst/>
-          </a:prstGeom>
-          <a:noFill/>
-          <a:ln/>
-        </p:spPr>
-        <p:txBody>
-          <a:bodyPr wrap="square" rtlCol="0" anchor="ctr"/>
-          <a:lstStyle/>
-          <a:p>
-            <a:pPr indent="0" marL="0">
-              <a:buNone/>
-            </a:pPr>
-            <a:r>
-              <a:rPr lang="en-US" sz="1250" b="1" dirty="0">
-                <a:solidFill>
-                  <a:srgbClr val="A65A00"/>
-                </a:solidFill>
-                <a:latin typeface="Arial" pitchFamily="34" charset="0"/>
-                <a:ea typeface="Arial" pitchFamily="34" charset="-122"/>
-                <a:cs typeface="Arial" pitchFamily="34" charset="-120"/>
-              </a:rPr>
-              <a:t>Bitácora de Prompts</a:t>
-            </a:r>
-            <a:endParaRPr lang="en-US" sz="1250" dirty="0"/>
-          </a:p>
-        </p:txBody>
-      </p:sp>
-      <p:sp>
-        <p:nvSpPr>
-          <p:cNvPr id="19" name="Text 16"/>
-          <p:cNvSpPr/>
-          <p:nvPr/>
-        </p:nvSpPr>
-        <p:spPr>
-          <a:xfrm>
-            <a:off x="8165592" y="2039112"/>
-            <a:ext cx="3374136" cy="1188720"/>
-          </a:xfrm>
-          <a:prstGeom prst="rect">
-            <a:avLst/>
-          </a:prstGeom>
-          <a:noFill/>
-          <a:ln/>
-        </p:spPr>
-        <p:txBody>
-          <a:bodyPr wrap="square" rtlCol="0" anchor="t"/>
-          <a:lstStyle/>
-          <a:p>
-            <a:pPr indent="0" marL="0">
-              <a:lnSpc>
-                <a:spcPct val="115000"/>
-              </a:lnSpc>
-              <a:buNone/>
-            </a:pPr>
-            <a:r>
-              <a:rPr lang="en-US" sz="1050" dirty="0">
-                <a:solidFill>
-                  <a:srgbClr val="526175"/>
-                </a:solidFill>
-                <a:latin typeface="Arial" pitchFamily="34" charset="0"/>
-                <a:ea typeface="Arial" pitchFamily="34" charset="-122"/>
-                <a:cs typeface="Arial" pitchFamily="34" charset="-120"/>
-              </a:rPr>
-              <a:t>+1000 líneas: cada prompt, la salida de la IA y la corrección humana obligatoria.</a:t>
-            </a:r>
-            <a:endParaRPr lang="en-US" sz="1050" dirty="0"/>
-          </a:p>
-        </p:txBody>
-      </p:sp>
-      <p:sp>
-        <p:nvSpPr>
-          <p:cNvPr id="20" name="Shape 17"/>
-          <p:cNvSpPr/>
-          <p:nvPr/>
-        </p:nvSpPr>
-        <p:spPr>
-          <a:xfrm>
-            <a:off x="502920" y="3520440"/>
-            <a:ext cx="11201400" cy="1737360"/>
-          </a:xfrm>
-          <a:prstGeom prst="roundRect">
-            <a:avLst>
-              <a:gd name="adj" fmla="val 4211"/>
-            </a:avLst>
-          </a:prstGeom>
-          <a:solidFill>
-            <a:srgbClr val="F8FAFC"/>
-          </a:solidFill>
-          <a:ln w="12700">
-            <a:solidFill>
-              <a:srgbClr val="E2E8F0"/>
-            </a:solidFill>
-            <a:prstDash val="solid"/>
-          </a:ln>
-        </p:spPr>
-      </p:sp>
-      <p:sp>
-        <p:nvSpPr>
-          <p:cNvPr id="21" name="Text 18"/>
-          <p:cNvSpPr/>
-          <p:nvPr/>
-        </p:nvSpPr>
-        <p:spPr>
-          <a:xfrm>
-            <a:off x="667512" y="3630168"/>
-            <a:ext cx="10872216" cy="320040"/>
-          </a:xfrm>
-          <a:prstGeom prst="rect">
-            <a:avLst/>
-          </a:prstGeom>
-          <a:noFill/>
-          <a:ln/>
-        </p:spPr>
-        <p:txBody>
-          <a:bodyPr wrap="square" rtlCol="0" anchor="ctr"/>
-          <a:lstStyle/>
-          <a:p>
-            <a:pPr indent="0" marL="0">
-              <a:buNone/>
-            </a:pPr>
-            <a:r>
-              <a:rPr lang="en-US" sz="1250" b="1" dirty="0">
-                <a:solidFill>
-                  <a:srgbClr val="A65A00"/>
-                </a:solidFill>
-                <a:latin typeface="Arial" pitchFamily="34" charset="0"/>
-                <a:ea typeface="Arial" pitchFamily="34" charset="-122"/>
-                <a:cs typeface="Arial" pitchFamily="34" charset="-120"/>
-              </a:rPr>
-              <a:t>¿Cómo coordinamos 5 agentes sin conflictos?</a:t>
-            </a:r>
-            <a:endParaRPr lang="en-US" sz="1250" dirty="0"/>
-          </a:p>
-        </p:txBody>
-      </p:sp>
-      <p:sp>
-        <p:nvSpPr>
-          <p:cNvPr id="22" name="Text 19"/>
-          <p:cNvSpPr/>
-          <p:nvPr/>
-        </p:nvSpPr>
-        <p:spPr>
-          <a:xfrm>
-            <a:off x="667512" y="3959352"/>
-            <a:ext cx="10872216" cy="1188720"/>
-          </a:xfrm>
-          <a:prstGeom prst="rect">
-            <a:avLst/>
-          </a:prstGeom>
-          <a:noFill/>
-          <a:ln/>
-        </p:spPr>
-        <p:txBody>
-          <a:bodyPr wrap="square" rtlCol="0" anchor="t"/>
-          <a:lstStyle/>
-          <a:p>
-            <a:pPr indent="0" marL="0">
-              <a:lnSpc>
-                <a:spcPct val="115000"/>
-              </a:lnSpc>
-              <a:buNone/>
-            </a:pPr>
-            <a:r>
-              <a:rPr lang="en-US" sz="1050" dirty="0">
-                <a:solidFill>
-                  <a:srgbClr val="526175"/>
-                </a:solidFill>
-                <a:latin typeface="Arial" pitchFamily="34" charset="0"/>
-                <a:ea typeface="Arial" pitchFamily="34" charset="-122"/>
-                <a:cs typeface="Arial" pitchFamily="34" charset="-120"/>
-              </a:rPr>
-              <a:t>Contratos de interfaz congelados en la Hora 1: esquema de base de datos, nombres de rutas y sistema de diseño. Cada agente con zona de propiedad exclusiva de carpetas. La IA escribió buena parte del código — incluyendo esta misma presentación; las decisiones de arquitectura, el modelo de datos y los controles de seguridad los tomamos y verificamos nosotros, y cada corrección queda en la bitácora, no solo en la memoria del equipo.</a:t>
-            </a:r>
-            <a:endParaRPr lang="en-US" sz="1050" dirty="0"/>
+            <a:off x="777240" y="4315968"/>
+            <a:ext cx="10652760" cy="1188720"/>
+          </a:xfrm>
+          <a:prstGeom prst="rect">
+            <a:avLst/>
+          </a:prstGeom>
+          <a:noFill/>
+          <a:ln/>
+        </p:spPr>
+        <p:txBody>
+          <a:bodyPr wrap="square" rtlCol="0" anchor="ctr"/>
+          <a:lstStyle/>
+          <a:p>
+            <a:pPr indent="0" marL="0">
+              <a:buNone/>
+            </a:pPr>
+            <a:r>
+              <a:rPr lang="en-US" sz="1300" i="1" dirty="0">
+                <a:solidFill>
+                  <a:srgbClr val="172033"/>
+                </a:solidFill>
+                <a:latin typeface="Arial" pitchFamily="34" charset="0"/>
+                <a:ea typeface="Arial" pitchFamily="34" charset="-122"/>
+                <a:cs typeface="Arial" pitchFamily="34" charset="-120"/>
+              </a:rPr>
+              <a:t>"K'in significa Sol en maya. Guatemala tiene sol y raíces mayas de sobra; lo que le faltaba era un sistema que las conectara con datos. La inteligencia artificial escribió gran parte del código; pero la arquitectura, el rigor matemático, la seguridad y el control absoluto del sistema siempre estuvieron en nuestras manos."</a:t>
+            </a:r>
+            <a:endParaRPr lang="en-US" sz="1300" dirty="0"/>
           </a:p>
         </p:txBody>
       </p:sp>
@@ -7171,7 +7830,7 @@
                 <a:ea typeface="Arial" pitchFamily="34" charset="-122"/>
                 <a:cs typeface="Arial" pitchFamily="34" charset="-120"/>
               </a:rPr>
-              <a:t>15 · CIERRE</a:t>
+              <a:t>15 · RONDA DE PREGUNTAS</a:t>
             </a:r>
             <a:endParaRPr lang="en-US" sz="1200" dirty="0"/>
           </a:p>
@@ -7210,7 +7869,7 @@
                 <a:ea typeface="Arial" pitchFamily="34" charset="-122"/>
                 <a:cs typeface="Arial" pitchFamily="34" charset="-120"/>
               </a:rPr>
-              <a:t>Equipo de Desarrollo y Conclusión</a:t>
+              <a:t>¿Preguntas? Aquí Van Algunas Respuestas Listas</a:t>
             </a:r>
             <a:endParaRPr lang="en-US" sz="2200" dirty="0"/>
           </a:p>
@@ -7225,7 +7884,7 @@
         <p:spPr>
           <a:xfrm>
             <a:off x="502920" y="1078992"/>
-            <a:ext cx="3657600" cy="274320"/>
+            <a:ext cx="4572000" cy="274320"/>
           </a:xfrm>
           <a:prstGeom prst="rect">
             <a:avLst/>
@@ -7249,7 +7908,7 @@
                 <a:ea typeface="Arial" pitchFamily="34" charset="-122"/>
                 <a:cs typeface="Arial" pitchFamily="34" charset="-120"/>
               </a:rPr>
-              <a:t>9:45 – 10:45 · Ambos</a:t>
+              <a:t>Cierre · Ambos</a:t>
             </a:r>
             <a:endParaRPr lang="en-US" sz="1100" dirty="0"/>
           </a:p>
@@ -7373,7 +8032,7 @@
                 <a:ea typeface="Arial" pitchFamily="34" charset="-122"/>
                 <a:cs typeface="Arial" pitchFamily="34" charset="-120"/>
               </a:rPr>
-              <a:t>K'in Solar Guatemala · UMG 2026</a:t>
+              <a:t>Banco completo en docs/08-GUION-PRESENTACION.md</a:t>
             </a:r>
             <a:endParaRPr lang="en-US" sz="1000" dirty="0"/>
           </a:p>
@@ -7388,11 +8047,11 @@
         <p:spPr>
           <a:xfrm>
             <a:off x="502920" y="1600200"/>
-            <a:ext cx="5440680" cy="2377440"/>
+            <a:ext cx="3657600" cy="1600200"/>
           </a:xfrm>
           <a:prstGeom prst="roundRect">
             <a:avLst>
-              <a:gd name="adj" fmla="val 3077"/>
+              <a:gd name="adj" fmla="val 4571"/>
             </a:avLst>
           </a:prstGeom>
           <a:solidFill>
@@ -7415,7 +8074,7 @@
         <p:spPr>
           <a:xfrm>
             <a:off x="667512" y="1709928"/>
-            <a:ext cx="5111496" cy="320040"/>
+            <a:ext cx="3328416" cy="320040"/>
           </a:xfrm>
           <a:prstGeom prst="rect">
             <a:avLst/>
@@ -7439,7 +8098,7 @@
                 <a:ea typeface="Arial" pitchFamily="34" charset="-122"/>
                 <a:cs typeface="Arial" pitchFamily="34" charset="-120"/>
               </a:rPr>
-              <a:t>Andy Aquino</a:t>
+              <a:t>¿Por qué se llama K'in Solar?</a:t>
             </a:r>
             <a:endParaRPr lang="en-US" sz="1250" dirty="0"/>
           </a:p>
@@ -7454,7 +8113,7 @@
         <p:spPr>
           <a:xfrm>
             <a:off x="667512" y="2039112"/>
-            <a:ext cx="5111496" cy="1828800"/>
+            <a:ext cx="3328416" cy="1051560"/>
           </a:xfrm>
           <a:prstGeom prst="rect">
             <a:avLst/>
@@ -7481,7 +8140,7 @@
                 <a:ea typeface="Arial" pitchFamily="34" charset="-122"/>
                 <a:cs typeface="Arial" pitchFamily="34" charset="-120"/>
               </a:rPr>
-              <a:t>Arquitectura de Datos, Integración Frontend UI/UX, Servidor MCP Propio, Despliegue en AWS EC2 y Demo.</a:t>
+              <a:t>K'in es el signo maya del Sol. Guatemala tiene sol y raíces mayas — el nombre viene de ahí.</a:t>
             </a:r>
             <a:endParaRPr lang="en-US" sz="1050" dirty="0"/>
           </a:p>
@@ -7495,12 +8154,12 @@
         </p:nvSpPr>
         <p:spPr>
           <a:xfrm>
-            <a:off x="6172200" y="1600200"/>
-            <a:ext cx="5532120" cy="2377440"/>
+            <a:off x="4343400" y="1600200"/>
+            <a:ext cx="3657600" cy="1600200"/>
           </a:xfrm>
           <a:prstGeom prst="roundRect">
             <a:avLst>
-              <a:gd name="adj" fmla="val 3077"/>
+              <a:gd name="adj" fmla="val 4571"/>
             </a:avLst>
           </a:prstGeom>
           <a:solidFill>
@@ -7522,8 +8181,8 @@
         </p:nvSpPr>
         <p:spPr>
           <a:xfrm>
-            <a:off x="6336792" y="1709928"/>
-            <a:ext cx="5202936" cy="320040"/>
+            <a:off x="4507992" y="1709928"/>
+            <a:ext cx="3328416" cy="320040"/>
           </a:xfrm>
           <a:prstGeom prst="rect">
             <a:avLst/>
@@ -7547,7 +8206,7 @@
                 <a:ea typeface="Arial" pitchFamily="34" charset="-122"/>
                 <a:cs typeface="Arial" pitchFamily="34" charset="-120"/>
               </a:rPr>
-              <a:t>Carlos</a:t>
+              <a:t>¿Cuánto lo hizo la IA?</a:t>
             </a:r>
             <a:endParaRPr lang="en-US" sz="1250" dirty="0"/>
           </a:p>
@@ -7561,8 +8220,8 @@
         </p:nvSpPr>
         <p:spPr>
           <a:xfrm>
-            <a:off x="6336792" y="2039112"/>
-            <a:ext cx="5202936" cy="1828800"/>
+            <a:off x="4507992" y="2039112"/>
+            <a:ext cx="3328416" cy="1051560"/>
           </a:xfrm>
           <a:prstGeom prst="rect">
             <a:avLst/>
@@ -7589,7 +8248,7 @@
                 <a:ea typeface="Arial" pitchFamily="34" charset="-122"/>
                 <a:cs typeface="Arial" pitchFamily="34" charset="-120"/>
               </a:rPr>
-              <a:t>Seguridad OWASP Top 10, Lógica de Negocio y Servicios, Auditoría de Calidad, Bitácora y Control de Versiones.</a:t>
+              <a:t>La mayor parte del código. Arquitectura, modelo de datos y seguridad son nuestros — todo en la bitácora.</a:t>
             </a:r>
             <a:endParaRPr lang="en-US" sz="1050" dirty="0"/>
           </a:p>
@@ -7603,389 +8262,7 @@
         </p:nvSpPr>
         <p:spPr>
           <a:xfrm>
-            <a:off x="502920" y="4206240"/>
-            <a:ext cx="11201400" cy="1417320"/>
-          </a:xfrm>
-          <a:prstGeom prst="roundRect">
-            <a:avLst>
-              <a:gd name="adj" fmla="val 5161"/>
-            </a:avLst>
-          </a:prstGeom>
-          <a:solidFill>
-            <a:srgbClr val="3A2F12"/>
-          </a:solidFill>
-          <a:ln w="12700">
-            <a:solidFill>
-              <a:srgbClr val="FBBF24"/>
-            </a:solidFill>
-            <a:prstDash val="solid"/>
-          </a:ln>
-        </p:spPr>
-      </p:sp>
-      <p:sp>
-        <p:nvSpPr>
-          <p:cNvPr id="18" name="Text 15"/>
-          <p:cNvSpPr/>
-          <p:nvPr/>
-        </p:nvSpPr>
-        <p:spPr>
-          <a:xfrm>
-            <a:off x="777240" y="4315968"/>
-            <a:ext cx="10652760" cy="1188720"/>
-          </a:xfrm>
-          <a:prstGeom prst="rect">
-            <a:avLst/>
-          </a:prstGeom>
-          <a:noFill/>
-          <a:ln/>
-        </p:spPr>
-        <p:txBody>
-          <a:bodyPr wrap="square" rtlCol="0" anchor="ctr"/>
-          <a:lstStyle/>
-          <a:p>
-            <a:pPr indent="0" marL="0">
-              <a:buNone/>
-            </a:pPr>
-            <a:r>
-              <a:rPr lang="en-US" sz="1300" i="1" dirty="0">
-                <a:solidFill>
-                  <a:srgbClr val="EDF2FA"/>
-                </a:solidFill>
-                <a:latin typeface="Arial" pitchFamily="34" charset="0"/>
-                <a:ea typeface="Arial" pitchFamily="34" charset="-122"/>
-                <a:cs typeface="Arial" pitchFamily="34" charset="-120"/>
-              </a:rPr>
-              <a:t>"K'in significa Sol en maya. Guatemala tiene sol y raíces mayas de sobra; lo que le faltaba era un sistema que las conectara con datos. La inteligencia artificial escribió gran parte del código; pero la arquitectura, el rigor matemático, la seguridad y el control absoluto del sistema siempre estuvieron en nuestras manos."</a:t>
-            </a:r>
-            <a:endParaRPr lang="en-US" sz="1300" dirty="0"/>
-          </a:p>
-        </p:txBody>
-      </p:sp>
-    </p:spTree>
-  </p:cSld>
-  <p:clrMapOvr>
-    <a:masterClrMapping/>
-  </p:clrMapOvr>
-</p:sld>
-</file>
-
-<file path=ppt/slides/slide16.xml><?xml version="1.0" encoding="utf-8"?>
-<p:sld xmlns:a="http://schemas.openxmlformats.org/drawingml/2006/main" xmlns:r="http://schemas.openxmlformats.org/officeDocument/2006/relationships" xmlns:p="http://schemas.openxmlformats.org/presentationml/2006/main">
-  <p:cSld name="Slide 16">
-    <p:bg>
-      <p:bgPr>
-        <a:solidFill>
-          <a:srgbClr val="F5F7FA"/>
-        </a:solidFill>
-      </p:bgPr>
-    </p:bg>
-    <p:spTree>
-      <p:nvGrpSpPr>
-        <p:cNvPr id="1" name=""/>
-        <p:cNvGrpSpPr/>
-        <p:nvPr/>
-      </p:nvGrpSpPr>
-      <p:grpSpPr>
-        <a:xfrm>
-          <a:off x="0" y="0"/>
-          <a:ext cx="0" cy="0"/>
-          <a:chOff x="0" y="0"/>
-          <a:chExt cx="0" cy="0"/>
-        </a:xfrm>
-      </p:grpSpPr>
-      <p:sp>
-        <p:nvSpPr>
-          <p:cNvPr id="2" name="Shape 0"/>
-          <p:cNvSpPr/>
-          <p:nvPr/>
-        </p:nvSpPr>
-        <p:spPr>
-          <a:xfrm>
-            <a:off x="0" y="0"/>
-            <a:ext cx="12191695" cy="82296"/>
-          </a:xfrm>
-          <a:prstGeom prst="rect">
-            <a:avLst/>
-          </a:prstGeom>
-          <a:solidFill>
-            <a:srgbClr val="A65A00"/>
-          </a:solidFill>
-          <a:ln/>
-        </p:spPr>
-      </p:sp>
-      <p:pic>
-        <p:nvPicPr>
-          <p:cNvPr id="3" name="Image 0" descr="C:\Users\ACER NITRO\Desktop\DIA DEL PROGRAMADOR IA\public\images\kin-logo-negro.png">    </p:cNvPr>
-          <p:cNvPicPr>
-            <a:picLocks noChangeAspect="1"/>
-          </p:cNvPicPr>
-          <p:nvPr/>
-        </p:nvPicPr>
-        <p:blipFill>
-          <a:blip r:embed="rId1"/>
-          <a:srcRect l="0" r="0" t="0" b="0"/>
-          <a:stretch/>
-        </p:blipFill>
-        <p:spPr>
-          <a:xfrm>
-            <a:off x="10637215" y="292608"/>
-            <a:ext cx="1234440" cy="512064"/>
-          </a:xfrm>
-          <a:prstGeom prst="rect">
-            <a:avLst/>
-          </a:prstGeom>
-        </p:spPr>
-      </p:pic>
-      <p:sp>
-        <p:nvSpPr>
-          <p:cNvPr id="4" name="Text 1"/>
-          <p:cNvSpPr/>
-          <p:nvPr/>
-        </p:nvSpPr>
-        <p:spPr>
-          <a:xfrm>
-            <a:off x="502920" y="292608"/>
-            <a:ext cx="7772400" cy="320040"/>
-          </a:xfrm>
-          <a:prstGeom prst="rect">
-            <a:avLst/>
-          </a:prstGeom>
-          <a:noFill/>
-          <a:ln/>
-        </p:spPr>
-        <p:txBody>
-          <a:bodyPr wrap="square" rtlCol="0" anchor="ctr"/>
-          <a:lstStyle/>
-          <a:p>
-            <a:pPr algn="l" indent="0" marL="0">
-              <a:buNone/>
-            </a:pPr>
-            <a:r>
-              <a:rPr lang="en-US" sz="1200" b="1" spc="100" kern="0" dirty="0">
-                <a:solidFill>
-                  <a:srgbClr val="A65A00"/>
-                </a:solidFill>
-                <a:latin typeface="Arial" pitchFamily="34" charset="0"/>
-                <a:ea typeface="Arial" pitchFamily="34" charset="-122"/>
-                <a:cs typeface="Arial" pitchFamily="34" charset="-120"/>
-              </a:rPr>
-              <a:t>16 · RONDA DE PREGUNTAS</a:t>
-            </a:r>
-            <a:endParaRPr lang="en-US" sz="1200" dirty="0"/>
-          </a:p>
-        </p:txBody>
-      </p:sp>
-      <p:sp>
-        <p:nvSpPr>
-          <p:cNvPr id="5" name="Text 2"/>
-          <p:cNvSpPr/>
-          <p:nvPr/>
-        </p:nvSpPr>
-        <p:spPr>
-          <a:xfrm>
-            <a:off x="502920" y="566928"/>
-            <a:ext cx="9875520" cy="548640"/>
-          </a:xfrm>
-          <a:prstGeom prst="rect">
-            <a:avLst/>
-          </a:prstGeom>
-          <a:noFill/>
-          <a:ln/>
-        </p:spPr>
-        <p:txBody>
-          <a:bodyPr wrap="square" rtlCol="0" anchor="ctr"/>
-          <a:lstStyle/>
-          <a:p>
-            <a:pPr algn="l" indent="0" marL="0">
-              <a:buNone/>
-            </a:pPr>
-            <a:r>
-              <a:rPr lang="en-US" sz="2200" b="1" dirty="0">
-                <a:solidFill>
-                  <a:srgbClr val="172033"/>
-                </a:solidFill>
-                <a:latin typeface="Arial" pitchFamily="34" charset="0"/>
-                <a:ea typeface="Arial" pitchFamily="34" charset="-122"/>
-                <a:cs typeface="Arial" pitchFamily="34" charset="-120"/>
-              </a:rPr>
-              <a:t>¿Preguntas? Aquí Van Algunas Respuestas Listas</a:t>
-            </a:r>
-            <a:endParaRPr lang="en-US" sz="2200" dirty="0"/>
-          </a:p>
-        </p:txBody>
-      </p:sp>
-      <p:sp>
-        <p:nvSpPr>
-          <p:cNvPr id="6" name="Text 3"/>
-          <p:cNvSpPr/>
-          <p:nvPr/>
-        </p:nvSpPr>
-        <p:spPr>
-          <a:xfrm>
-            <a:off x="502920" y="1078992"/>
-            <a:ext cx="3657600" cy="274320"/>
-          </a:xfrm>
-          <a:prstGeom prst="rect">
-            <a:avLst/>
-          </a:prstGeom>
-          <a:noFill/>
-          <a:ln/>
-        </p:spPr>
-        <p:txBody>
-          <a:bodyPr wrap="square" rtlCol="0" anchor="ctr"/>
-          <a:lstStyle/>
-          <a:p>
-            <a:pPr algn="l" indent="0" marL="0">
-              <a:buNone/>
-            </a:pPr>
-            <a:r>
-              <a:rPr lang="en-US" sz="1100" dirty="0">
-                <a:solidFill>
-                  <a:srgbClr val="526175"/>
-                </a:solidFill>
-                <a:latin typeface="Arial" pitchFamily="34" charset="0"/>
-                <a:ea typeface="Arial" pitchFamily="34" charset="-122"/>
-                <a:cs typeface="Arial" pitchFamily="34" charset="-120"/>
-              </a:rPr>
-              <a:t>10:45 – 12:00 · Ambos</a:t>
-            </a:r>
-            <a:endParaRPr lang="en-US" sz="1100" dirty="0"/>
-          </a:p>
-        </p:txBody>
-      </p:sp>
-      <p:sp>
-        <p:nvSpPr>
-          <p:cNvPr id="7" name="Shape 4"/>
-          <p:cNvSpPr/>
-          <p:nvPr/>
-        </p:nvSpPr>
-        <p:spPr>
-          <a:xfrm>
-            <a:off x="502920" y="1371600"/>
-            <a:ext cx="11185855" cy="0"/>
-          </a:xfrm>
-          <a:prstGeom prst="line">
-            <a:avLst/>
-          </a:prstGeom>
-          <a:noFill/>
-          <a:ln w="12700">
-            <a:solidFill>
-              <a:srgbClr val="E2E8F0"/>
-            </a:solidFill>
-            <a:prstDash val="solid"/>
-          </a:ln>
-        </p:spPr>
-      </p:sp>
-      <p:sp>
-        <p:nvSpPr>
-          <p:cNvPr id="8" name="Shape 5"/>
-          <p:cNvSpPr/>
-          <p:nvPr/>
-        </p:nvSpPr>
-        <p:spPr>
-          <a:xfrm>
-            <a:off x="502920" y="6355080"/>
-            <a:ext cx="11185855" cy="0"/>
-          </a:xfrm>
-          <a:prstGeom prst="line">
-            <a:avLst/>
-          </a:prstGeom>
-          <a:noFill/>
-          <a:ln w="12700">
-            <a:solidFill>
-              <a:srgbClr val="E2E8F0"/>
-            </a:solidFill>
-            <a:prstDash val="solid"/>
-          </a:ln>
-        </p:spPr>
-      </p:sp>
-      <p:sp>
-        <p:nvSpPr>
-          <p:cNvPr id="9" name="Text 6"/>
-          <p:cNvSpPr/>
-          <p:nvPr/>
-        </p:nvSpPr>
-        <p:spPr>
-          <a:xfrm>
-            <a:off x="502920" y="6419088"/>
-            <a:ext cx="4572000" cy="274320"/>
-          </a:xfrm>
-          <a:prstGeom prst="rect">
-            <a:avLst/>
-          </a:prstGeom>
-          <a:noFill/>
-          <a:ln/>
-        </p:spPr>
-        <p:txBody>
-          <a:bodyPr wrap="square" rtlCol="0" anchor="ctr"/>
-          <a:lstStyle/>
-          <a:p>
-            <a:pPr indent="0" marL="0">
-              <a:buNone/>
-            </a:pPr>
-            <a:r>
-              <a:rPr lang="en-US" sz="1000" dirty="0">
-                <a:solidFill>
-                  <a:srgbClr val="526175"/>
-                </a:solidFill>
-                <a:latin typeface="Arial" pitchFamily="34" charset="0"/>
-                <a:ea typeface="Arial" pitchFamily="34" charset="-122"/>
-                <a:cs typeface="Arial" pitchFamily="34" charset="-120"/>
-              </a:rPr>
-              <a:t>Orador: Ambos</a:t>
-            </a:r>
-            <a:endParaRPr lang="en-US" sz="1000" dirty="0"/>
-          </a:p>
-        </p:txBody>
-      </p:sp>
-      <p:sp>
-        <p:nvSpPr>
-          <p:cNvPr id="10" name="Text 7"/>
-          <p:cNvSpPr/>
-          <p:nvPr/>
-        </p:nvSpPr>
-        <p:spPr>
-          <a:xfrm>
-            <a:off x="7116775" y="6419088"/>
-            <a:ext cx="4572000" cy="274320"/>
-          </a:xfrm>
-          <a:prstGeom prst="rect">
-            <a:avLst/>
-          </a:prstGeom>
-          <a:noFill/>
-          <a:ln/>
-        </p:spPr>
-        <p:txBody>
-          <a:bodyPr wrap="square" rtlCol="0" anchor="ctr"/>
-          <a:lstStyle/>
-          <a:p>
-            <a:pPr algn="r" indent="0" marL="0">
-              <a:buNone/>
-            </a:pPr>
-            <a:r>
-              <a:rPr lang="en-US" sz="1000" dirty="0">
-                <a:solidFill>
-                  <a:srgbClr val="526175"/>
-                </a:solidFill>
-                <a:latin typeface="Arial" pitchFamily="34" charset="0"/>
-                <a:ea typeface="Arial" pitchFamily="34" charset="-122"/>
-                <a:cs typeface="Arial" pitchFamily="34" charset="-120"/>
-              </a:rPr>
-              <a:t>Banco completo en docs/08-GUION-PRESENTACION.md</a:t>
-            </a:r>
-            <a:endParaRPr lang="en-US" sz="1000" dirty="0"/>
-          </a:p>
-        </p:txBody>
-      </p:sp>
-      <p:sp>
-        <p:nvSpPr>
-          <p:cNvPr id="11" name="Shape 8"/>
-          <p:cNvSpPr/>
-          <p:nvPr/>
-        </p:nvSpPr>
-        <p:spPr>
-          <a:xfrm>
-            <a:off x="502920" y="1600200"/>
+            <a:off x="8183880" y="1600200"/>
             <a:ext cx="3657600" cy="1600200"/>
           </a:xfrm>
           <a:prstGeom prst="roundRect">
@@ -7994,11 +8271,11 @@
             </a:avLst>
           </a:prstGeom>
           <a:solidFill>
-            <a:srgbClr val="F8FAFC"/>
+            <a:srgbClr val="182131"/>
           </a:solidFill>
           <a:ln w="12700">
             <a:solidFill>
-              <a:srgbClr val="E2E8F0"/>
+              <a:srgbClr val="263143"/>
             </a:solidFill>
             <a:prstDash val="solid"/>
           </a:ln>
@@ -8006,13 +8283,13 @@
       </p:sp>
       <p:sp>
         <p:nvSpPr>
-          <p:cNvPr id="12" name="Text 9"/>
-          <p:cNvSpPr/>
-          <p:nvPr/>
-        </p:nvSpPr>
-        <p:spPr>
-          <a:xfrm>
-            <a:off x="667512" y="1709928"/>
+          <p:cNvPr id="18" name="Text 15"/>
+          <p:cNvSpPr/>
+          <p:nvPr/>
+        </p:nvSpPr>
+        <p:spPr>
+          <a:xfrm>
+            <a:off x="8348472" y="1709928"/>
             <a:ext cx="3328416" cy="320040"/>
           </a:xfrm>
           <a:prstGeom prst="rect">
@@ -8031,13 +8308,13 @@
             <a:r>
               <a:rPr lang="en-US" sz="1250" b="1" dirty="0">
                 <a:solidFill>
-                  <a:srgbClr val="A65A00"/>
-                </a:solidFill>
-                <a:latin typeface="Arial" pitchFamily="34" charset="0"/>
-                <a:ea typeface="Arial" pitchFamily="34" charset="-122"/>
-                <a:cs typeface="Arial" pitchFamily="34" charset="-120"/>
-              </a:rPr>
-              <a:t>¿Por qué se llama K'in Solar?</a:t>
+                  <a:srgbClr val="FBBF24"/>
+                </a:solidFill>
+                <a:latin typeface="Arial" pitchFamily="34" charset="0"/>
+                <a:ea typeface="Arial" pitchFamily="34" charset="-122"/>
+                <a:cs typeface="Arial" pitchFamily="34" charset="-120"/>
+              </a:rPr>
+              <a:t>¿Cómo coordinaron 5 agentes?</a:t>
             </a:r>
             <a:endParaRPr lang="en-US" sz="1250" dirty="0"/>
           </a:p>
@@ -8045,13 +8322,13 @@
       </p:sp>
       <p:sp>
         <p:nvSpPr>
-          <p:cNvPr id="13" name="Text 10"/>
-          <p:cNvSpPr/>
-          <p:nvPr/>
-        </p:nvSpPr>
-        <p:spPr>
-          <a:xfrm>
-            <a:off x="667512" y="2039112"/>
+          <p:cNvPr id="19" name="Text 16"/>
+          <p:cNvSpPr/>
+          <p:nvPr/>
+        </p:nvSpPr>
+        <p:spPr>
+          <a:xfrm>
+            <a:off x="8348472" y="2039112"/>
             <a:ext cx="3328416" cy="1051560"/>
           </a:xfrm>
           <a:prstGeom prst="rect">
@@ -8073,13 +8350,13 @@
             <a:r>
               <a:rPr lang="en-US" sz="1050" dirty="0">
                 <a:solidFill>
-                  <a:srgbClr val="526175"/>
-                </a:solidFill>
-                <a:latin typeface="Arial" pitchFamily="34" charset="0"/>
-                <a:ea typeface="Arial" pitchFamily="34" charset="-122"/>
-                <a:cs typeface="Arial" pitchFamily="34" charset="-120"/>
-              </a:rPr>
-              <a:t>K'in es el signo maya del Sol. Guatemala tiene sol y raíces mayas — el nombre viene de ahí.</a:t>
+                  <a:srgbClr val="A1AEC2"/>
+                </a:solidFill>
+                <a:latin typeface="Arial" pitchFamily="34" charset="0"/>
+                <a:ea typeface="Arial" pitchFamily="34" charset="-122"/>
+                <a:cs typeface="Arial" pitchFamily="34" charset="-120"/>
+              </a:rPr>
+              <a:t>Propiedad exclusiva de carpetas y contratos de interfaz congelados en la Hora 1.</a:t>
             </a:r>
             <a:endParaRPr lang="en-US" sz="1050" dirty="0"/>
           </a:p>
@@ -8087,13 +8364,13 @@
       </p:sp>
       <p:sp>
         <p:nvSpPr>
-          <p:cNvPr id="14" name="Shape 11"/>
-          <p:cNvSpPr/>
-          <p:nvPr/>
-        </p:nvSpPr>
-        <p:spPr>
-          <a:xfrm>
-            <a:off x="4343400" y="1600200"/>
+          <p:cNvPr id="20" name="Shape 17"/>
+          <p:cNvSpPr/>
+          <p:nvPr/>
+        </p:nvSpPr>
+        <p:spPr>
+          <a:xfrm>
+            <a:off x="502920" y="3383280"/>
             <a:ext cx="3657600" cy="1600200"/>
           </a:xfrm>
           <a:prstGeom prst="roundRect">
@@ -8102,11 +8379,11 @@
             </a:avLst>
           </a:prstGeom>
           <a:solidFill>
-            <a:srgbClr val="F8FAFC"/>
+            <a:srgbClr val="182131"/>
           </a:solidFill>
           <a:ln w="12700">
             <a:solidFill>
-              <a:srgbClr val="E2E8F0"/>
+              <a:srgbClr val="263143"/>
             </a:solidFill>
             <a:prstDash val="solid"/>
           </a:ln>
@@ -8114,13 +8391,13 @@
       </p:sp>
       <p:sp>
         <p:nvSpPr>
-          <p:cNvPr id="15" name="Text 12"/>
-          <p:cNvSpPr/>
-          <p:nvPr/>
-        </p:nvSpPr>
-        <p:spPr>
-          <a:xfrm>
-            <a:off x="4507992" y="1709928"/>
+          <p:cNvPr id="21" name="Text 18"/>
+          <p:cNvSpPr/>
+          <p:nvPr/>
+        </p:nvSpPr>
+        <p:spPr>
+          <a:xfrm>
+            <a:off x="667512" y="3493008"/>
             <a:ext cx="3328416" cy="320040"/>
           </a:xfrm>
           <a:prstGeom prst="rect">
@@ -8139,13 +8416,13 @@
             <a:r>
               <a:rPr lang="en-US" sz="1250" b="1" dirty="0">
                 <a:solidFill>
-                  <a:srgbClr val="A65A00"/>
-                </a:solidFill>
-                <a:latin typeface="Arial" pitchFamily="34" charset="0"/>
-                <a:ea typeface="Arial" pitchFamily="34" charset="-122"/>
-                <a:cs typeface="Arial" pitchFamily="34" charset="-120"/>
-              </a:rPr>
-              <a:t>¿Cuánto lo hizo la IA?</a:t>
+                  <a:srgbClr val="FBBF24"/>
+                </a:solidFill>
+                <a:latin typeface="Arial" pitchFamily="34" charset="0"/>
+                <a:ea typeface="Arial" pitchFamily="34" charset="-122"/>
+                <a:cs typeface="Arial" pitchFamily="34" charset="-120"/>
+              </a:rPr>
+              <a:t>¿Está seguro el sistema?</a:t>
             </a:r>
             <a:endParaRPr lang="en-US" sz="1250" dirty="0"/>
           </a:p>
@@ -8153,13 +8430,13 @@
       </p:sp>
       <p:sp>
         <p:nvSpPr>
-          <p:cNvPr id="16" name="Text 13"/>
-          <p:cNvSpPr/>
-          <p:nvPr/>
-        </p:nvSpPr>
-        <p:spPr>
-          <a:xfrm>
-            <a:off x="4507992" y="2039112"/>
+          <p:cNvPr id="22" name="Text 19"/>
+          <p:cNvSpPr/>
+          <p:nvPr/>
+        </p:nvSpPr>
+        <p:spPr>
+          <a:xfrm>
+            <a:off x="667512" y="3822192"/>
             <a:ext cx="3328416" cy="1051560"/>
           </a:xfrm>
           <a:prstGeom prst="rect">
@@ -8181,13 +8458,13 @@
             <a:r>
               <a:rPr lang="en-US" sz="1050" dirty="0">
                 <a:solidFill>
-                  <a:srgbClr val="526175"/>
-                </a:solidFill>
-                <a:latin typeface="Arial" pitchFamily="34" charset="0"/>
-                <a:ea typeface="Arial" pitchFamily="34" charset="-122"/>
-                <a:cs typeface="Arial" pitchFamily="34" charset="-120"/>
-              </a:rPr>
-              <a:t>La mayor parte del código. Arquitectura, modelo de datos y seguridad son nuestros — todo en la bitácora.</a:t>
+                  <a:srgbClr val="A1AEC2"/>
+                </a:solidFill>
+                <a:latin typeface="Arial" pitchFamily="34" charset="0"/>
+                <a:ea typeface="Arial" pitchFamily="34" charset="-122"/>
+                <a:cs typeface="Arial" pitchFamily="34" charset="-120"/>
+              </a:rPr>
+              <a:t>Checklist OWASP Top 10:2025 firmado en cada PR. Podemos repetir la demo del 403.</a:t>
             </a:r>
             <a:endParaRPr lang="en-US" sz="1050" dirty="0"/>
           </a:p>
@@ -8195,13 +8472,13 @@
       </p:sp>
       <p:sp>
         <p:nvSpPr>
-          <p:cNvPr id="17" name="Shape 14"/>
-          <p:cNvSpPr/>
-          <p:nvPr/>
-        </p:nvSpPr>
-        <p:spPr>
-          <a:xfrm>
-            <a:off x="8183880" y="1600200"/>
+          <p:cNvPr id="23" name="Shape 20"/>
+          <p:cNvSpPr/>
+          <p:nvPr/>
+        </p:nvSpPr>
+        <p:spPr>
+          <a:xfrm>
+            <a:off x="4343400" y="3383280"/>
             <a:ext cx="3657600" cy="1600200"/>
           </a:xfrm>
           <a:prstGeom prst="roundRect">
@@ -8210,11 +8487,11 @@
             </a:avLst>
           </a:prstGeom>
           <a:solidFill>
-            <a:srgbClr val="F8FAFC"/>
+            <a:srgbClr val="182131"/>
           </a:solidFill>
           <a:ln w="12700">
             <a:solidFill>
-              <a:srgbClr val="E2E8F0"/>
+              <a:srgbClr val="263143"/>
             </a:solidFill>
             <a:prstDash val="solid"/>
           </a:ln>
@@ -8222,13 +8499,13 @@
       </p:sp>
       <p:sp>
         <p:nvSpPr>
-          <p:cNvPr id="18" name="Text 15"/>
-          <p:cNvSpPr/>
-          <p:nvPr/>
-        </p:nvSpPr>
-        <p:spPr>
-          <a:xfrm>
-            <a:off x="8348472" y="1709928"/>
+          <p:cNvPr id="24" name="Text 21"/>
+          <p:cNvSpPr/>
+          <p:nvPr/>
+        </p:nvSpPr>
+        <p:spPr>
+          <a:xfrm>
+            <a:off x="4507992" y="3493008"/>
             <a:ext cx="3328416" cy="320040"/>
           </a:xfrm>
           <a:prstGeom prst="rect">
@@ -8247,13 +8524,13 @@
             <a:r>
               <a:rPr lang="en-US" sz="1250" b="1" dirty="0">
                 <a:solidFill>
-                  <a:srgbClr val="A65A00"/>
-                </a:solidFill>
-                <a:latin typeface="Arial" pitchFamily="34" charset="0"/>
-                <a:ea typeface="Arial" pitchFamily="34" charset="-122"/>
-                <a:cs typeface="Arial" pitchFamily="34" charset="-120"/>
-              </a:rPr>
-              <a:t>¿Cómo coordinaron 5 agentes?</a:t>
+                  <a:srgbClr val="FBBF24"/>
+                </a:solidFill>
+                <a:latin typeface="Arial" pitchFamily="34" charset="0"/>
+                <a:ea typeface="Arial" pitchFamily="34" charset="-122"/>
+                <a:cs typeface="Arial" pitchFamily="34" charset="-120"/>
+              </a:rPr>
+              <a:t>¿Qué es lo más original?</a:t>
             </a:r>
             <a:endParaRPr lang="en-US" sz="1250" dirty="0"/>
           </a:p>
@@ -8261,13 +8538,13 @@
       </p:sp>
       <p:sp>
         <p:nvSpPr>
-          <p:cNvPr id="19" name="Text 16"/>
-          <p:cNvSpPr/>
-          <p:nvPr/>
-        </p:nvSpPr>
-        <p:spPr>
-          <a:xfrm>
-            <a:off x="8348472" y="2039112"/>
+          <p:cNvPr id="25" name="Text 22"/>
+          <p:cNvSpPr/>
+          <p:nvPr/>
+        </p:nvSpPr>
+        <p:spPr>
+          <a:xfrm>
+            <a:off x="4507992" y="3822192"/>
             <a:ext cx="3328416" cy="1051560"/>
           </a:xfrm>
           <a:prstGeom prst="rect">
@@ -8289,13 +8566,13 @@
             <a:r>
               <a:rPr lang="en-US" sz="1050" dirty="0">
                 <a:solidFill>
-                  <a:srgbClr val="526175"/>
-                </a:solidFill>
-                <a:latin typeface="Arial" pitchFamily="34" charset="0"/>
-                <a:ea typeface="Arial" pitchFamily="34" charset="-122"/>
-                <a:cs typeface="Arial" pitchFamily="34" charset="-120"/>
-              </a:rPr>
-              <a:t>Propiedad exclusiva de carpetas y contratos de interfaz congelados en la Hora 1.</a:t>
+                  <a:srgbClr val="A1AEC2"/>
+                </a:solidFill>
+                <a:latin typeface="Arial" pitchFamily="34" charset="0"/>
+                <a:ea typeface="Arial" pitchFamily="34" charset="-122"/>
+                <a:cs typeface="Arial" pitchFamily="34" charset="-120"/>
+              </a:rPr>
+              <a:t>El nombre y la identidad maya-solar, y el servidor MCP que hace a la IA usuaria del sistema.</a:t>
             </a:r>
             <a:endParaRPr lang="en-US" sz="1050" dirty="0"/>
           </a:p>
@@ -8303,13 +8580,13 @@
       </p:sp>
       <p:sp>
         <p:nvSpPr>
-          <p:cNvPr id="20" name="Shape 17"/>
-          <p:cNvSpPr/>
-          <p:nvPr/>
-        </p:nvSpPr>
-        <p:spPr>
-          <a:xfrm>
-            <a:off x="502920" y="3383280"/>
+          <p:cNvPr id="26" name="Shape 23"/>
+          <p:cNvSpPr/>
+          <p:nvPr/>
+        </p:nvSpPr>
+        <p:spPr>
+          <a:xfrm>
+            <a:off x="8183880" y="3383280"/>
             <a:ext cx="3657600" cy="1600200"/>
           </a:xfrm>
           <a:prstGeom prst="roundRect">
@@ -8318,11 +8595,11 @@
             </a:avLst>
           </a:prstGeom>
           <a:solidFill>
-            <a:srgbClr val="F8FAFC"/>
+            <a:srgbClr val="182131"/>
           </a:solidFill>
           <a:ln w="12700">
             <a:solidFill>
-              <a:srgbClr val="E2E8F0"/>
+              <a:srgbClr val="263143"/>
             </a:solidFill>
             <a:prstDash val="solid"/>
           </a:ln>
@@ -8330,13 +8607,13 @@
       </p:sp>
       <p:sp>
         <p:nvSpPr>
-          <p:cNvPr id="21" name="Text 18"/>
-          <p:cNvSpPr/>
-          <p:nvPr/>
-        </p:nvSpPr>
-        <p:spPr>
-          <a:xfrm>
-            <a:off x="667512" y="3493008"/>
+          <p:cNvPr id="27" name="Text 24"/>
+          <p:cNvSpPr/>
+          <p:nvPr/>
+        </p:nvSpPr>
+        <p:spPr>
+          <a:xfrm>
+            <a:off x="8348472" y="3493008"/>
             <a:ext cx="3328416" cy="320040"/>
           </a:xfrm>
           <a:prstGeom prst="rect">
@@ -8355,13 +8632,13 @@
             <a:r>
               <a:rPr lang="en-US" sz="1250" b="1" dirty="0">
                 <a:solidFill>
-                  <a:srgbClr val="A65A00"/>
-                </a:solidFill>
-                <a:latin typeface="Arial" pitchFamily="34" charset="0"/>
-                <a:ea typeface="Arial" pitchFamily="34" charset="-122"/>
-                <a:cs typeface="Arial" pitchFamily="34" charset="-120"/>
-              </a:rPr>
-              <a:t>¿Está seguro el sistema?</a:t>
+                  <a:srgbClr val="FBBF24"/>
+                </a:solidFill>
+                <a:latin typeface="Arial" pitchFamily="34" charset="0"/>
+                <a:ea typeface="Arial" pitchFamily="34" charset="-122"/>
+                <a:cs typeface="Arial" pitchFamily="34" charset="-120"/>
+              </a:rPr>
+              <a:t>¿Qué le falta al sistema?</a:t>
             </a:r>
             <a:endParaRPr lang="en-US" sz="1250" dirty="0"/>
           </a:p>
@@ -8369,13 +8646,13 @@
       </p:sp>
       <p:sp>
         <p:nvSpPr>
-          <p:cNvPr id="22" name="Text 19"/>
-          <p:cNvSpPr/>
-          <p:nvPr/>
-        </p:nvSpPr>
-        <p:spPr>
-          <a:xfrm>
-            <a:off x="667512" y="3822192"/>
+          <p:cNvPr id="28" name="Text 25"/>
+          <p:cNvSpPr/>
+          <p:nvPr/>
+        </p:nvSpPr>
+        <p:spPr>
+          <a:xfrm>
+            <a:off x="8348472" y="3822192"/>
             <a:ext cx="3328416" cy="1051560"/>
           </a:xfrm>
           <a:prstGeom prst="rect">
@@ -8397,223 +8674,7 @@
             <a:r>
               <a:rPr lang="en-US" sz="1050" dirty="0">
                 <a:solidFill>
-                  <a:srgbClr val="526175"/>
-                </a:solidFill>
-                <a:latin typeface="Arial" pitchFamily="34" charset="0"/>
-                <a:ea typeface="Arial" pitchFamily="34" charset="-122"/>
-                <a:cs typeface="Arial" pitchFamily="34" charset="-120"/>
-              </a:rPr>
-              <a:t>Checklist OWASP Top 10:2025 firmado en cada PR. Podemos repetir la demo del 403.</a:t>
-            </a:r>
-            <a:endParaRPr lang="en-US" sz="1050" dirty="0"/>
-          </a:p>
-        </p:txBody>
-      </p:sp>
-      <p:sp>
-        <p:nvSpPr>
-          <p:cNvPr id="23" name="Shape 20"/>
-          <p:cNvSpPr/>
-          <p:nvPr/>
-        </p:nvSpPr>
-        <p:spPr>
-          <a:xfrm>
-            <a:off x="4343400" y="3383280"/>
-            <a:ext cx="3657600" cy="1600200"/>
-          </a:xfrm>
-          <a:prstGeom prst="roundRect">
-            <a:avLst>
-              <a:gd name="adj" fmla="val 4571"/>
-            </a:avLst>
-          </a:prstGeom>
-          <a:solidFill>
-            <a:srgbClr val="F8FAFC"/>
-          </a:solidFill>
-          <a:ln w="12700">
-            <a:solidFill>
-              <a:srgbClr val="E2E8F0"/>
-            </a:solidFill>
-            <a:prstDash val="solid"/>
-          </a:ln>
-        </p:spPr>
-      </p:sp>
-      <p:sp>
-        <p:nvSpPr>
-          <p:cNvPr id="24" name="Text 21"/>
-          <p:cNvSpPr/>
-          <p:nvPr/>
-        </p:nvSpPr>
-        <p:spPr>
-          <a:xfrm>
-            <a:off x="4507992" y="3493008"/>
-            <a:ext cx="3328416" cy="320040"/>
-          </a:xfrm>
-          <a:prstGeom prst="rect">
-            <a:avLst/>
-          </a:prstGeom>
-          <a:noFill/>
-          <a:ln/>
-        </p:spPr>
-        <p:txBody>
-          <a:bodyPr wrap="square" rtlCol="0" anchor="ctr"/>
-          <a:lstStyle/>
-          <a:p>
-            <a:pPr indent="0" marL="0">
-              <a:buNone/>
-            </a:pPr>
-            <a:r>
-              <a:rPr lang="en-US" sz="1250" b="1" dirty="0">
-                <a:solidFill>
-                  <a:srgbClr val="A65A00"/>
-                </a:solidFill>
-                <a:latin typeface="Arial" pitchFamily="34" charset="0"/>
-                <a:ea typeface="Arial" pitchFamily="34" charset="-122"/>
-                <a:cs typeface="Arial" pitchFamily="34" charset="-120"/>
-              </a:rPr>
-              <a:t>¿Qué es lo más original?</a:t>
-            </a:r>
-            <a:endParaRPr lang="en-US" sz="1250" dirty="0"/>
-          </a:p>
-        </p:txBody>
-      </p:sp>
-      <p:sp>
-        <p:nvSpPr>
-          <p:cNvPr id="25" name="Text 22"/>
-          <p:cNvSpPr/>
-          <p:nvPr/>
-        </p:nvSpPr>
-        <p:spPr>
-          <a:xfrm>
-            <a:off x="4507992" y="3822192"/>
-            <a:ext cx="3328416" cy="1051560"/>
-          </a:xfrm>
-          <a:prstGeom prst="rect">
-            <a:avLst/>
-          </a:prstGeom>
-          <a:noFill/>
-          <a:ln/>
-        </p:spPr>
-        <p:txBody>
-          <a:bodyPr wrap="square" rtlCol="0" anchor="t"/>
-          <a:lstStyle/>
-          <a:p>
-            <a:pPr indent="0" marL="0">
-              <a:lnSpc>
-                <a:spcPct val="115000"/>
-              </a:lnSpc>
-              <a:buNone/>
-            </a:pPr>
-            <a:r>
-              <a:rPr lang="en-US" sz="1050" dirty="0">
-                <a:solidFill>
-                  <a:srgbClr val="526175"/>
-                </a:solidFill>
-                <a:latin typeface="Arial" pitchFamily="34" charset="0"/>
-                <a:ea typeface="Arial" pitchFamily="34" charset="-122"/>
-                <a:cs typeface="Arial" pitchFamily="34" charset="-120"/>
-              </a:rPr>
-              <a:t>El nombre y la identidad maya-solar, y el servidor MCP que hace a la IA usuaria del sistema.</a:t>
-            </a:r>
-            <a:endParaRPr lang="en-US" sz="1050" dirty="0"/>
-          </a:p>
-        </p:txBody>
-      </p:sp>
-      <p:sp>
-        <p:nvSpPr>
-          <p:cNvPr id="26" name="Shape 23"/>
-          <p:cNvSpPr/>
-          <p:nvPr/>
-        </p:nvSpPr>
-        <p:spPr>
-          <a:xfrm>
-            <a:off x="8183880" y="3383280"/>
-            <a:ext cx="3657600" cy="1600200"/>
-          </a:xfrm>
-          <a:prstGeom prst="roundRect">
-            <a:avLst>
-              <a:gd name="adj" fmla="val 4571"/>
-            </a:avLst>
-          </a:prstGeom>
-          <a:solidFill>
-            <a:srgbClr val="F8FAFC"/>
-          </a:solidFill>
-          <a:ln w="12700">
-            <a:solidFill>
-              <a:srgbClr val="E2E8F0"/>
-            </a:solidFill>
-            <a:prstDash val="solid"/>
-          </a:ln>
-        </p:spPr>
-      </p:sp>
-      <p:sp>
-        <p:nvSpPr>
-          <p:cNvPr id="27" name="Text 24"/>
-          <p:cNvSpPr/>
-          <p:nvPr/>
-        </p:nvSpPr>
-        <p:spPr>
-          <a:xfrm>
-            <a:off x="8348472" y="3493008"/>
-            <a:ext cx="3328416" cy="320040"/>
-          </a:xfrm>
-          <a:prstGeom prst="rect">
-            <a:avLst/>
-          </a:prstGeom>
-          <a:noFill/>
-          <a:ln/>
-        </p:spPr>
-        <p:txBody>
-          <a:bodyPr wrap="square" rtlCol="0" anchor="ctr"/>
-          <a:lstStyle/>
-          <a:p>
-            <a:pPr indent="0" marL="0">
-              <a:buNone/>
-            </a:pPr>
-            <a:r>
-              <a:rPr lang="en-US" sz="1250" b="1" dirty="0">
-                <a:solidFill>
-                  <a:srgbClr val="A65A00"/>
-                </a:solidFill>
-                <a:latin typeface="Arial" pitchFamily="34" charset="0"/>
-                <a:ea typeface="Arial" pitchFamily="34" charset="-122"/>
-                <a:cs typeface="Arial" pitchFamily="34" charset="-120"/>
-              </a:rPr>
-              <a:t>¿Qué le falta al sistema?</a:t>
-            </a:r>
-            <a:endParaRPr lang="en-US" sz="1250" dirty="0"/>
-          </a:p>
-        </p:txBody>
-      </p:sp>
-      <p:sp>
-        <p:nvSpPr>
-          <p:cNvPr id="28" name="Text 25"/>
-          <p:cNvSpPr/>
-          <p:nvPr/>
-        </p:nvSpPr>
-        <p:spPr>
-          <a:xfrm>
-            <a:off x="8348472" y="3822192"/>
-            <a:ext cx="3328416" cy="1051560"/>
-          </a:xfrm>
-          <a:prstGeom prst="rect">
-            <a:avLst/>
-          </a:prstGeom>
-          <a:noFill/>
-          <a:ln/>
-        </p:spPr>
-        <p:txBody>
-          <a:bodyPr wrap="square" rtlCol="0" anchor="t"/>
-          <a:lstStyle/>
-          <a:p>
-            <a:pPr indent="0" marL="0">
-              <a:lnSpc>
-                <a:spcPct val="115000"/>
-              </a:lnSpc>
-              <a:buNone/>
-            </a:pPr>
-            <a:r>
-              <a:rPr lang="en-US" sz="1050" dirty="0">
-                <a:solidFill>
-                  <a:srgbClr val="526175"/>
+                  <a:srgbClr val="A1AEC2"/>
                 </a:solidFill>
                 <a:latin typeface="Arial" pitchFamily="34" charset="0"/>
                 <a:ea typeface="Arial" pitchFamily="34" charset="-122"/>
@@ -8787,7 +8848,7 @@
         <p:spPr>
           <a:xfrm>
             <a:off x="502920" y="1078992"/>
-            <a:ext cx="3657600" cy="274320"/>
+            <a:ext cx="4572000" cy="274320"/>
           </a:xfrm>
           <a:prstGeom prst="rect">
             <a:avLst/>
@@ -9396,7 +9457,7 @@
         <p:spPr>
           <a:xfrm>
             <a:off x="502920" y="1078992"/>
-            <a:ext cx="3657600" cy="274320"/>
+            <a:ext cx="4572000" cy="274320"/>
           </a:xfrm>
           <a:prstGeom prst="rect">
             <a:avLst/>
@@ -10360,7 +10421,7 @@
         <p:spPr>
           <a:xfrm>
             <a:off x="502920" y="1078992"/>
-            <a:ext cx="3657600" cy="274320"/>
+            <a:ext cx="4572000" cy="274320"/>
           </a:xfrm>
           <a:prstGeom prst="rect">
             <a:avLst/>
@@ -10523,11 +10584,11 @@
         <p:spPr>
           <a:xfrm>
             <a:off x="502920" y="1600200"/>
-            <a:ext cx="5394960" cy="4023360"/>
+            <a:ext cx="5029200" cy="2514600"/>
           </a:xfrm>
           <a:prstGeom prst="roundRect">
             <a:avLst>
-              <a:gd name="adj" fmla="val 1818"/>
+              <a:gd name="adj" fmla="val 2909"/>
             </a:avLst>
           </a:prstGeom>
           <a:solidFill>
@@ -10550,7 +10611,7 @@
         <p:spPr>
           <a:xfrm>
             <a:off x="667512" y="1709928"/>
-            <a:ext cx="5065776" cy="320040"/>
+            <a:ext cx="4700016" cy="320040"/>
           </a:xfrm>
           <a:prstGeom prst="rect">
             <a:avLst/>
@@ -10589,7 +10650,7 @@
         <p:spPr>
           <a:xfrm>
             <a:off x="667512" y="2039112"/>
-            <a:ext cx="5065776" cy="3474720"/>
+            <a:ext cx="4700016" cy="1965960"/>
           </a:xfrm>
           <a:prstGeom prst="rect">
             <a:avLst/>
@@ -10703,7 +10764,7 @@
                 <a:ea typeface="Arial" pitchFamily="34" charset="-122"/>
                 <a:cs typeface="Arial" pitchFamily="34" charset="-120"/>
               </a:rPr>
-              <a:t>Base de Datos:  MySQL 8 · 9 entidades relacionales</a:t>
+              <a:t>Base de Datos:  MySQL 8 · 9 entidades</a:t>
             </a:r>
             <a:endParaRPr lang="en-US" sz="1050" dirty="0"/>
           </a:p>
@@ -10732,7 +10793,7 @@
                 <a:ea typeface="Arial" pitchFamily="34" charset="-122"/>
                 <a:cs typeface="Arial" pitchFamily="34" charset="-120"/>
               </a:rPr>
-              <a:t>Frontend:  Tailwind CSS v4 + Vite + Leaflet + Chart.js</a:t>
+              <a:t>Frontend:  Tailwind CSS v4 + Leaflet + Chart.js</a:t>
             </a:r>
             <a:endParaRPr lang="en-US" sz="1050" dirty="0"/>
           </a:p>
@@ -10746,12 +10807,12 @@
         </p:nvSpPr>
         <p:spPr>
           <a:xfrm>
-            <a:off x="6080760" y="1600200"/>
-            <a:ext cx="5623560" cy="4023360"/>
+            <a:off x="502920" y="4206240"/>
+            <a:ext cx="5029200" cy="1554480"/>
           </a:xfrm>
           <a:prstGeom prst="roundRect">
             <a:avLst>
-              <a:gd name="adj" fmla="val 1818"/>
+              <a:gd name="adj" fmla="val 4706"/>
             </a:avLst>
           </a:prstGeom>
           <a:solidFill>
@@ -10773,8 +10834,8 @@
         </p:nvSpPr>
         <p:spPr>
           <a:xfrm>
-            <a:off x="6245352" y="1709928"/>
-            <a:ext cx="5294376" cy="320040"/>
+            <a:off x="667512" y="4315968"/>
+            <a:ext cx="4700016" cy="320040"/>
           </a:xfrm>
           <a:prstGeom prst="rect">
             <a:avLst/>
@@ -10812,8 +10873,8 @@
         </p:nvSpPr>
         <p:spPr>
           <a:xfrm>
-            <a:off x="6245352" y="2039112"/>
-            <a:ext cx="5294376" cy="3474720"/>
+            <a:off x="667512" y="4645152"/>
+            <a:ext cx="4700016" cy="1005840"/>
           </a:xfrm>
           <a:prstGeom prst="rect">
             <a:avLst/>
@@ -10840,28 +10901,85 @@
                 <a:ea typeface="Arial" pitchFamily="34" charset="-122"/>
                 <a:cs typeface="Arial" pitchFamily="34" charset="-120"/>
               </a:rPr>
-              <a:t>ERS v2.0: Objetivos, 19 RF, 12 RNF, ISO/IEC 25010, 12 casos de uso, 6 diagramas UML (Word + PDF)</a:t>
+              <a:t>ERS v2.0, OWASP Top 10:2025, Bitácora de Prompts (+1000 líneas), Manual de Usuario — 13 documentos en total, todos enlazados desde README.md.</a:t>
             </a:r>
             <a:endParaRPr lang="en-US" sz="1050" dirty="0"/>
           </a:p>
-          <a:p>
-            <a:pPr indent="0" marL="0">
-              <a:lnSpc>
-                <a:spcPct val="115000"/>
-              </a:lnSpc>
-              <a:buNone/>
-            </a:pPr>
-            <a:endParaRPr lang="en-US" sz="1050" dirty="0"/>
-          </a:p>
-          <a:p>
-            <a:pPr indent="0" marL="0">
-              <a:lnSpc>
-                <a:spcPct val="115000"/>
-              </a:lnSpc>
-              <a:buNone/>
-            </a:pPr>
-            <a:r>
-              <a:rPr lang="en-US" sz="1050" dirty="0">
+        </p:txBody>
+      </p:sp>
+      <p:sp>
+        <p:nvSpPr>
+          <p:cNvPr id="17" name="Shape 14"/>
+          <p:cNvSpPr/>
+          <p:nvPr/>
+        </p:nvSpPr>
+        <p:spPr>
+          <a:xfrm>
+            <a:off x="5715000" y="1600200"/>
+            <a:ext cx="5989320" cy="4160520"/>
+          </a:xfrm>
+          <a:prstGeom prst="roundRect">
+            <a:avLst>
+              <a:gd name="adj" fmla="val 1099"/>
+            </a:avLst>
+          </a:prstGeom>
+          <a:ln w="19050">
+            <a:solidFill>
+              <a:srgbClr val="A65A00"/>
+            </a:solidFill>
+            <a:prstDash val="solid"/>
+          </a:ln>
+        </p:spPr>
+      </p:sp>
+      <p:pic>
+        <p:nvPicPr>
+          <p:cNvPr id="18" name="Image 1" descr="C:\Users\ACER NITRO\Desktop\DIA DEL PROGRAMADOR IA\docs\evidencias\pptx\02-dashboard.png">    </p:cNvPr>
+          <p:cNvPicPr>
+            <a:picLocks noChangeAspect="1"/>
+          </p:cNvPicPr>
+          <p:nvPr/>
+        </p:nvPicPr>
+        <p:blipFill>
+          <a:blip r:embed="rId2"/>
+          <a:srcRect l="0" r="0" t="0" b="0"/>
+          <a:stretch/>
+        </p:blipFill>
+        <p:spPr>
+          <a:xfrm>
+            <a:off x="5769864" y="1655064"/>
+            <a:ext cx="5879592" cy="3776472"/>
+          </a:xfrm>
+          <a:prstGeom prst="rect">
+            <a:avLst/>
+          </a:prstGeom>
+        </p:spPr>
+      </p:pic>
+      <p:sp>
+        <p:nvSpPr>
+          <p:cNvPr id="19" name="Text 15"/>
+          <p:cNvSpPr/>
+          <p:nvPr/>
+        </p:nvSpPr>
+        <p:spPr>
+          <a:xfrm>
+            <a:off x="5806440" y="5449824"/>
+            <a:ext cx="5806440" cy="274320"/>
+          </a:xfrm>
+          <a:prstGeom prst="rect">
+            <a:avLst/>
+          </a:prstGeom>
+          <a:noFill/>
+          <a:ln/>
+        </p:spPr>
+        <p:txBody>
+          <a:bodyPr wrap="square" rtlCol="0" anchor="ctr"/>
+          <a:lstStyle/>
+          <a:p>
+            <a:pPr indent="0" marL="0">
+              <a:buNone/>
+            </a:pPr>
+            <a:r>
+              <a:rPr lang="en-US" sz="950" i="1" dirty="0">
                 <a:solidFill>
                   <a:srgbClr val="526175"/>
                 </a:solidFill>
@@ -10869,96 +10987,9 @@
                 <a:ea typeface="Arial" pitchFamily="34" charset="-122"/>
                 <a:cs typeface="Arial" pitchFamily="34" charset="-120"/>
               </a:rPr>
-              <a:t>OWASP Top 10:2025: los 10 controles documentados y verificados</a:t>
-            </a:r>
-            <a:endParaRPr lang="en-US" sz="1050" dirty="0"/>
-          </a:p>
-          <a:p>
-            <a:pPr indent="0" marL="0">
-              <a:lnSpc>
-                <a:spcPct val="115000"/>
-              </a:lnSpc>
-              <a:buNone/>
-            </a:pPr>
-            <a:endParaRPr lang="en-US" sz="1050" dirty="0"/>
-          </a:p>
-          <a:p>
-            <a:pPr indent="0" marL="0">
-              <a:lnSpc>
-                <a:spcPct val="115000"/>
-              </a:lnSpc>
-              <a:buNone/>
-            </a:pPr>
-            <a:r>
-              <a:rPr lang="en-US" sz="1050" dirty="0">
-                <a:solidFill>
-                  <a:srgbClr val="526175"/>
-                </a:solidFill>
-                <a:latin typeface="Arial" pitchFamily="34" charset="0"/>
-                <a:ea typeface="Arial" pitchFamily="34" charset="-122"/>
-                <a:cs typeface="Arial" pitchFamily="34" charset="-120"/>
-              </a:rPr>
-              <a:t>Bitácora de Prompts: cada prompt de IA + corrección humana, +1000 líneas</a:t>
-            </a:r>
-            <a:endParaRPr lang="en-US" sz="1050" dirty="0"/>
-          </a:p>
-          <a:p>
-            <a:pPr indent="0" marL="0">
-              <a:lnSpc>
-                <a:spcPct val="115000"/>
-              </a:lnSpc>
-              <a:buNone/>
-            </a:pPr>
-            <a:endParaRPr lang="en-US" sz="1050" dirty="0"/>
-          </a:p>
-          <a:p>
-            <a:pPr indent="0" marL="0">
-              <a:lnSpc>
-                <a:spcPct val="115000"/>
-              </a:lnSpc>
-              <a:buNone/>
-            </a:pPr>
-            <a:r>
-              <a:rPr lang="en-US" sz="1050" dirty="0">
-                <a:solidFill>
-                  <a:srgbClr val="526175"/>
-                </a:solidFill>
-                <a:latin typeface="Arial" pitchFamily="34" charset="0"/>
-                <a:ea typeface="Arial" pitchFamily="34" charset="-122"/>
-                <a:cs typeface="Arial" pitchFamily="34" charset="-120"/>
-              </a:rPr>
-              <a:t>Manual de Usuario resumido con credenciales por rol</a:t>
-            </a:r>
-            <a:endParaRPr lang="en-US" sz="1050" dirty="0"/>
-          </a:p>
-          <a:p>
-            <a:pPr indent="0" marL="0">
-              <a:lnSpc>
-                <a:spcPct val="115000"/>
-              </a:lnSpc>
-              <a:buNone/>
-            </a:pPr>
-            <a:endParaRPr lang="en-US" sz="1050" dirty="0"/>
-          </a:p>
-          <a:p>
-            <a:pPr indent="0" marL="0">
-              <a:lnSpc>
-                <a:spcPct val="115000"/>
-              </a:lnSpc>
-              <a:buNone/>
-            </a:pPr>
-            <a:r>
-              <a:rPr lang="en-US" sz="1050" dirty="0">
-                <a:solidFill>
-                  <a:srgbClr val="526175"/>
-                </a:solidFill>
-                <a:latin typeface="Arial" pitchFamily="34" charset="0"/>
-                <a:ea typeface="Arial" pitchFamily="34" charset="-122"/>
-                <a:cs typeface="Arial" pitchFamily="34" charset="-120"/>
-              </a:rPr>
-              <a:t>"No es documentación de relleno — cada RF se verificó contra el código real."</a:t>
-            </a:r>
-            <a:endParaRPr lang="en-US" sz="1050" dirty="0"/>
+              <a:t>Panorama nacional en producción: 6 KPIs consolidados en tiempo real</a:t>
+            </a:r>
+            <a:endParaRPr lang="en-US" sz="950" dirty="0"/>
           </a:p>
         </p:txBody>
       </p:sp>
@@ -11109,7 +11140,7 @@
                 <a:ea typeface="Arial" pitchFamily="34" charset="-122"/>
                 <a:cs typeface="Arial" pitchFamily="34" charset="-120"/>
               </a:rPr>
-              <a:t>Estándares y Normas que Rigen el Proyecto</a:t>
+              <a:t>Estándares Aplicados y los Artefactos que Construimos con Ellos</a:t>
             </a:r>
             <a:endParaRPr lang="en-US" sz="2200" dirty="0"/>
           </a:p>
@@ -11124,7 +11155,7 @@
         <p:spPr>
           <a:xfrm>
             <a:off x="502920" y="1078992"/>
-            <a:ext cx="3657600" cy="274320"/>
+            <a:ext cx="4572000" cy="274320"/>
           </a:xfrm>
           <a:prstGeom prst="rect">
             <a:avLst/>
@@ -11272,7 +11303,7 @@
                 <a:ea typeface="Arial" pitchFamily="34" charset="-122"/>
                 <a:cs typeface="Arial" pitchFamily="34" charset="-120"/>
               </a:rPr>
-              <a:t>Normas Aplicadas</a:t>
+              <a:t>ERS + ERD + OWASP + ISO</a:t>
             </a:r>
             <a:endParaRPr lang="en-US" sz="1000" dirty="0"/>
           </a:p>
@@ -11287,11 +11318,11 @@
         <p:spPr>
           <a:xfrm>
             <a:off x="502920" y="1600200"/>
-            <a:ext cx="11185855" cy="566928"/>
+            <a:ext cx="6492240" cy="868680"/>
           </a:xfrm>
           <a:prstGeom prst="roundRect">
             <a:avLst>
-              <a:gd name="adj" fmla="val 9677"/>
+              <a:gd name="adj" fmla="val 6316"/>
             </a:avLst>
           </a:prstGeom>
           <a:solidFill>
@@ -11313,24 +11344,24 @@
         </p:nvSpPr>
         <p:spPr>
           <a:xfrm>
-            <a:off x="685800" y="1600200"/>
-            <a:ext cx="3017520" cy="566928"/>
-          </a:xfrm>
-          <a:prstGeom prst="rect">
-            <a:avLst/>
-          </a:prstGeom>
-          <a:noFill/>
-          <a:ln/>
-        </p:spPr>
-        <p:txBody>
-          <a:bodyPr wrap="square" rtlCol="0" anchor="ctr"/>
-          <a:lstStyle/>
-          <a:p>
-            <a:pPr indent="0" marL="0">
-              <a:buNone/>
-            </a:pPr>
-            <a:r>
-              <a:rPr lang="en-US" sz="1200" b="1" dirty="0">
+            <a:off x="658368" y="1673352"/>
+            <a:ext cx="6181344" cy="292608"/>
+          </a:xfrm>
+          <a:prstGeom prst="rect">
+            <a:avLst/>
+          </a:prstGeom>
+          <a:noFill/>
+          <a:ln/>
+        </p:spPr>
+        <p:txBody>
+          <a:bodyPr wrap="square" rtlCol="0" anchor="ctr"/>
+          <a:lstStyle/>
+          <a:p>
+            <a:pPr indent="0" marL="0">
+              <a:buNone/>
+            </a:pPr>
+            <a:r>
+              <a:rPr lang="en-US" sz="1150" b="1" dirty="0">
                 <a:solidFill>
                   <a:srgbClr val="FBBF24"/>
                 </a:solidFill>
@@ -11338,9 +11369,9 @@
                 <a:ea typeface="Arial" pitchFamily="34" charset="-122"/>
                 <a:cs typeface="Arial" pitchFamily="34" charset="-120"/>
               </a:rPr>
-              <a:t>IEEE 830-1998</a:t>
-            </a:r>
-            <a:endParaRPr lang="en-US" sz="1200" dirty="0"/>
+              <a:t>IEEE 830-1998 / ISO 29148:2018</a:t>
+            </a:r>
+            <a:endParaRPr lang="en-US" sz="1150" dirty="0"/>
           </a:p>
         </p:txBody>
       </p:sp>
@@ -11352,24 +11383,27 @@
         </p:nvSpPr>
         <p:spPr>
           <a:xfrm>
-            <a:off x="3840480" y="1600200"/>
-            <a:ext cx="7665415" cy="566928"/>
-          </a:xfrm>
-          <a:prstGeom prst="rect">
-            <a:avLst/>
-          </a:prstGeom>
-          <a:noFill/>
-          <a:ln/>
-        </p:spPr>
-        <p:txBody>
-          <a:bodyPr wrap="square" rtlCol="0" anchor="ctr"/>
-          <a:lstStyle/>
-          <a:p>
-            <a:pPr indent="0" marL="0">
-              <a:buNone/>
-            </a:pPr>
-            <a:r>
-              <a:rPr lang="en-US" sz="1100" dirty="0">
+            <a:off x="658368" y="1965960"/>
+            <a:ext cx="6181344" cy="457200"/>
+          </a:xfrm>
+          <a:prstGeom prst="rect">
+            <a:avLst/>
+          </a:prstGeom>
+          <a:noFill/>
+          <a:ln/>
+        </p:spPr>
+        <p:txBody>
+          <a:bodyPr wrap="square" rtlCol="0" anchor="ctr"/>
+          <a:lstStyle/>
+          <a:p>
+            <a:pPr indent="0" marL="0">
+              <a:lnSpc>
+                <a:spcPct val="105000"/>
+              </a:lnSpc>
+              <a:buNone/>
+            </a:pPr>
+            <a:r>
+              <a:rPr lang="en-US" sz="950" dirty="0">
                 <a:solidFill>
                   <a:srgbClr val="A1AEC2"/>
                 </a:solidFill>
@@ -11377,9 +11411,9 @@
                 <a:ea typeface="Arial" pitchFamily="34" charset="-122"/>
                 <a:cs typeface="Arial" pitchFamily="34" charset="-120"/>
               </a:rPr>
-              <a:t>Estructura y verificabilidad del ERS (Especificación de Requerimientos de Software).</a:t>
-            </a:r>
-            <a:endParaRPr lang="en-US" sz="1100" dirty="0"/>
+              <a:t>ERS — Especificación de Requerimientos de Software completa: objetivos, 19 RF, 12 RNF, 12 casos de uso (docs/03-PLANTILLA-ERS.md, exportado a Word y PDF).</a:t>
+            </a:r>
+            <a:endParaRPr lang="en-US" sz="950" dirty="0"/>
           </a:p>
         </p:txBody>
       </p:sp>
@@ -11391,12 +11425,12 @@
         </p:nvSpPr>
         <p:spPr>
           <a:xfrm>
-            <a:off x="502920" y="2258568"/>
-            <a:ext cx="11185855" cy="566928"/>
+            <a:off x="502920" y="2560320"/>
+            <a:ext cx="6492240" cy="868680"/>
           </a:xfrm>
           <a:prstGeom prst="roundRect">
             <a:avLst>
-              <a:gd name="adj" fmla="val 9677"/>
+              <a:gd name="adj" fmla="val 6316"/>
             </a:avLst>
           </a:prstGeom>
           <a:solidFill>
@@ -11418,24 +11452,24 @@
         </p:nvSpPr>
         <p:spPr>
           <a:xfrm>
-            <a:off x="685800" y="2258568"/>
-            <a:ext cx="3017520" cy="566928"/>
-          </a:xfrm>
-          <a:prstGeom prst="rect">
-            <a:avLst/>
-          </a:prstGeom>
-          <a:noFill/>
-          <a:ln/>
-        </p:spPr>
-        <p:txBody>
-          <a:bodyPr wrap="square" rtlCol="0" anchor="ctr"/>
-          <a:lstStyle/>
-          <a:p>
-            <a:pPr indent="0" marL="0">
-              <a:buNone/>
-            </a:pPr>
-            <a:r>
-              <a:rPr lang="en-US" sz="1200" b="1" dirty="0">
+            <a:off x="658368" y="2633472"/>
+            <a:ext cx="6181344" cy="292608"/>
+          </a:xfrm>
+          <a:prstGeom prst="rect">
+            <a:avLst/>
+          </a:prstGeom>
+          <a:noFill/>
+          <a:ln/>
+        </p:spPr>
+        <p:txBody>
+          <a:bodyPr wrap="square" rtlCol="0" anchor="ctr"/>
+          <a:lstStyle/>
+          <a:p>
+            <a:pPr indent="0" marL="0">
+              <a:buNone/>
+            </a:pPr>
+            <a:r>
+              <a:rPr lang="en-US" sz="1150" b="1" dirty="0">
                 <a:solidFill>
                   <a:srgbClr val="FBBF24"/>
                 </a:solidFill>
@@ -11443,9 +11477,9 @@
                 <a:ea typeface="Arial" pitchFamily="34" charset="-122"/>
                 <a:cs typeface="Arial" pitchFamily="34" charset="-120"/>
               </a:rPr>
-              <a:t>ISO/IEC/IEEE 29148:2018</a:t>
-            </a:r>
-            <a:endParaRPr lang="en-US" sz="1200" dirty="0"/>
+              <a:t>UML 2.5</a:t>
+            </a:r>
+            <a:endParaRPr lang="en-US" sz="1150" dirty="0"/>
           </a:p>
         </p:txBody>
       </p:sp>
@@ -11457,24 +11491,27 @@
         </p:nvSpPr>
         <p:spPr>
           <a:xfrm>
-            <a:off x="3840480" y="2258568"/>
-            <a:ext cx="7665415" cy="566928"/>
-          </a:xfrm>
-          <a:prstGeom prst="rect">
-            <a:avLst/>
-          </a:prstGeom>
-          <a:noFill/>
-          <a:ln/>
-        </p:spPr>
-        <p:txBody>
-          <a:bodyPr wrap="square" rtlCol="0" anchor="ctr"/>
-          <a:lstStyle/>
-          <a:p>
-            <a:pPr indent="0" marL="0">
-              <a:buNone/>
-            </a:pPr>
-            <a:r>
-              <a:rPr lang="en-US" sz="1100" dirty="0">
+            <a:off x="658368" y="2926080"/>
+            <a:ext cx="6181344" cy="457200"/>
+          </a:xfrm>
+          <a:prstGeom prst="rect">
+            <a:avLst/>
+          </a:prstGeom>
+          <a:noFill/>
+          <a:ln/>
+        </p:spPr>
+        <p:txBody>
+          <a:bodyPr wrap="square" rtlCol="0" anchor="ctr"/>
+          <a:lstStyle/>
+          <a:p>
+            <a:pPr indent="0" marL="0">
+              <a:lnSpc>
+                <a:spcPct val="105000"/>
+              </a:lnSpc>
+              <a:buNone/>
+            </a:pPr>
+            <a:r>
+              <a:rPr lang="en-US" sz="950" dirty="0">
                 <a:solidFill>
                   <a:srgbClr val="A1AEC2"/>
                 </a:solidFill>
@@ -11482,9 +11519,9 @@
                 <a:ea typeface="Arial" pitchFamily="34" charset="-122"/>
                 <a:cs typeface="Arial" pitchFamily="34" charset="-120"/>
               </a:rPr>
-              <a:t>Evolución de IEEE 830 — ingeniería de requerimientos del ciclo de vida completo.</a:t>
-            </a:r>
-            <a:endParaRPr lang="en-US" sz="1100" dirty="0"/>
+              <a:t>ERD — Diagrama Entidad-Relación + diagramas de Casos de Uso, Secuencia y Actividades (docs/diagramas/).</a:t>
+            </a:r>
+            <a:endParaRPr lang="en-US" sz="950" dirty="0"/>
           </a:p>
         </p:txBody>
       </p:sp>
@@ -11496,12 +11533,12 @@
         </p:nvSpPr>
         <p:spPr>
           <a:xfrm>
-            <a:off x="502920" y="2916936"/>
-            <a:ext cx="11185855" cy="566928"/>
+            <a:off x="502920" y="3520440"/>
+            <a:ext cx="6492240" cy="868680"/>
           </a:xfrm>
           <a:prstGeom prst="roundRect">
             <a:avLst>
-              <a:gd name="adj" fmla="val 9677"/>
+              <a:gd name="adj" fmla="val 6316"/>
             </a:avLst>
           </a:prstGeom>
           <a:solidFill>
@@ -11523,24 +11560,24 @@
         </p:nvSpPr>
         <p:spPr>
           <a:xfrm>
-            <a:off x="685800" y="2916936"/>
-            <a:ext cx="3017520" cy="566928"/>
-          </a:xfrm>
-          <a:prstGeom prst="rect">
-            <a:avLst/>
-          </a:prstGeom>
-          <a:noFill/>
-          <a:ln/>
-        </p:spPr>
-        <p:txBody>
-          <a:bodyPr wrap="square" rtlCol="0" anchor="ctr"/>
-          <a:lstStyle/>
-          <a:p>
-            <a:pPr indent="0" marL="0">
-              <a:buNone/>
-            </a:pPr>
-            <a:r>
-              <a:rPr lang="en-US" sz="1200" b="1" dirty="0">
+            <a:off x="658368" y="3593592"/>
+            <a:ext cx="6181344" cy="292608"/>
+          </a:xfrm>
+          <a:prstGeom prst="rect">
+            <a:avLst/>
+          </a:prstGeom>
+          <a:noFill/>
+          <a:ln/>
+        </p:spPr>
+        <p:txBody>
+          <a:bodyPr wrap="square" rtlCol="0" anchor="ctr"/>
+          <a:lstStyle/>
+          <a:p>
+            <a:pPr indent="0" marL="0">
+              <a:buNone/>
+            </a:pPr>
+            <a:r>
+              <a:rPr lang="en-US" sz="1150" b="1" dirty="0">
                 <a:solidFill>
                   <a:srgbClr val="FBBF24"/>
                 </a:solidFill>
@@ -11550,7 +11587,7 @@
               </a:rPr>
               <a:t>ISO/IEC 25010:2011 (SQuaRE)</a:t>
             </a:r>
-            <a:endParaRPr lang="en-US" sz="1200" dirty="0"/>
+            <a:endParaRPr lang="en-US" sz="1150" dirty="0"/>
           </a:p>
         </p:txBody>
       </p:sp>
@@ -11562,24 +11599,27 @@
         </p:nvSpPr>
         <p:spPr>
           <a:xfrm>
-            <a:off x="3840480" y="2916936"/>
-            <a:ext cx="7665415" cy="566928"/>
-          </a:xfrm>
-          <a:prstGeom prst="rect">
-            <a:avLst/>
-          </a:prstGeom>
-          <a:noFill/>
-          <a:ln/>
-        </p:spPr>
-        <p:txBody>
-          <a:bodyPr wrap="square" rtlCol="0" anchor="ctr"/>
-          <a:lstStyle/>
-          <a:p>
-            <a:pPr indent="0" marL="0">
-              <a:buNone/>
-            </a:pPr>
-            <a:r>
-              <a:rPr lang="en-US" sz="1100" dirty="0">
+            <a:off x="658368" y="3886200"/>
+            <a:ext cx="6181344" cy="457200"/>
+          </a:xfrm>
+          <a:prstGeom prst="rect">
+            <a:avLst/>
+          </a:prstGeom>
+          <a:noFill/>
+          <a:ln/>
+        </p:spPr>
+        <p:txBody>
+          <a:bodyPr wrap="square" rtlCol="0" anchor="ctr"/>
+          <a:lstStyle/>
+          <a:p>
+            <a:pPr indent="0" marL="0">
+              <a:lnSpc>
+                <a:spcPct val="105000"/>
+              </a:lnSpc>
+              <a:buNone/>
+            </a:pPr>
+            <a:r>
+              <a:rPr lang="en-US" sz="950" dirty="0">
                 <a:solidFill>
                   <a:srgbClr val="A1AEC2"/>
                 </a:solidFill>
@@ -11587,9 +11627,9 @@
                 <a:ea typeface="Arial" pitchFamily="34" charset="-122"/>
                 <a:cs typeface="Arial" pitchFamily="34" charset="-120"/>
               </a:rPr>
-              <a:t>8 características de calidad de producto de software: funcionalidad, eficiencia, compatibilidad, usabilidad, fiabilidad, seguridad, mantenibilidad, portabilidad.</a:t>
-            </a:r>
-            <a:endParaRPr lang="en-US" sz="1100" dirty="0"/>
+              <a:t>Sección de Atributos de Calidad del ERS (§5): funcionalidad, eficiencia, compatibilidad, usabilidad, fiabilidad, seguridad, mantenibilidad, portabilidad.</a:t>
+            </a:r>
+            <a:endParaRPr lang="en-US" sz="950" dirty="0"/>
           </a:p>
         </p:txBody>
       </p:sp>
@@ -11601,12 +11641,12 @@
         </p:nvSpPr>
         <p:spPr>
           <a:xfrm>
-            <a:off x="502920" y="3575304"/>
-            <a:ext cx="11185855" cy="566928"/>
+            <a:off x="502920" y="4480560"/>
+            <a:ext cx="6492240" cy="868680"/>
           </a:xfrm>
           <a:prstGeom prst="roundRect">
             <a:avLst>
-              <a:gd name="adj" fmla="val 9677"/>
+              <a:gd name="adj" fmla="val 6316"/>
             </a:avLst>
           </a:prstGeom>
           <a:solidFill>
@@ -11628,24 +11668,24 @@
         </p:nvSpPr>
         <p:spPr>
           <a:xfrm>
-            <a:off x="685800" y="3575304"/>
-            <a:ext cx="3017520" cy="566928"/>
-          </a:xfrm>
-          <a:prstGeom prst="rect">
-            <a:avLst/>
-          </a:prstGeom>
-          <a:noFill/>
-          <a:ln/>
-        </p:spPr>
-        <p:txBody>
-          <a:bodyPr wrap="square" rtlCol="0" anchor="ctr"/>
-          <a:lstStyle/>
-          <a:p>
-            <a:pPr indent="0" marL="0">
-              <a:buNone/>
-            </a:pPr>
-            <a:r>
-              <a:rPr lang="en-US" sz="1200" b="1" dirty="0">
+            <a:off x="658368" y="4553712"/>
+            <a:ext cx="6181344" cy="292608"/>
+          </a:xfrm>
+          <a:prstGeom prst="rect">
+            <a:avLst/>
+          </a:prstGeom>
+          <a:noFill/>
+          <a:ln/>
+        </p:spPr>
+        <p:txBody>
+          <a:bodyPr wrap="square" rtlCol="0" anchor="ctr"/>
+          <a:lstStyle/>
+          <a:p>
+            <a:pPr indent="0" marL="0">
+              <a:buNone/>
+            </a:pPr>
+            <a:r>
+              <a:rPr lang="en-US" sz="1150" b="1" dirty="0">
                 <a:solidFill>
                   <a:srgbClr val="FBBF24"/>
                 </a:solidFill>
@@ -11655,7 +11695,7 @@
               </a:rPr>
               <a:t>OWASP Top 10:2025</a:t>
             </a:r>
-            <a:endParaRPr lang="en-US" sz="1200" dirty="0"/>
+            <a:endParaRPr lang="en-US" sz="1150" dirty="0"/>
           </a:p>
         </p:txBody>
       </p:sp>
@@ -11667,24 +11707,27 @@
         </p:nvSpPr>
         <p:spPr>
           <a:xfrm>
-            <a:off x="3840480" y="3575304"/>
-            <a:ext cx="7665415" cy="566928"/>
-          </a:xfrm>
-          <a:prstGeom prst="rect">
-            <a:avLst/>
-          </a:prstGeom>
-          <a:noFill/>
-          <a:ln/>
-        </p:spPr>
-        <p:txBody>
-          <a:bodyPr wrap="square" rtlCol="0" anchor="ctr"/>
-          <a:lstStyle/>
-          <a:p>
-            <a:pPr indent="0" marL="0">
-              <a:buNone/>
-            </a:pPr>
-            <a:r>
-              <a:rPr lang="en-US" sz="1100" dirty="0">
+            <a:off x="658368" y="4846320"/>
+            <a:ext cx="6181344" cy="457200"/>
+          </a:xfrm>
+          <a:prstGeom prst="rect">
+            <a:avLst/>
+          </a:prstGeom>
+          <a:noFill/>
+          <a:ln/>
+        </p:spPr>
+        <p:txBody>
+          <a:bodyPr wrap="square" rtlCol="0" anchor="ctr"/>
+          <a:lstStyle/>
+          <a:p>
+            <a:pPr indent="0" marL="0">
+              <a:lnSpc>
+                <a:spcPct val="105000"/>
+              </a:lnSpc>
+              <a:buNone/>
+            </a:pPr>
+            <a:r>
+              <a:rPr lang="en-US" sz="950" dirty="0">
                 <a:solidFill>
                   <a:srgbClr val="A1AEC2"/>
                 </a:solidFill>
@@ -11692,9 +11735,9 @@
                 <a:ea typeface="Arial" pitchFamily="34" charset="-122"/>
                 <a:cs typeface="Arial" pitchFamily="34" charset="-120"/>
               </a:rPr>
-              <a:t>Estándar de seguridad de aplicaciones web — no negociable, verificado en cada Pull Request.</a:t>
-            </a:r>
-            <a:endParaRPr lang="en-US" sz="1100" dirty="0"/>
+              <a:t>Documento de seguridad con los 10 controles (docs/02-SEGURIDAD-OWASP-2025.md) + checklist firmado en cada Pull Request.</a:t>
+            </a:r>
+            <a:endParaRPr lang="en-US" sz="950" dirty="0"/>
           </a:p>
         </p:txBody>
       </p:sp>
@@ -11706,12 +11749,12 @@
         </p:nvSpPr>
         <p:spPr>
           <a:xfrm>
-            <a:off x="502920" y="4233672"/>
-            <a:ext cx="11185855" cy="566928"/>
+            <a:off x="502920" y="5440680"/>
+            <a:ext cx="6492240" cy="868680"/>
           </a:xfrm>
           <a:prstGeom prst="roundRect">
             <a:avLst>
-              <a:gd name="adj" fmla="val 9677"/>
+              <a:gd name="adj" fmla="val 6316"/>
             </a:avLst>
           </a:prstGeom>
           <a:solidFill>
@@ -11733,24 +11776,24 @@
         </p:nvSpPr>
         <p:spPr>
           <a:xfrm>
-            <a:off x="685800" y="4233672"/>
-            <a:ext cx="3017520" cy="566928"/>
-          </a:xfrm>
-          <a:prstGeom prst="rect">
-            <a:avLst/>
-          </a:prstGeom>
-          <a:noFill/>
-          <a:ln/>
-        </p:spPr>
-        <p:txBody>
-          <a:bodyPr wrap="square" rtlCol="0" anchor="ctr"/>
-          <a:lstStyle/>
-          <a:p>
-            <a:pPr indent="0" marL="0">
-              <a:buNone/>
-            </a:pPr>
-            <a:r>
-              <a:rPr lang="en-US" sz="1200" b="1" dirty="0">
+            <a:off x="658368" y="5513832"/>
+            <a:ext cx="6181344" cy="292608"/>
+          </a:xfrm>
+          <a:prstGeom prst="rect">
+            <a:avLst/>
+          </a:prstGeom>
+          <a:noFill/>
+          <a:ln/>
+        </p:spPr>
+        <p:txBody>
+          <a:bodyPr wrap="square" rtlCol="0" anchor="ctr"/>
+          <a:lstStyle/>
+          <a:p>
+            <a:pPr indent="0" marL="0">
+              <a:buNone/>
+            </a:pPr>
+            <a:r>
+              <a:rPr lang="en-US" sz="1150" b="1" dirty="0">
                 <a:solidFill>
                   <a:srgbClr val="FBBF24"/>
                 </a:solidFill>
@@ -11758,9 +11801,9 @@
                 <a:ea typeface="Arial" pitchFamily="34" charset="-122"/>
                 <a:cs typeface="Arial" pitchFamily="34" charset="-120"/>
               </a:rPr>
-              <a:t>PSR-12</a:t>
-            </a:r>
-            <a:endParaRPr lang="en-US" sz="1200" dirty="0"/>
+              <a:t>PSR-12 · Conventional Commits</a:t>
+            </a:r>
+            <a:endParaRPr lang="en-US" sz="1150" dirty="0"/>
           </a:p>
         </p:txBody>
       </p:sp>
@@ -11772,24 +11815,27 @@
         </p:nvSpPr>
         <p:spPr>
           <a:xfrm>
-            <a:off x="3840480" y="4233672"/>
-            <a:ext cx="7665415" cy="566928"/>
-          </a:xfrm>
-          <a:prstGeom prst="rect">
-            <a:avLst/>
-          </a:prstGeom>
-          <a:noFill/>
-          <a:ln/>
-        </p:spPr>
-        <p:txBody>
-          <a:bodyPr wrap="square" rtlCol="0" anchor="ctr"/>
-          <a:lstStyle/>
-          <a:p>
-            <a:pPr indent="0" marL="0">
-              <a:buNone/>
-            </a:pPr>
-            <a:r>
-              <a:rPr lang="en-US" sz="1100" dirty="0">
+            <a:off x="658368" y="5806440"/>
+            <a:ext cx="6181344" cy="457200"/>
+          </a:xfrm>
+          <a:prstGeom prst="rect">
+            <a:avLst/>
+          </a:prstGeom>
+          <a:noFill/>
+          <a:ln/>
+        </p:spPr>
+        <p:txBody>
+          <a:bodyPr wrap="square" rtlCol="0" anchor="ctr"/>
+          <a:lstStyle/>
+          <a:p>
+            <a:pPr indent="0" marL="0">
+              <a:lnSpc>
+                <a:spcPct val="105000"/>
+              </a:lnSpc>
+              <a:buNone/>
+            </a:pPr>
+            <a:r>
+              <a:rPr lang="en-US" sz="950" dirty="0">
                 <a:solidFill>
                   <a:srgbClr val="A1AEC2"/>
                 </a:solidFill>
@@ -11797,9 +11843,9 @@
                 <a:ea typeface="Arial" pitchFamily="34" charset="-122"/>
                 <a:cs typeface="Arial" pitchFamily="34" charset="-120"/>
               </a:rPr>
-              <a:t>Estilo de código PHP de la PHP-FIG, aplicado en todo el backend.</a:t>
-            </a:r>
-            <a:endParaRPr lang="en-US" sz="1100" dirty="0"/>
+              <a:t>Estilo de código consistente en todo el backend + historial de commits auditable con trailer de coautoría de IA.</a:t>
+            </a:r>
+            <a:endParaRPr lang="en-US" sz="950" dirty="0"/>
           </a:p>
         </p:txBody>
       </p:sp>
@@ -11811,90 +11857,71 @@
         </p:nvSpPr>
         <p:spPr>
           <a:xfrm>
-            <a:off x="502920" y="4892040"/>
-            <a:ext cx="11185855" cy="566928"/>
+            <a:off x="7269480" y="1600200"/>
+            <a:ext cx="4434840" cy="4160520"/>
           </a:xfrm>
           <a:prstGeom prst="roundRect">
             <a:avLst>
-              <a:gd name="adj" fmla="val 9677"/>
+              <a:gd name="adj" fmla="val 1099"/>
             </a:avLst>
           </a:prstGeom>
-          <a:solidFill>
-            <a:srgbClr val="182131"/>
-          </a:solidFill>
-          <a:ln w="12700">
+          <a:ln w="19050">
             <a:solidFill>
-              <a:srgbClr val="263143"/>
+              <a:srgbClr val="FBBF24"/>
             </a:solidFill>
             <a:prstDash val="solid"/>
           </a:ln>
         </p:spPr>
       </p:sp>
-      <p:sp>
-        <p:nvSpPr>
-          <p:cNvPr id="27" name="Text 24"/>
-          <p:cNvSpPr/>
-          <p:nvPr/>
-        </p:nvSpPr>
-        <p:spPr>
-          <a:xfrm>
-            <a:off x="685800" y="4892040"/>
-            <a:ext cx="3017520" cy="566928"/>
-          </a:xfrm>
-          <a:prstGeom prst="rect">
-            <a:avLst/>
-          </a:prstGeom>
-          <a:noFill/>
-          <a:ln/>
-        </p:spPr>
-        <p:txBody>
-          <a:bodyPr wrap="square" rtlCol="0" anchor="ctr"/>
-          <a:lstStyle/>
-          <a:p>
-            <a:pPr indent="0" marL="0">
-              <a:buNone/>
-            </a:pPr>
-            <a:r>
-              <a:rPr lang="en-US" sz="1200" b="1" dirty="0">
-                <a:solidFill>
-                  <a:srgbClr val="FBBF24"/>
-                </a:solidFill>
-                <a:latin typeface="Arial" pitchFamily="34" charset="0"/>
-                <a:ea typeface="Arial" pitchFamily="34" charset="-122"/>
-                <a:cs typeface="Arial" pitchFamily="34" charset="-120"/>
-              </a:rPr>
-              <a:t>Conventional Commits</a:t>
-            </a:r>
-            <a:endParaRPr lang="en-US" sz="1200" dirty="0"/>
-          </a:p>
-        </p:txBody>
-      </p:sp>
-      <p:sp>
-        <p:nvSpPr>
-          <p:cNvPr id="28" name="Text 25"/>
-          <p:cNvSpPr/>
-          <p:nvPr/>
-        </p:nvSpPr>
-        <p:spPr>
-          <a:xfrm>
-            <a:off x="3840480" y="4892040"/>
-            <a:ext cx="7665415" cy="566928"/>
-          </a:xfrm>
-          <a:prstGeom prst="rect">
-            <a:avLst/>
-          </a:prstGeom>
-          <a:noFill/>
-          <a:ln/>
-        </p:spPr>
-        <p:txBody>
-          <a:bodyPr wrap="square" rtlCol="0" anchor="ctr"/>
-          <a:lstStyle/>
-          <a:p>
-            <a:pPr indent="0" marL="0">
-              <a:buNone/>
-            </a:pPr>
-            <a:r>
-              <a:rPr lang="en-US" sz="1100" dirty="0">
+      <p:pic>
+        <p:nvPicPr>
+          <p:cNvPr id="27" name="Image 1" descr="C:\Users\ACER NITRO\Desktop\DIA DEL PROGRAMADOR IA\docs\diagramas\diagrama-entidad-relacion.png">    </p:cNvPr>
+          <p:cNvPicPr>
+            <a:picLocks noChangeAspect="1"/>
+          </p:cNvPicPr>
+          <p:nvPr/>
+        </p:nvPicPr>
+        <p:blipFill>
+          <a:blip r:embed="rId2"/>
+          <a:srcRect l="0" r="0" t="0" b="0"/>
+          <a:stretch/>
+        </p:blipFill>
+        <p:spPr>
+          <a:xfrm>
+            <a:off x="7324344" y="1655064"/>
+            <a:ext cx="4325112" cy="3776472"/>
+          </a:xfrm>
+          <a:prstGeom prst="rect">
+            <a:avLst/>
+          </a:prstGeom>
+        </p:spPr>
+      </p:pic>
+      <p:sp>
+        <p:nvSpPr>
+          <p:cNvPr id="28" name="Text 24"/>
+          <p:cNvSpPr/>
+          <p:nvPr/>
+        </p:nvSpPr>
+        <p:spPr>
+          <a:xfrm>
+            <a:off x="7360920" y="5449824"/>
+            <a:ext cx="4251960" cy="274320"/>
+          </a:xfrm>
+          <a:prstGeom prst="rect">
+            <a:avLst/>
+          </a:prstGeom>
+          <a:noFill/>
+          <a:ln/>
+        </p:spPr>
+        <p:txBody>
+          <a:bodyPr wrap="square" rtlCol="0" anchor="ctr"/>
+          <a:lstStyle/>
+          <a:p>
+            <a:pPr indent="0" marL="0">
+              <a:buNone/>
+            </a:pPr>
+            <a:r>
+              <a:rPr lang="en-US" sz="950" i="1" dirty="0">
                 <a:solidFill>
                   <a:srgbClr val="A1AEC2"/>
                 </a:solidFill>
@@ -11902,114 +11929,9 @@
                 <a:ea typeface="Arial" pitchFamily="34" charset="-122"/>
                 <a:cs typeface="Arial" pitchFamily="34" charset="-120"/>
               </a:rPr>
-              <a:t>Formato estándar de mensajes de commit, en español, con trailer de coautoría de IA.</a:t>
-            </a:r>
-            <a:endParaRPr lang="en-US" sz="1100" dirty="0"/>
-          </a:p>
-        </p:txBody>
-      </p:sp>
-      <p:sp>
-        <p:nvSpPr>
-          <p:cNvPr id="29" name="Shape 26"/>
-          <p:cNvSpPr/>
-          <p:nvPr/>
-        </p:nvSpPr>
-        <p:spPr>
-          <a:xfrm>
-            <a:off x="502920" y="5550408"/>
-            <a:ext cx="11185855" cy="566928"/>
-          </a:xfrm>
-          <a:prstGeom prst="roundRect">
-            <a:avLst>
-              <a:gd name="adj" fmla="val 9677"/>
-            </a:avLst>
-          </a:prstGeom>
-          <a:solidFill>
-            <a:srgbClr val="182131"/>
-          </a:solidFill>
-          <a:ln w="12700">
-            <a:solidFill>
-              <a:srgbClr val="263143"/>
-            </a:solidFill>
-            <a:prstDash val="solid"/>
-          </a:ln>
-        </p:spPr>
-      </p:sp>
-      <p:sp>
-        <p:nvSpPr>
-          <p:cNvPr id="30" name="Text 27"/>
-          <p:cNvSpPr/>
-          <p:nvPr/>
-        </p:nvSpPr>
-        <p:spPr>
-          <a:xfrm>
-            <a:off x="685800" y="5550408"/>
-            <a:ext cx="3017520" cy="566928"/>
-          </a:xfrm>
-          <a:prstGeom prst="rect">
-            <a:avLst/>
-          </a:prstGeom>
-          <a:noFill/>
-          <a:ln/>
-        </p:spPr>
-        <p:txBody>
-          <a:bodyPr wrap="square" rtlCol="0" anchor="ctr"/>
-          <a:lstStyle/>
-          <a:p>
-            <a:pPr indent="0" marL="0">
-              <a:buNone/>
-            </a:pPr>
-            <a:r>
-              <a:rPr lang="en-US" sz="1200" b="1" dirty="0">
-                <a:solidFill>
-                  <a:srgbClr val="FBBF24"/>
-                </a:solidFill>
-                <a:latin typeface="Arial" pitchFamily="34" charset="0"/>
-                <a:ea typeface="Arial" pitchFamily="34" charset="-122"/>
-                <a:cs typeface="Arial" pitchFamily="34" charset="-120"/>
-              </a:rPr>
-              <a:t>UML 2.5</a:t>
-            </a:r>
-            <a:endParaRPr lang="en-US" sz="1200" dirty="0"/>
-          </a:p>
-        </p:txBody>
-      </p:sp>
-      <p:sp>
-        <p:nvSpPr>
-          <p:cNvPr id="31" name="Text 28"/>
-          <p:cNvSpPr/>
-          <p:nvPr/>
-        </p:nvSpPr>
-        <p:spPr>
-          <a:xfrm>
-            <a:off x="3840480" y="5550408"/>
-            <a:ext cx="7665415" cy="566928"/>
-          </a:xfrm>
-          <a:prstGeom prst="rect">
-            <a:avLst/>
-          </a:prstGeom>
-          <a:noFill/>
-          <a:ln/>
-        </p:spPr>
-        <p:txBody>
-          <a:bodyPr wrap="square" rtlCol="0" anchor="ctr"/>
-          <a:lstStyle/>
-          <a:p>
-            <a:pPr indent="0" marL="0">
-              <a:buNone/>
-            </a:pPr>
-            <a:r>
-              <a:rPr lang="en-US" sz="1100" dirty="0">
-                <a:solidFill>
-                  <a:srgbClr val="A1AEC2"/>
-                </a:solidFill>
-                <a:latin typeface="Arial" pitchFamily="34" charset="0"/>
-                <a:ea typeface="Arial" pitchFamily="34" charset="-122"/>
-                <a:cs typeface="Arial" pitchFamily="34" charset="-120"/>
-              </a:rPr>
-              <a:t>Notación de los diagramas de casos de uso, entidad-relación, secuencia y actividades.</a:t>
-            </a:r>
-            <a:endParaRPr lang="en-US" sz="1100" dirty="0"/>
+              <a:t>ERD real del sistema — 9 entidades, database/migrations/</a:t>
+            </a:r>
+            <a:endParaRPr lang="en-US" sz="950" dirty="0"/>
           </a:p>
         </p:txBody>
       </p:sp>
@@ -12175,7 +12097,7 @@
         <p:spPr>
           <a:xfrm>
             <a:off x="502920" y="1078992"/>
-            <a:ext cx="3657600" cy="274320"/>
+            <a:ext cx="4572000" cy="274320"/>
           </a:xfrm>
           <a:prstGeom prst="rect">
             <a:avLst/>
@@ -13619,7 +13541,7 @@
                 <a:ea typeface="Arial" pitchFamily="34" charset="-122"/>
                 <a:cs typeface="Arial" pitchFamily="34" charset="-120"/>
               </a:rPr>
-              <a:t>Guion palabra por palabra de los 12 minutos</a:t>
+              <a:t>Guion palabra por palabra de la presentación</a:t>
             </a:r>
             <a:endParaRPr lang="en-US" sz="900" dirty="0"/>
           </a:p>
@@ -14090,7 +14012,7 @@
                 <a:ea typeface="Arial" pitchFamily="34" charset="-122"/>
                 <a:cs typeface="Arial" pitchFamily="34" charset="-120"/>
               </a:rPr>
-              <a:t>+ 09-MANUAL-USUARIO.md y OPERACION-COBERTURA-DEMO.md · todo enlazado desde README.md</a:t>
+              <a:t>+ OPERACION-COBERTURA-DEMO.md · todo enlazado desde README.md · exportado también a Word y PDF en docs/export/</a:t>
             </a:r>
             <a:endParaRPr lang="en-US" sz="1000" dirty="0"/>
           </a:p>
@@ -14258,7 +14180,7 @@
         <p:spPr>
           <a:xfrm>
             <a:off x="502920" y="1078992"/>
-            <a:ext cx="3657600" cy="274320"/>
+            <a:ext cx="4572000" cy="274320"/>
           </a:xfrm>
           <a:prstGeom prst="rect">
             <a:avLst/>
@@ -15364,7 +15286,7 @@
                 <a:ea typeface="Arial" pitchFamily="34" charset="-122"/>
                 <a:cs typeface="Arial" pitchFamily="34" charset="-120"/>
               </a:rPr>
-              <a:t>08 · DEMOSTRACIÓN EN VIVO</a:t>
+              <a:t>08 · ORIGINALIDAD + USO DE IA (20% + 20%)</a:t>
             </a:r>
             <a:endParaRPr lang="en-US" sz="1200" dirty="0"/>
           </a:p>
@@ -15403,7 +15325,7 @@
                 <a:ea typeface="Arial" pitchFamily="34" charset="-122"/>
                 <a:cs typeface="Arial" pitchFamily="34" charset="-120"/>
               </a:rPr>
-              <a:t>Dashboard Nacional &amp; Territorio</a:t>
+              <a:t>La IA como Usuario Activo del Sistema</a:t>
             </a:r>
             <a:endParaRPr lang="en-US" sz="2200" dirty="0"/>
           </a:p>
@@ -15418,7 +15340,7 @@
         <p:spPr>
           <a:xfrm>
             <a:off x="502920" y="1078992"/>
-            <a:ext cx="3657600" cy="274320"/>
+            <a:ext cx="4572000" cy="274320"/>
           </a:xfrm>
           <a:prstGeom prst="rect">
             <a:avLst/>
@@ -15442,7 +15364,7 @@
                 <a:ea typeface="Arial" pitchFamily="34" charset="-122"/>
                 <a:cs typeface="Arial" pitchFamily="34" charset="-120"/>
               </a:rPr>
-              <a:t>3:00 – 4:15 · Andy</a:t>
+              <a:t>Diapositiva de referencia · Carlos</a:t>
             </a:r>
             <a:endParaRPr lang="en-US" sz="1100" dirty="0"/>
           </a:p>
@@ -15527,7 +15449,7 @@
                 <a:ea typeface="Arial" pitchFamily="34" charset="-122"/>
                 <a:cs typeface="Arial" pitchFamily="34" charset="-120"/>
               </a:rPr>
-              <a:t>Orador: Andy</a:t>
+              <a:t>Orador: Carlos</a:t>
             </a:r>
             <a:endParaRPr lang="en-US" sz="1000" dirty="0"/>
           </a:p>
@@ -15566,7 +15488,7 @@
                 <a:ea typeface="Arial" pitchFamily="34" charset="-122"/>
                 <a:cs typeface="Arial" pitchFamily="34" charset="-120"/>
               </a:rPr>
-              <a:t>Funcionalidad + UI/UX</a:t>
+              <a:t>Servidor MCP Propio</a:t>
             </a:r>
             <a:endParaRPr lang="en-US" sz="1000" dirty="0"/>
           </a:p>
@@ -15574,14 +15496,512 @@
       </p:sp>
       <p:sp>
         <p:nvSpPr>
-          <p:cNvPr id="11" name="Text 8"/>
-          <p:cNvSpPr/>
-          <p:nvPr/>
-        </p:nvSpPr>
-        <p:spPr>
-          <a:xfrm>
-            <a:off x="594360" y="1600200"/>
-            <a:ext cx="11002975" cy="4572000"/>
+          <p:cNvPr id="11" name="Shape 8"/>
+          <p:cNvSpPr/>
+          <p:nvPr/>
+        </p:nvSpPr>
+        <p:spPr>
+          <a:xfrm>
+            <a:off x="502920" y="1600200"/>
+            <a:ext cx="3566160" cy="1371600"/>
+          </a:xfrm>
+          <a:prstGeom prst="roundRect">
+            <a:avLst>
+              <a:gd name="adj" fmla="val 5333"/>
+            </a:avLst>
+          </a:prstGeom>
+          <a:solidFill>
+            <a:srgbClr val="F8FAFC"/>
+          </a:solidFill>
+          <a:ln w="12700">
+            <a:solidFill>
+              <a:srgbClr val="E2E8F0"/>
+            </a:solidFill>
+            <a:prstDash val="solid"/>
+          </a:ln>
+        </p:spPr>
+      </p:sp>
+      <p:sp>
+        <p:nvSpPr>
+          <p:cNvPr id="12" name="Text 9"/>
+          <p:cNvSpPr/>
+          <p:nvPr/>
+        </p:nvSpPr>
+        <p:spPr>
+          <a:xfrm>
+            <a:off x="649224" y="1709928"/>
+            <a:ext cx="3273552" cy="274320"/>
+          </a:xfrm>
+          <a:prstGeom prst="rect">
+            <a:avLst/>
+          </a:prstGeom>
+          <a:noFill/>
+          <a:ln/>
+        </p:spPr>
+        <p:txBody>
+          <a:bodyPr wrap="square" rtlCol="0" anchor="ctr"/>
+          <a:lstStyle/>
+          <a:p>
+            <a:pPr indent="0" marL="0">
+              <a:buNone/>
+            </a:pPr>
+            <a:r>
+              <a:rPr lang="en-US" sz="950" b="1" spc="50" kern="0" dirty="0">
+                <a:solidFill>
+                  <a:srgbClr val="526175"/>
+                </a:solidFill>
+                <a:latin typeface="Arial" pitchFamily="34" charset="0"/>
+                <a:ea typeface="Arial" pitchFamily="34" charset="-122"/>
+                <a:cs typeface="Arial" pitchFamily="34" charset="-120"/>
+              </a:rPr>
+              <a:t>SERVIDOR</a:t>
+            </a:r>
+            <a:endParaRPr lang="en-US" sz="950" dirty="0"/>
+          </a:p>
+        </p:txBody>
+      </p:sp>
+      <p:sp>
+        <p:nvSpPr>
+          <p:cNvPr id="13" name="Text 10"/>
+          <p:cNvSpPr/>
+          <p:nvPr/>
+        </p:nvSpPr>
+        <p:spPr>
+          <a:xfrm>
+            <a:off x="649224" y="1965960"/>
+            <a:ext cx="3273552" cy="502920"/>
+          </a:xfrm>
+          <a:prstGeom prst="rect">
+            <a:avLst/>
+          </a:prstGeom>
+          <a:noFill/>
+          <a:ln/>
+        </p:spPr>
+        <p:txBody>
+          <a:bodyPr wrap="square" rtlCol="0" anchor="ctr"/>
+          <a:lstStyle/>
+          <a:p>
+            <a:pPr indent="0" marL="0">
+              <a:buNone/>
+            </a:pPr>
+            <a:r>
+              <a:rPr lang="en-US" sz="2200" b="1" dirty="0">
+                <a:solidFill>
+                  <a:srgbClr val="172033"/>
+                </a:solidFill>
+                <a:latin typeface="Arial" pitchFamily="34" charset="0"/>
+                <a:ea typeface="Arial" pitchFamily="34" charset="-122"/>
+                <a:cs typeface="Arial" pitchFamily="34" charset="-120"/>
+              </a:rPr>
+              <a:t>mcp-server/</a:t>
+            </a:r>
+            <a:endParaRPr lang="en-US" sz="2200" dirty="0"/>
+          </a:p>
+        </p:txBody>
+      </p:sp>
+      <p:sp>
+        <p:nvSpPr>
+          <p:cNvPr id="14" name="Text 11"/>
+          <p:cNvSpPr/>
+          <p:nvPr/>
+        </p:nvSpPr>
+        <p:spPr>
+          <a:xfrm>
+            <a:off x="649224" y="2587752"/>
+            <a:ext cx="3273552" cy="320040"/>
+          </a:xfrm>
+          <a:prstGeom prst="rect">
+            <a:avLst/>
+          </a:prstGeom>
+          <a:noFill/>
+          <a:ln/>
+        </p:spPr>
+        <p:txBody>
+          <a:bodyPr wrap="square" rtlCol="0" anchor="ctr"/>
+          <a:lstStyle/>
+          <a:p>
+            <a:pPr indent="0" marL="0">
+              <a:buNone/>
+            </a:pPr>
+            <a:r>
+              <a:rPr lang="en-US" sz="900" dirty="0">
+                <a:solidFill>
+                  <a:srgbClr val="A65A00"/>
+                </a:solidFill>
+                <a:latin typeface="Arial" pitchFamily="34" charset="0"/>
+                <a:ea typeface="Arial" pitchFamily="34" charset="-122"/>
+                <a:cs typeface="Arial" pitchFamily="34" charset="-120"/>
+              </a:rPr>
+              <a:t>Node.js + @modelcontextprotocol/sdk</a:t>
+            </a:r>
+            <a:endParaRPr lang="en-US" sz="900" dirty="0"/>
+          </a:p>
+        </p:txBody>
+      </p:sp>
+      <p:sp>
+        <p:nvSpPr>
+          <p:cNvPr id="15" name="Shape 12"/>
+          <p:cNvSpPr/>
+          <p:nvPr/>
+        </p:nvSpPr>
+        <p:spPr>
+          <a:xfrm>
+            <a:off x="4251960" y="1600200"/>
+            <a:ext cx="3566160" cy="1371600"/>
+          </a:xfrm>
+          <a:prstGeom prst="roundRect">
+            <a:avLst>
+              <a:gd name="adj" fmla="val 5333"/>
+            </a:avLst>
+          </a:prstGeom>
+          <a:solidFill>
+            <a:srgbClr val="F8FAFC"/>
+          </a:solidFill>
+          <a:ln w="12700">
+            <a:solidFill>
+              <a:srgbClr val="E2E8F0"/>
+            </a:solidFill>
+            <a:prstDash val="solid"/>
+          </a:ln>
+        </p:spPr>
+      </p:sp>
+      <p:sp>
+        <p:nvSpPr>
+          <p:cNvPr id="16" name="Text 13"/>
+          <p:cNvSpPr/>
+          <p:nvPr/>
+        </p:nvSpPr>
+        <p:spPr>
+          <a:xfrm>
+            <a:off x="4398264" y="1709928"/>
+            <a:ext cx="3273552" cy="274320"/>
+          </a:xfrm>
+          <a:prstGeom prst="rect">
+            <a:avLst/>
+          </a:prstGeom>
+          <a:noFill/>
+          <a:ln/>
+        </p:spPr>
+        <p:txBody>
+          <a:bodyPr wrap="square" rtlCol="0" anchor="ctr"/>
+          <a:lstStyle/>
+          <a:p>
+            <a:pPr indent="0" marL="0">
+              <a:buNone/>
+            </a:pPr>
+            <a:r>
+              <a:rPr lang="en-US" sz="950" b="1" spc="50" kern="0" dirty="0">
+                <a:solidFill>
+                  <a:srgbClr val="526175"/>
+                </a:solidFill>
+                <a:latin typeface="Arial" pitchFamily="34" charset="0"/>
+                <a:ea typeface="Arial" pitchFamily="34" charset="-122"/>
+                <a:cs typeface="Arial" pitchFamily="34" charset="-120"/>
+              </a:rPr>
+              <a:t>HERRAMIENTAS</a:t>
+            </a:r>
+            <a:endParaRPr lang="en-US" sz="950" dirty="0"/>
+          </a:p>
+        </p:txBody>
+      </p:sp>
+      <p:sp>
+        <p:nvSpPr>
+          <p:cNvPr id="17" name="Text 14"/>
+          <p:cNvSpPr/>
+          <p:nvPr/>
+        </p:nvSpPr>
+        <p:spPr>
+          <a:xfrm>
+            <a:off x="4398264" y="1965960"/>
+            <a:ext cx="3273552" cy="502920"/>
+          </a:xfrm>
+          <a:prstGeom prst="rect">
+            <a:avLst/>
+          </a:prstGeom>
+          <a:noFill/>
+          <a:ln/>
+        </p:spPr>
+        <p:txBody>
+          <a:bodyPr wrap="square" rtlCol="0" anchor="ctr"/>
+          <a:lstStyle/>
+          <a:p>
+            <a:pPr indent="0" marL="0">
+              <a:buNone/>
+            </a:pPr>
+            <a:r>
+              <a:rPr lang="en-US" sz="2200" b="1" dirty="0">
+                <a:solidFill>
+                  <a:srgbClr val="172033"/>
+                </a:solidFill>
+                <a:latin typeface="Arial" pitchFamily="34" charset="0"/>
+                <a:ea typeface="Arial" pitchFamily="34" charset="-122"/>
+                <a:cs typeface="Arial" pitchFamily="34" charset="-120"/>
+              </a:rPr>
+              <a:t>3</a:t>
+            </a:r>
+            <a:endParaRPr lang="en-US" sz="2200" dirty="0"/>
+          </a:p>
+        </p:txBody>
+      </p:sp>
+      <p:sp>
+        <p:nvSpPr>
+          <p:cNvPr id="18" name="Text 15"/>
+          <p:cNvSpPr/>
+          <p:nvPr/>
+        </p:nvSpPr>
+        <p:spPr>
+          <a:xfrm>
+            <a:off x="4398264" y="2587752"/>
+            <a:ext cx="3273552" cy="320040"/>
+          </a:xfrm>
+          <a:prstGeom prst="rect">
+            <a:avLst/>
+          </a:prstGeom>
+          <a:noFill/>
+          <a:ln/>
+        </p:spPr>
+        <p:txBody>
+          <a:bodyPr wrap="square" rtlCol="0" anchor="ctr"/>
+          <a:lstStyle/>
+          <a:p>
+            <a:pPr indent="0" marL="0">
+              <a:buNone/>
+            </a:pPr>
+            <a:r>
+              <a:rPr lang="en-US" sz="900" dirty="0">
+                <a:solidFill>
+                  <a:srgbClr val="A65A00"/>
+                </a:solidFill>
+                <a:latin typeface="Arial" pitchFamily="34" charset="0"/>
+                <a:ea typeface="Arial" pitchFamily="34" charset="-122"/>
+                <a:cs typeface="Arial" pitchFamily="34" charset="-120"/>
+              </a:rPr>
+              <a:t>statistics · list_farms · register_generation</a:t>
+            </a:r>
+            <a:endParaRPr lang="en-US" sz="900" dirty="0"/>
+          </a:p>
+        </p:txBody>
+      </p:sp>
+      <p:sp>
+        <p:nvSpPr>
+          <p:cNvPr id="19" name="Shape 16"/>
+          <p:cNvSpPr/>
+          <p:nvPr/>
+        </p:nvSpPr>
+        <p:spPr>
+          <a:xfrm>
+            <a:off x="8001000" y="1600200"/>
+            <a:ext cx="3703320" cy="1371600"/>
+          </a:xfrm>
+          <a:prstGeom prst="roundRect">
+            <a:avLst>
+              <a:gd name="adj" fmla="val 5333"/>
+            </a:avLst>
+          </a:prstGeom>
+          <a:solidFill>
+            <a:srgbClr val="F8FAFC"/>
+          </a:solidFill>
+          <a:ln w="12700">
+            <a:solidFill>
+              <a:srgbClr val="E2E8F0"/>
+            </a:solidFill>
+            <a:prstDash val="solid"/>
+          </a:ln>
+        </p:spPr>
+      </p:sp>
+      <p:sp>
+        <p:nvSpPr>
+          <p:cNvPr id="20" name="Text 17"/>
+          <p:cNvSpPr/>
+          <p:nvPr/>
+        </p:nvSpPr>
+        <p:spPr>
+          <a:xfrm>
+            <a:off x="8147304" y="1709928"/>
+            <a:ext cx="3410712" cy="274320"/>
+          </a:xfrm>
+          <a:prstGeom prst="rect">
+            <a:avLst/>
+          </a:prstGeom>
+          <a:noFill/>
+          <a:ln/>
+        </p:spPr>
+        <p:txBody>
+          <a:bodyPr wrap="square" rtlCol="0" anchor="ctr"/>
+          <a:lstStyle/>
+          <a:p>
+            <a:pPr indent="0" marL="0">
+              <a:buNone/>
+            </a:pPr>
+            <a:r>
+              <a:rPr lang="en-US" sz="950" b="1" spc="50" kern="0" dirty="0">
+                <a:solidFill>
+                  <a:srgbClr val="526175"/>
+                </a:solidFill>
+                <a:latin typeface="Arial" pitchFamily="34" charset="0"/>
+                <a:ea typeface="Arial" pitchFamily="34" charset="-122"/>
+                <a:cs typeface="Arial" pitchFamily="34" charset="-120"/>
+              </a:rPr>
+              <a:t>AUTENTICACIÓN</a:t>
+            </a:r>
+            <a:endParaRPr lang="en-US" sz="950" dirty="0"/>
+          </a:p>
+        </p:txBody>
+      </p:sp>
+      <p:sp>
+        <p:nvSpPr>
+          <p:cNvPr id="21" name="Text 18"/>
+          <p:cNvSpPr/>
+          <p:nvPr/>
+        </p:nvSpPr>
+        <p:spPr>
+          <a:xfrm>
+            <a:off x="8147304" y="1965960"/>
+            <a:ext cx="3410712" cy="502920"/>
+          </a:xfrm>
+          <a:prstGeom prst="rect">
+            <a:avLst/>
+          </a:prstGeom>
+          <a:noFill/>
+          <a:ln/>
+        </p:spPr>
+        <p:txBody>
+          <a:bodyPr wrap="square" rtlCol="0" anchor="ctr"/>
+          <a:lstStyle/>
+          <a:p>
+            <a:pPr indent="0" marL="0">
+              <a:buNone/>
+            </a:pPr>
+            <a:r>
+              <a:rPr lang="en-US" sz="2200" b="1" dirty="0">
+                <a:solidFill>
+                  <a:srgbClr val="172033"/>
+                </a:solidFill>
+                <a:latin typeface="Arial" pitchFamily="34" charset="0"/>
+                <a:ea typeface="Arial" pitchFamily="34" charset="-122"/>
+                <a:cs typeface="Arial" pitchFamily="34" charset="-120"/>
+              </a:rPr>
+              <a:t>X-MCP-Key</a:t>
+            </a:r>
+            <a:endParaRPr lang="en-US" sz="2200" dirty="0"/>
+          </a:p>
+        </p:txBody>
+      </p:sp>
+      <p:sp>
+        <p:nvSpPr>
+          <p:cNvPr id="22" name="Text 19"/>
+          <p:cNvSpPr/>
+          <p:nvPr/>
+        </p:nvSpPr>
+        <p:spPr>
+          <a:xfrm>
+            <a:off x="8147304" y="2587752"/>
+            <a:ext cx="3410712" cy="320040"/>
+          </a:xfrm>
+          <a:prstGeom prst="rect">
+            <a:avLst/>
+          </a:prstGeom>
+          <a:noFill/>
+          <a:ln/>
+        </p:spPr>
+        <p:txBody>
+          <a:bodyPr wrap="square" rtlCol="0" anchor="ctr"/>
+          <a:lstStyle/>
+          <a:p>
+            <a:pPr indent="0" marL="0">
+              <a:buNone/>
+            </a:pPr>
+            <a:r>
+              <a:rPr lang="en-US" sz="900" dirty="0">
+                <a:solidFill>
+                  <a:srgbClr val="A65A00"/>
+                </a:solidFill>
+                <a:latin typeface="Arial" pitchFamily="34" charset="0"/>
+                <a:ea typeface="Arial" pitchFamily="34" charset="-122"/>
+                <a:cs typeface="Arial" pitchFamily="34" charset="-120"/>
+              </a:rPr>
+              <a:t>hash_equals() — falla cerrada</a:t>
+            </a:r>
+            <a:endParaRPr lang="en-US" sz="900" dirty="0"/>
+          </a:p>
+        </p:txBody>
+      </p:sp>
+      <p:sp>
+        <p:nvSpPr>
+          <p:cNvPr id="23" name="Shape 20"/>
+          <p:cNvSpPr/>
+          <p:nvPr/>
+        </p:nvSpPr>
+        <p:spPr>
+          <a:xfrm>
+            <a:off x="502920" y="3154680"/>
+            <a:ext cx="11201400" cy="1234440"/>
+          </a:xfrm>
+          <a:prstGeom prst="roundRect">
+            <a:avLst>
+              <a:gd name="adj" fmla="val 5926"/>
+            </a:avLst>
+          </a:prstGeom>
+          <a:solidFill>
+            <a:srgbClr val="F8FAFC"/>
+          </a:solidFill>
+          <a:ln w="12700">
+            <a:solidFill>
+              <a:srgbClr val="E2E8F0"/>
+            </a:solidFill>
+            <a:prstDash val="solid"/>
+          </a:ln>
+        </p:spPr>
+      </p:sp>
+      <p:sp>
+        <p:nvSpPr>
+          <p:cNvPr id="24" name="Text 21"/>
+          <p:cNvSpPr/>
+          <p:nvPr/>
+        </p:nvSpPr>
+        <p:spPr>
+          <a:xfrm>
+            <a:off x="667512" y="3264408"/>
+            <a:ext cx="10872216" cy="320040"/>
+          </a:xfrm>
+          <a:prstGeom prst="rect">
+            <a:avLst/>
+          </a:prstGeom>
+          <a:noFill/>
+          <a:ln/>
+        </p:spPr>
+        <p:txBody>
+          <a:bodyPr wrap="square" rtlCol="0" anchor="ctr"/>
+          <a:lstStyle/>
+          <a:p>
+            <a:pPr indent="0" marL="0">
+              <a:buNone/>
+            </a:pPr>
+            <a:r>
+              <a:rPr lang="en-US" sz="1250" b="1" dirty="0">
+                <a:solidFill>
+                  <a:srgbClr val="A65A00"/>
+                </a:solidFill>
+                <a:latin typeface="Arial" pitchFamily="34" charset="0"/>
+                <a:ea typeface="Arial" pitchFamily="34" charset="-122"/>
+                <a:cs typeface="Arial" pitchFamily="34" charset="-120"/>
+              </a:rPr>
+              <a:t>El flujo completo</a:t>
+            </a:r>
+            <a:endParaRPr lang="en-US" sz="1250" dirty="0"/>
+          </a:p>
+        </p:txBody>
+      </p:sp>
+      <p:sp>
+        <p:nvSpPr>
+          <p:cNvPr id="25" name="Text 22"/>
+          <p:cNvSpPr/>
+          <p:nvPr/>
+        </p:nvSpPr>
+        <p:spPr>
+          <a:xfrm>
+            <a:off x="667512" y="3593592"/>
+            <a:ext cx="10872216" cy="685800"/>
           </a:xfrm>
           <a:prstGeom prst="rect">
             <a:avLst/>
@@ -15593,67 +16013,132 @@
           <a:bodyPr wrap="square" rtlCol="0" anchor="t"/>
           <a:lstStyle/>
           <a:p>
-            <a:pPr marL="342900" indent="-342900">
+            <a:pPr indent="0" marL="0">
               <a:lnSpc>
-                <a:spcPct val="125000"/>
+                <a:spcPct val="115000"/>
               </a:lnSpc>
-              <a:buSzPct val="100000"/>
-              <a:buChar char="•"/>
-            </a:pPr>
-            <a:r>
-              <a:rPr lang="en-US" sz="1500" dirty="0">
-                <a:solidFill>
-                  <a:srgbClr val="172033"/>
-                </a:solidFill>
-                <a:latin typeface="Arial" pitchFamily="34" charset="0"/>
-                <a:ea typeface="Arial" pitchFamily="34" charset="-122"/>
-                <a:cs typeface="Arial" pitchFamily="34" charset="-120"/>
-              </a:rPr>
-              <a:t>Dashboard Nacional: 6 KPIs consolidados (generación acumulada, CO₂ evitado, granjas, paneles, kW, familias).</a:t>
-            </a:r>
-            <a:endParaRPr lang="en-US" sz="1500" dirty="0"/>
-          </a:p>
-          <a:p>
-            <a:pPr marL="342900" indent="-342900">
+              <a:buNone/>
+            </a:pPr>
+            <a:r>
+              <a:rPr lang="en-US" sz="1050" dirty="0">
+                <a:solidFill>
+                  <a:srgbClr val="526175"/>
+                </a:solidFill>
+                <a:latin typeface="Arial" pitchFamily="34" charset="0"/>
+                <a:ea typeface="Arial" pitchFamily="34" charset="-122"/>
+                <a:cs typeface="Arial" pitchFamily="34" charset="-120"/>
+              </a:rPr>
+              <a:t>"Registra una medición de 45,000 kWh para la Granja Villa Nueva" → el agente de IA invoca la herramienta MCP → se autentica → EnergyGenerationService::store() procesa la medición (el mismo servicio que usa el formulario web) → se refleja al instante en el Dashboard.</a:t>
+            </a:r>
+            <a:endParaRPr lang="en-US" sz="1050" dirty="0"/>
+          </a:p>
+        </p:txBody>
+      </p:sp>
+      <p:sp>
+        <p:nvSpPr>
+          <p:cNvPr id="26" name="Shape 23"/>
+          <p:cNvSpPr/>
+          <p:nvPr/>
+        </p:nvSpPr>
+        <p:spPr>
+          <a:xfrm>
+            <a:off x="502920" y="4526280"/>
+            <a:ext cx="11201400" cy="1097280"/>
+          </a:xfrm>
+          <a:prstGeom prst="roundRect">
+            <a:avLst>
+              <a:gd name="adj" fmla="val 6667"/>
+            </a:avLst>
+          </a:prstGeom>
+          <a:solidFill>
+            <a:srgbClr val="F8FAFC"/>
+          </a:solidFill>
+          <a:ln w="12700">
+            <a:solidFill>
+              <a:srgbClr val="E2E8F0"/>
+            </a:solidFill>
+            <a:prstDash val="solid"/>
+          </a:ln>
+        </p:spPr>
+      </p:sp>
+      <p:sp>
+        <p:nvSpPr>
+          <p:cNvPr id="27" name="Text 24"/>
+          <p:cNvSpPr/>
+          <p:nvPr/>
+        </p:nvSpPr>
+        <p:spPr>
+          <a:xfrm>
+            <a:off x="667512" y="4636008"/>
+            <a:ext cx="10872216" cy="320040"/>
+          </a:xfrm>
+          <a:prstGeom prst="rect">
+            <a:avLst/>
+          </a:prstGeom>
+          <a:noFill/>
+          <a:ln/>
+        </p:spPr>
+        <p:txBody>
+          <a:bodyPr wrap="square" rtlCol="0" anchor="ctr"/>
+          <a:lstStyle/>
+          <a:p>
+            <a:pPr indent="0" marL="0">
+              <a:buNone/>
+            </a:pPr>
+            <a:r>
+              <a:rPr lang="en-US" sz="1250" b="1" dirty="0">
+                <a:solidFill>
+                  <a:srgbClr val="A65A00"/>
+                </a:solidFill>
+                <a:latin typeface="Arial" pitchFamily="34" charset="0"/>
+                <a:ea typeface="Arial" pitchFamily="34" charset="-122"/>
+                <a:cs typeface="Arial" pitchFamily="34" charset="-120"/>
+              </a:rPr>
+              <a:t>Trazabilidad total</a:t>
+            </a:r>
+            <a:endParaRPr lang="en-US" sz="1250" dirty="0"/>
+          </a:p>
+        </p:txBody>
+      </p:sp>
+      <p:sp>
+        <p:nvSpPr>
+          <p:cNvPr id="28" name="Text 25"/>
+          <p:cNvSpPr/>
+          <p:nvPr/>
+        </p:nvSpPr>
+        <p:spPr>
+          <a:xfrm>
+            <a:off x="667512" y="4965192"/>
+            <a:ext cx="10872216" cy="548640"/>
+          </a:xfrm>
+          <a:prstGeom prst="rect">
+            <a:avLst/>
+          </a:prstGeom>
+          <a:noFill/>
+          <a:ln/>
+        </p:spPr>
+        <p:txBody>
+          <a:bodyPr wrap="square" rtlCol="0" anchor="t"/>
+          <a:lstStyle/>
+          <a:p>
+            <a:pPr indent="0" marL="0">
               <a:lnSpc>
-                <a:spcPct val="125000"/>
+                <a:spcPct val="115000"/>
               </a:lnSpc>
-              <a:buSzPct val="100000"/>
-              <a:buChar char="•"/>
-            </a:pPr>
-            <a:r>
-              <a:rPr lang="en-US" sz="1500" dirty="0">
-                <a:solidFill>
-                  <a:srgbClr val="172033"/>
-                </a:solidFill>
-                <a:latin typeface="Arial" pitchFamily="34" charset="0"/>
-                <a:ea typeface="Arial" pitchFamily="34" charset="-122"/>
-                <a:cs typeface="Arial" pitchFamily="34" charset="-120"/>
-              </a:rPr>
-              <a:t>Ranking Departamental: participación porcentual y curva real vs. esperada.</a:t>
-            </a:r>
-            <a:endParaRPr lang="en-US" sz="1500" dirty="0"/>
-          </a:p>
-          <a:p>
-            <a:pPr marL="342900" indent="-342900">
-              <a:lnSpc>
-                <a:spcPct val="125000"/>
-              </a:lnSpc>
-              <a:buSzPct val="100000"/>
-              <a:buChar char="•"/>
-            </a:pPr>
-            <a:r>
-              <a:rPr lang="en-US" sz="1500" dirty="0">
-                <a:solidFill>
-                  <a:srgbClr val="172033"/>
-                </a:solidFill>
-                <a:latin typeface="Arial" pitchFamily="34" charset="0"/>
-                <a:ea typeface="Arial" pitchFamily="34" charset="-122"/>
-                <a:cs typeface="Arial" pitchFamily="34" charset="-120"/>
-              </a:rPr>
-              <a:t>Mapa Interactivo: filtrado instantáneo por departamento, pines según kW, drawer sin scroll horizontal.</a:t>
-            </a:r>
-            <a:endParaRPr lang="en-US" sz="1500" dirty="0"/>
+              <a:buNone/>
+            </a:pPr>
+            <a:r>
+              <a:rPr lang="en-US" sz="1050" dirty="0">
+                <a:solidFill>
+                  <a:srgbClr val="526175"/>
+                </a:solidFill>
+                <a:latin typeface="Arial" pitchFamily="34" charset="0"/>
+                <a:ea typeface="Arial" pitchFamily="34" charset="-122"/>
+                <a:cs typeface="Arial" pitchFamily="34" charset="-120"/>
+              </a:rPr>
+              <a:t>Todo cambio hecho vía MCP queda registrado en audit_logs, atribuido al usuario de sistema mcp-agent@kinsolar.internal — nunca se confunde con una acción humana.</a:t>
+            </a:r>
+            <a:endParaRPr lang="en-US" sz="1050" dirty="0"/>
           </a:p>
         </p:txBody>
       </p:sp>
@@ -15765,7 +16250,7 @@
                 <a:ea typeface="Arial" pitchFamily="34" charset="-122"/>
                 <a:cs typeface="Arial" pitchFamily="34" charset="-120"/>
               </a:rPr>
-              <a:t>09 · DEMOSTRACIÓN EN VIVO</a:t>
+              <a:t>09 · ORIGINALIDAD + UI/UX</a:t>
             </a:r>
             <a:endParaRPr lang="en-US" sz="1200" dirty="0"/>
           </a:p>
@@ -15804,7 +16289,7 @@
                 <a:ea typeface="Arial" pitchFamily="34" charset="-122"/>
                 <a:cs typeface="Arial" pitchFamily="34" charset="-120"/>
               </a:rPr>
-              <a:t>Monitoreo Autónomo de Anomalías Energéticas</a:t>
+              <a:t>Lo que Nadie nos Pidió, pero Construimos</a:t>
             </a:r>
             <a:endParaRPr lang="en-US" sz="2200" dirty="0"/>
           </a:p>
@@ -15819,7 +16304,7 @@
         <p:spPr>
           <a:xfrm>
             <a:off x="502920" y="1078992"/>
-            <a:ext cx="3657600" cy="274320"/>
+            <a:ext cx="4572000" cy="274320"/>
           </a:xfrm>
           <a:prstGeom prst="rect">
             <a:avLst/>
@@ -15843,7 +16328,7 @@
                 <a:ea typeface="Arial" pitchFamily="34" charset="-122"/>
                 <a:cs typeface="Arial" pitchFamily="34" charset="-120"/>
               </a:rPr>
-              <a:t>4:15 – 5:30 · Andy</a:t>
+              <a:t>Diapositiva de referencia · Andy</a:t>
             </a:r>
             <a:endParaRPr lang="en-US" sz="1100" dirty="0"/>
           </a:p>
@@ -15967,7 +16452,7 @@
                 <a:ea typeface="Arial" pitchFamily="34" charset="-122"/>
                 <a:cs typeface="Arial" pitchFamily="34" charset="-120"/>
               </a:rPr>
-              <a:t>Funcionalidad (25%)</a:t>
+              <a:t>Creatividad y Valor Añadido</a:t>
             </a:r>
             <a:endParaRPr lang="en-US" sz="1000" dirty="0"/>
           </a:p>
@@ -15975,14 +16460,80 @@
       </p:sp>
       <p:sp>
         <p:nvSpPr>
-          <p:cNvPr id="11" name="Text 8"/>
-          <p:cNvSpPr/>
-          <p:nvPr/>
-        </p:nvSpPr>
-        <p:spPr>
-          <a:xfrm>
-            <a:off x="594360" y="1600200"/>
-            <a:ext cx="11002975" cy="4572000"/>
+          <p:cNvPr id="11" name="Shape 8"/>
+          <p:cNvSpPr/>
+          <p:nvPr/>
+        </p:nvSpPr>
+        <p:spPr>
+          <a:xfrm>
+            <a:off x="502920" y="1600200"/>
+            <a:ext cx="3657600" cy="1325880"/>
+          </a:xfrm>
+          <a:prstGeom prst="roundRect">
+            <a:avLst>
+              <a:gd name="adj" fmla="val 5517"/>
+            </a:avLst>
+          </a:prstGeom>
+          <a:solidFill>
+            <a:srgbClr val="182131"/>
+          </a:solidFill>
+          <a:ln w="12700">
+            <a:solidFill>
+              <a:srgbClr val="263143"/>
+            </a:solidFill>
+            <a:prstDash val="solid"/>
+          </a:ln>
+        </p:spPr>
+      </p:sp>
+      <p:sp>
+        <p:nvSpPr>
+          <p:cNvPr id="12" name="Text 9"/>
+          <p:cNvSpPr/>
+          <p:nvPr/>
+        </p:nvSpPr>
+        <p:spPr>
+          <a:xfrm>
+            <a:off x="667512" y="1709928"/>
+            <a:ext cx="3328416" cy="320040"/>
+          </a:xfrm>
+          <a:prstGeom prst="rect">
+            <a:avLst/>
+          </a:prstGeom>
+          <a:noFill/>
+          <a:ln/>
+        </p:spPr>
+        <p:txBody>
+          <a:bodyPr wrap="square" rtlCol="0" anchor="ctr"/>
+          <a:lstStyle/>
+          <a:p>
+            <a:pPr indent="0" marL="0">
+              <a:buNone/>
+            </a:pPr>
+            <a:r>
+              <a:rPr lang="en-US" sz="1250" b="1" dirty="0">
+                <a:solidFill>
+                  <a:srgbClr val="FBBF24"/>
+                </a:solidFill>
+                <a:latin typeface="Arial" pitchFamily="34" charset="0"/>
+                <a:ea typeface="Arial" pitchFamily="34" charset="-122"/>
+                <a:cs typeface="Arial" pitchFamily="34" charset="-120"/>
+              </a:rPr>
+              <a:t>Laboratorio SCADA IoT</a:t>
+            </a:r>
+            <a:endParaRPr lang="en-US" sz="1250" dirty="0"/>
+          </a:p>
+        </p:txBody>
+      </p:sp>
+      <p:sp>
+        <p:nvSpPr>
+          <p:cNvPr id="13" name="Text 10"/>
+          <p:cNvSpPr/>
+          <p:nvPr/>
+        </p:nvSpPr>
+        <p:spPr>
+          <a:xfrm>
+            <a:off x="667512" y="2039112"/>
+            <a:ext cx="3328416" cy="777240"/>
           </a:xfrm>
           <a:prstGeom prst="rect">
             <a:avLst/>
@@ -15994,88 +16545,650 @@
           <a:bodyPr wrap="square" rtlCol="0" anchor="t"/>
           <a:lstStyle/>
           <a:p>
-            <a:pPr marL="342900" indent="-342900">
+            <a:pPr indent="0" marL="0">
               <a:lnSpc>
-                <a:spcPct val="125000"/>
+                <a:spcPct val="115000"/>
               </a:lnSpc>
-              <a:buSzPct val="100000"/>
-              <a:buChar char="•"/>
-            </a:pPr>
-            <a:r>
-              <a:rPr lang="en-US" sz="1500" dirty="0">
-                <a:solidFill>
-                  <a:srgbClr val="EDF2FA"/>
-                </a:solidFill>
-                <a:latin typeface="Arial" pitchFamily="34" charset="0"/>
-                <a:ea typeface="Arial" pitchFamily="34" charset="-122"/>
-                <a:cs typeface="Arial" pitchFamily="34" charset="-120"/>
-              </a:rPr>
-              <a:t>Registro de medición en vivo con cálculo automático de CO₂ (factor 0.40 kg/kWh).</a:t>
-            </a:r>
-            <a:endParaRPr lang="en-US" sz="1500" dirty="0"/>
-          </a:p>
-          <a:p>
-            <a:pPr marL="342900" indent="-342900">
+              <a:buNone/>
+            </a:pPr>
+            <a:r>
+              <a:rPr lang="en-US" sz="1050" dirty="0">
+                <a:solidFill>
+                  <a:srgbClr val="A1AEC2"/>
+                </a:solidFill>
+                <a:latin typeface="Arial" pitchFamily="34" charset="0"/>
+                <a:ea typeface="Arial" pitchFamily="34" charset="-122"/>
+                <a:cs typeface="Arial" pitchFamily="34" charset="-120"/>
+              </a:rPr>
+              <a:t>Simula fallas de inversores en vivo, con osciloscopio visual.</a:t>
+            </a:r>
+            <a:endParaRPr lang="en-US" sz="1050" dirty="0"/>
+          </a:p>
+        </p:txBody>
+      </p:sp>
+      <p:sp>
+        <p:nvSpPr>
+          <p:cNvPr id="14" name="Shape 11"/>
+          <p:cNvSpPr/>
+          <p:nvPr/>
+        </p:nvSpPr>
+        <p:spPr>
+          <a:xfrm>
+            <a:off x="4325112" y="1600200"/>
+            <a:ext cx="3657600" cy="1325880"/>
+          </a:xfrm>
+          <a:prstGeom prst="roundRect">
+            <a:avLst>
+              <a:gd name="adj" fmla="val 5517"/>
+            </a:avLst>
+          </a:prstGeom>
+          <a:solidFill>
+            <a:srgbClr val="182131"/>
+          </a:solidFill>
+          <a:ln w="12700">
+            <a:solidFill>
+              <a:srgbClr val="263143"/>
+            </a:solidFill>
+            <a:prstDash val="solid"/>
+          </a:ln>
+        </p:spPr>
+      </p:sp>
+      <p:sp>
+        <p:nvSpPr>
+          <p:cNvPr id="15" name="Text 12"/>
+          <p:cNvSpPr/>
+          <p:nvPr/>
+        </p:nvSpPr>
+        <p:spPr>
+          <a:xfrm>
+            <a:off x="4489704" y="1709928"/>
+            <a:ext cx="3328416" cy="320040"/>
+          </a:xfrm>
+          <a:prstGeom prst="rect">
+            <a:avLst/>
+          </a:prstGeom>
+          <a:noFill/>
+          <a:ln/>
+        </p:spPr>
+        <p:txBody>
+          <a:bodyPr wrap="square" rtlCol="0" anchor="ctr"/>
+          <a:lstStyle/>
+          <a:p>
+            <a:pPr indent="0" marL="0">
+              <a:buNone/>
+            </a:pPr>
+            <a:r>
+              <a:rPr lang="en-US" sz="1250" b="1" dirty="0">
+                <a:solidFill>
+                  <a:srgbClr val="FBBF24"/>
+                </a:solidFill>
+                <a:latin typeface="Arial" pitchFamily="34" charset="0"/>
+                <a:ea typeface="Arial" pitchFamily="34" charset="-122"/>
+                <a:cs typeface="Arial" pitchFamily="34" charset="-120"/>
+              </a:rPr>
+              <a:t>Campanita Web Audio API</a:t>
+            </a:r>
+            <a:endParaRPr lang="en-US" sz="1250" dirty="0"/>
+          </a:p>
+        </p:txBody>
+      </p:sp>
+      <p:sp>
+        <p:nvSpPr>
+          <p:cNvPr id="16" name="Text 13"/>
+          <p:cNvSpPr/>
+          <p:nvPr/>
+        </p:nvSpPr>
+        <p:spPr>
+          <a:xfrm>
+            <a:off x="4489704" y="2039112"/>
+            <a:ext cx="3328416" cy="777240"/>
+          </a:xfrm>
+          <a:prstGeom prst="rect">
+            <a:avLst/>
+          </a:prstGeom>
+          <a:noFill/>
+          <a:ln/>
+        </p:spPr>
+        <p:txBody>
+          <a:bodyPr wrap="square" rtlCol="0" anchor="t"/>
+          <a:lstStyle/>
+          <a:p>
+            <a:pPr indent="0" marL="0">
               <a:lnSpc>
-                <a:spcPct val="125000"/>
+                <a:spcPct val="115000"/>
               </a:lnSpc>
-              <a:buSzPct val="100000"/>
-              <a:buChar char="•"/>
-            </a:pPr>
-            <a:r>
-              <a:rPr lang="en-US" sz="1500" dirty="0">
-                <a:solidFill>
-                  <a:srgbClr val="EDF2FA"/>
-                </a:solidFill>
-                <a:latin typeface="Arial" pitchFamily="34" charset="0"/>
-                <a:ea typeface="Arial" pitchFamily="34" charset="-122"/>
-                <a:cs typeface="Arial" pitchFamily="34" charset="-120"/>
-              </a:rPr>
-              <a:t>Déficit del 25-30% → disparo inmediato de alerta + campanita con Web Audio API.</a:t>
-            </a:r>
-            <a:endParaRPr lang="en-US" sz="1500" dirty="0"/>
-          </a:p>
-          <a:p>
-            <a:pPr marL="342900" indent="-342900">
+              <a:buNone/>
+            </a:pPr>
+            <a:r>
+              <a:rPr lang="en-US" sz="1050" dirty="0">
+                <a:solidFill>
+                  <a:srgbClr val="A1AEC2"/>
+                </a:solidFill>
+                <a:latin typeface="Arial" pitchFamily="34" charset="0"/>
+                <a:ea typeface="Arial" pitchFamily="34" charset="-122"/>
+                <a:cs typeface="Arial" pitchFamily="34" charset="-120"/>
+              </a:rPr>
+              <a:t>Aviso sonoro nativo del navegador ante nueva alerta.</a:t>
+            </a:r>
+            <a:endParaRPr lang="en-US" sz="1050" dirty="0"/>
+          </a:p>
+        </p:txBody>
+      </p:sp>
+      <p:sp>
+        <p:nvSpPr>
+          <p:cNvPr id="17" name="Shape 14"/>
+          <p:cNvSpPr/>
+          <p:nvPr/>
+        </p:nvSpPr>
+        <p:spPr>
+          <a:xfrm>
+            <a:off x="8147304" y="1600200"/>
+            <a:ext cx="3657600" cy="1325880"/>
+          </a:xfrm>
+          <a:prstGeom prst="roundRect">
+            <a:avLst>
+              <a:gd name="adj" fmla="val 5517"/>
+            </a:avLst>
+          </a:prstGeom>
+          <a:solidFill>
+            <a:srgbClr val="182131"/>
+          </a:solidFill>
+          <a:ln w="12700">
+            <a:solidFill>
+              <a:srgbClr val="263143"/>
+            </a:solidFill>
+            <a:prstDash val="solid"/>
+          </a:ln>
+        </p:spPr>
+      </p:sp>
+      <p:sp>
+        <p:nvSpPr>
+          <p:cNvPr id="18" name="Text 15"/>
+          <p:cNvSpPr/>
+          <p:nvPr/>
+        </p:nvSpPr>
+        <p:spPr>
+          <a:xfrm>
+            <a:off x="8311896" y="1709928"/>
+            <a:ext cx="3328416" cy="320040"/>
+          </a:xfrm>
+          <a:prstGeom prst="rect">
+            <a:avLst/>
+          </a:prstGeom>
+          <a:noFill/>
+          <a:ln/>
+        </p:spPr>
+        <p:txBody>
+          <a:bodyPr wrap="square" rtlCol="0" anchor="ctr"/>
+          <a:lstStyle/>
+          <a:p>
+            <a:pPr indent="0" marL="0">
+              <a:buNone/>
+            </a:pPr>
+            <a:r>
+              <a:rPr lang="en-US" sz="1250" b="1" dirty="0">
+                <a:solidFill>
+                  <a:srgbClr val="FBBF24"/>
+                </a:solidFill>
+                <a:latin typeface="Arial" pitchFamily="34" charset="0"/>
+                <a:ea typeface="Arial" pitchFamily="34" charset="-122"/>
+                <a:cs typeface="Arial" pitchFamily="34" charset="-120"/>
+              </a:rPr>
+              <a:t>Tema Claro / Oscuro Real</a:t>
+            </a:r>
+            <a:endParaRPr lang="en-US" sz="1250" dirty="0"/>
+          </a:p>
+        </p:txBody>
+      </p:sp>
+      <p:sp>
+        <p:nvSpPr>
+          <p:cNvPr id="19" name="Text 16"/>
+          <p:cNvSpPr/>
+          <p:nvPr/>
+        </p:nvSpPr>
+        <p:spPr>
+          <a:xfrm>
+            <a:off x="8311896" y="2039112"/>
+            <a:ext cx="3328416" cy="777240"/>
+          </a:xfrm>
+          <a:prstGeom prst="rect">
+            <a:avLst/>
+          </a:prstGeom>
+          <a:noFill/>
+          <a:ln/>
+        </p:spPr>
+        <p:txBody>
+          <a:bodyPr wrap="square" rtlCol="0" anchor="t"/>
+          <a:lstStyle/>
+          <a:p>
+            <a:pPr indent="0" marL="0">
               <a:lnSpc>
-                <a:spcPct val="125000"/>
+                <a:spcPct val="115000"/>
               </a:lnSpc>
-              <a:buSzPct val="100000"/>
-              <a:buChar char="•"/>
-            </a:pPr>
-            <a:r>
-              <a:rPr lang="en-US" sz="1500" dirty="0">
-                <a:solidFill>
-                  <a:srgbClr val="EDF2FA"/>
-                </a:solidFill>
-                <a:latin typeface="Arial" pitchFamily="34" charset="0"/>
-                <a:ea typeface="Arial" pitchFamily="34" charset="-122"/>
-                <a:cs typeface="Arial" pitchFamily="34" charset="-120"/>
-              </a:rPr>
-              <a:t>Resolución de alertas con justificación técnica trazada obligatoria.</a:t>
-            </a:r>
-            <a:endParaRPr lang="en-US" sz="1500" dirty="0"/>
-          </a:p>
-          <a:p>
-            <a:pPr marL="342900" indent="-342900">
+              <a:buNone/>
+            </a:pPr>
+            <a:r>
+              <a:rPr lang="en-US" sz="1050" dirty="0">
+                <a:solidFill>
+                  <a:srgbClr val="A1AEC2"/>
+                </a:solidFill>
+                <a:latin typeface="Arial" pitchFamily="34" charset="0"/>
+                <a:ea typeface="Arial" pitchFamily="34" charset="-122"/>
+                <a:cs typeface="Arial" pitchFamily="34" charset="-120"/>
+              </a:rPr>
+              <a:t>Tokens de diseño completos — igual que esta presentación.</a:t>
+            </a:r>
+            <a:endParaRPr lang="en-US" sz="1050" dirty="0"/>
+          </a:p>
+        </p:txBody>
+      </p:sp>
+      <p:sp>
+        <p:nvSpPr>
+          <p:cNvPr id="20" name="Shape 17"/>
+          <p:cNvSpPr/>
+          <p:nvPr/>
+        </p:nvSpPr>
+        <p:spPr>
+          <a:xfrm>
+            <a:off x="502920" y="3090672"/>
+            <a:ext cx="3657600" cy="1325880"/>
+          </a:xfrm>
+          <a:prstGeom prst="roundRect">
+            <a:avLst>
+              <a:gd name="adj" fmla="val 5517"/>
+            </a:avLst>
+          </a:prstGeom>
+          <a:solidFill>
+            <a:srgbClr val="182131"/>
+          </a:solidFill>
+          <a:ln w="12700">
+            <a:solidFill>
+              <a:srgbClr val="263143"/>
+            </a:solidFill>
+            <a:prstDash val="solid"/>
+          </a:ln>
+        </p:spPr>
+      </p:sp>
+      <p:sp>
+        <p:nvSpPr>
+          <p:cNvPr id="21" name="Text 18"/>
+          <p:cNvSpPr/>
+          <p:nvPr/>
+        </p:nvSpPr>
+        <p:spPr>
+          <a:xfrm>
+            <a:off x="667512" y="3200400"/>
+            <a:ext cx="3328416" cy="320040"/>
+          </a:xfrm>
+          <a:prstGeom prst="rect">
+            <a:avLst/>
+          </a:prstGeom>
+          <a:noFill/>
+          <a:ln/>
+        </p:spPr>
+        <p:txBody>
+          <a:bodyPr wrap="square" rtlCol="0" anchor="ctr"/>
+          <a:lstStyle/>
+          <a:p>
+            <a:pPr indent="0" marL="0">
+              <a:buNone/>
+            </a:pPr>
+            <a:r>
+              <a:rPr lang="en-US" sz="1250" b="1" dirty="0">
+                <a:solidFill>
+                  <a:srgbClr val="FBBF24"/>
+                </a:solidFill>
+                <a:latin typeface="Arial" pitchFamily="34" charset="0"/>
+                <a:ea typeface="Arial" pitchFamily="34" charset="-122"/>
+                <a:cs typeface="Arial" pitchFamily="34" charset="-120"/>
+              </a:rPr>
+              <a:t>Navegación Móvil Nativa</a:t>
+            </a:r>
+            <a:endParaRPr lang="en-US" sz="1250" dirty="0"/>
+          </a:p>
+        </p:txBody>
+      </p:sp>
+      <p:sp>
+        <p:nvSpPr>
+          <p:cNvPr id="22" name="Text 19"/>
+          <p:cNvSpPr/>
+          <p:nvPr/>
+        </p:nvSpPr>
+        <p:spPr>
+          <a:xfrm>
+            <a:off x="667512" y="3529584"/>
+            <a:ext cx="3328416" cy="777240"/>
+          </a:xfrm>
+          <a:prstGeom prst="rect">
+            <a:avLst/>
+          </a:prstGeom>
+          <a:noFill/>
+          <a:ln/>
+        </p:spPr>
+        <p:txBody>
+          <a:bodyPr wrap="square" rtlCol="0" anchor="t"/>
+          <a:lstStyle/>
+          <a:p>
+            <a:pPr indent="0" marL="0">
               <a:lnSpc>
-                <a:spcPct val="125000"/>
+                <a:spcPct val="115000"/>
               </a:lnSpc>
-              <a:buSzPct val="100000"/>
-              <a:buChar char="•"/>
-            </a:pPr>
-            <a:r>
-              <a:rPr lang="en-US" sz="1500" dirty="0">
-                <a:solidFill>
-                  <a:srgbClr val="EDF2FA"/>
-                </a:solidFill>
-                <a:latin typeface="Arial" pitchFamily="34" charset="0"/>
-                <a:ea typeface="Arial" pitchFamily="34" charset="-122"/>
-                <a:cs typeface="Arial" pitchFamily="34" charset="-120"/>
-              </a:rPr>
-              <a:t>Reporte consolidado de los 22 departamentos, exportable a CSV con BOM UTF-8.</a:t>
-            </a:r>
-            <a:endParaRPr lang="en-US" sz="1500" dirty="0"/>
+              <a:buNone/>
+            </a:pPr>
+            <a:r>
+              <a:rPr lang="en-US" sz="1050" dirty="0">
+                <a:solidFill>
+                  <a:srgbClr val="A1AEC2"/>
+                </a:solidFill>
+                <a:latin typeface="Arial" pitchFamily="34" charset="0"/>
+                <a:ea typeface="Arial" pitchFamily="34" charset="-122"/>
+                <a:cs typeface="Arial" pitchFamily="34" charset="-120"/>
+              </a:rPr>
+              <a:t>Barra inferior tipo app, cero scroll horizontal desde 360px.</a:t>
+            </a:r>
+            <a:endParaRPr lang="en-US" sz="1050" dirty="0"/>
+          </a:p>
+        </p:txBody>
+      </p:sp>
+      <p:sp>
+        <p:nvSpPr>
+          <p:cNvPr id="23" name="Shape 20"/>
+          <p:cNvSpPr/>
+          <p:nvPr/>
+        </p:nvSpPr>
+        <p:spPr>
+          <a:xfrm>
+            <a:off x="4325112" y="3090672"/>
+            <a:ext cx="3657600" cy="1325880"/>
+          </a:xfrm>
+          <a:prstGeom prst="roundRect">
+            <a:avLst>
+              <a:gd name="adj" fmla="val 5517"/>
+            </a:avLst>
+          </a:prstGeom>
+          <a:solidFill>
+            <a:srgbClr val="182131"/>
+          </a:solidFill>
+          <a:ln w="12700">
+            <a:solidFill>
+              <a:srgbClr val="263143"/>
+            </a:solidFill>
+            <a:prstDash val="solid"/>
+          </a:ln>
+        </p:spPr>
+      </p:sp>
+      <p:sp>
+        <p:nvSpPr>
+          <p:cNvPr id="24" name="Text 21"/>
+          <p:cNvSpPr/>
+          <p:nvPr/>
+        </p:nvSpPr>
+        <p:spPr>
+          <a:xfrm>
+            <a:off x="4489704" y="3200400"/>
+            <a:ext cx="3328416" cy="320040"/>
+          </a:xfrm>
+          <a:prstGeom prst="rect">
+            <a:avLst/>
+          </a:prstGeom>
+          <a:noFill/>
+          <a:ln/>
+        </p:spPr>
+        <p:txBody>
+          <a:bodyPr wrap="square" rtlCol="0" anchor="ctr"/>
+          <a:lstStyle/>
+          <a:p>
+            <a:pPr indent="0" marL="0">
+              <a:buNone/>
+            </a:pPr>
+            <a:r>
+              <a:rPr lang="en-US" sz="1250" b="1" dirty="0">
+                <a:solidFill>
+                  <a:srgbClr val="FBBF24"/>
+                </a:solidFill>
+                <a:latin typeface="Arial" pitchFamily="34" charset="0"/>
+                <a:ea typeface="Arial" pitchFamily="34" charset="-122"/>
+                <a:cs typeface="Arial" pitchFamily="34" charset="-120"/>
+              </a:rPr>
+              <a:t>Cliente de API Externo</a:t>
+            </a:r>
+            <a:endParaRPr lang="en-US" sz="1250" dirty="0"/>
+          </a:p>
+        </p:txBody>
+      </p:sp>
+      <p:sp>
+        <p:nvSpPr>
+          <p:cNvPr id="25" name="Text 22"/>
+          <p:cNvSpPr/>
+          <p:nvPr/>
+        </p:nvSpPr>
+        <p:spPr>
+          <a:xfrm>
+            <a:off x="4489704" y="3529584"/>
+            <a:ext cx="3328416" cy="777240"/>
+          </a:xfrm>
+          <a:prstGeom prst="rect">
+            <a:avLst/>
+          </a:prstGeom>
+          <a:noFill/>
+          <a:ln/>
+        </p:spPr>
+        <p:txBody>
+          <a:bodyPr wrap="square" rtlCol="0" anchor="t"/>
+          <a:lstStyle/>
+          <a:p>
+            <a:pPr indent="0" marL="0">
+              <a:lnSpc>
+                <a:spcPct val="115000"/>
+              </a:lnSpc>
+              <a:buNone/>
+            </a:pPr>
+            <a:r>
+              <a:rPr lang="en-US" sz="1050" dirty="0">
+                <a:solidFill>
+                  <a:srgbClr val="A1AEC2"/>
+                </a:solidFill>
+                <a:latin typeface="Arial" pitchFamily="34" charset="0"/>
+                <a:ea typeface="Arial" pitchFamily="34" charset="-122"/>
+                <a:cs typeface="Arial" pitchFamily="34" charset="-120"/>
+              </a:rPr>
+              <a:t>public/api-demo.html consume la API sin backend propio.</a:t>
+            </a:r>
+            <a:endParaRPr lang="en-US" sz="1050" dirty="0"/>
+          </a:p>
+        </p:txBody>
+      </p:sp>
+      <p:sp>
+        <p:nvSpPr>
+          <p:cNvPr id="26" name="Shape 23"/>
+          <p:cNvSpPr/>
+          <p:nvPr/>
+        </p:nvSpPr>
+        <p:spPr>
+          <a:xfrm>
+            <a:off x="8147304" y="3090672"/>
+            <a:ext cx="3657600" cy="1325880"/>
+          </a:xfrm>
+          <a:prstGeom prst="roundRect">
+            <a:avLst>
+              <a:gd name="adj" fmla="val 5517"/>
+            </a:avLst>
+          </a:prstGeom>
+          <a:solidFill>
+            <a:srgbClr val="182131"/>
+          </a:solidFill>
+          <a:ln w="12700">
+            <a:solidFill>
+              <a:srgbClr val="263143"/>
+            </a:solidFill>
+            <a:prstDash val="solid"/>
+          </a:ln>
+        </p:spPr>
+      </p:sp>
+      <p:sp>
+        <p:nvSpPr>
+          <p:cNvPr id="27" name="Text 24"/>
+          <p:cNvSpPr/>
+          <p:nvPr/>
+        </p:nvSpPr>
+        <p:spPr>
+          <a:xfrm>
+            <a:off x="8311896" y="3200400"/>
+            <a:ext cx="3328416" cy="320040"/>
+          </a:xfrm>
+          <a:prstGeom prst="rect">
+            <a:avLst/>
+          </a:prstGeom>
+          <a:noFill/>
+          <a:ln/>
+        </p:spPr>
+        <p:txBody>
+          <a:bodyPr wrap="square" rtlCol="0" anchor="ctr"/>
+          <a:lstStyle/>
+          <a:p>
+            <a:pPr indent="0" marL="0">
+              <a:buNone/>
+            </a:pPr>
+            <a:r>
+              <a:rPr lang="en-US" sz="1250" b="1" dirty="0">
+                <a:solidFill>
+                  <a:srgbClr val="FBBF24"/>
+                </a:solidFill>
+                <a:latin typeface="Arial" pitchFamily="34" charset="0"/>
+                <a:ea typeface="Arial" pitchFamily="34" charset="-122"/>
+                <a:cs typeface="Arial" pitchFamily="34" charset="-120"/>
+              </a:rPr>
+              <a:t>Identidad Maya-Solar</a:t>
+            </a:r>
+            <a:endParaRPr lang="en-US" sz="1250" dirty="0"/>
+          </a:p>
+        </p:txBody>
+      </p:sp>
+      <p:sp>
+        <p:nvSpPr>
+          <p:cNvPr id="28" name="Text 25"/>
+          <p:cNvSpPr/>
+          <p:nvPr/>
+        </p:nvSpPr>
+        <p:spPr>
+          <a:xfrm>
+            <a:off x="8311896" y="3529584"/>
+            <a:ext cx="3328416" cy="777240"/>
+          </a:xfrm>
+          <a:prstGeom prst="rect">
+            <a:avLst/>
+          </a:prstGeom>
+          <a:noFill/>
+          <a:ln/>
+        </p:spPr>
+        <p:txBody>
+          <a:bodyPr wrap="square" rtlCol="0" anchor="t"/>
+          <a:lstStyle/>
+          <a:p>
+            <a:pPr indent="0" marL="0">
+              <a:lnSpc>
+                <a:spcPct val="115000"/>
+              </a:lnSpc>
+              <a:buNone/>
+            </a:pPr>
+            <a:r>
+              <a:rPr lang="en-US" sz="1050" dirty="0">
+                <a:solidFill>
+                  <a:srgbClr val="A1AEC2"/>
+                </a:solidFill>
+                <a:latin typeface="Arial" pitchFamily="34" charset="0"/>
+                <a:ea typeface="Arial" pitchFamily="34" charset="-122"/>
+                <a:cs typeface="Arial" pitchFamily="34" charset="-120"/>
+              </a:rPr>
+              <a:t>Nombre, glifo y paleta como síntesis conceptual del producto.</a:t>
+            </a:r>
+            <a:endParaRPr lang="en-US" sz="1050" dirty="0"/>
+          </a:p>
+        </p:txBody>
+      </p:sp>
+      <p:sp>
+        <p:nvSpPr>
+          <p:cNvPr id="29" name="Shape 26"/>
+          <p:cNvSpPr/>
+          <p:nvPr/>
+        </p:nvSpPr>
+        <p:spPr>
+          <a:xfrm>
+            <a:off x="502920" y="4343400"/>
+            <a:ext cx="11201400" cy="1417320"/>
+          </a:xfrm>
+          <a:prstGeom prst="roundRect">
+            <a:avLst>
+              <a:gd name="adj" fmla="val 3226"/>
+            </a:avLst>
+          </a:prstGeom>
+          <a:ln w="19050">
+            <a:solidFill>
+              <a:srgbClr val="FBBF24"/>
+            </a:solidFill>
+            <a:prstDash val="solid"/>
+          </a:ln>
+        </p:spPr>
+      </p:sp>
+      <p:pic>
+        <p:nvPicPr>
+          <p:cNvPr id="30" name="Image 1" descr="C:\Users\ACER NITRO\Desktop\DIA DEL PROGRAMADOR IA\docs\evidencias\pptx\07-simulador-scada.png">    </p:cNvPr>
+          <p:cNvPicPr>
+            <a:picLocks noChangeAspect="1"/>
+          </p:cNvPicPr>
+          <p:nvPr/>
+        </p:nvPicPr>
+        <p:blipFill>
+          <a:blip r:embed="rId2"/>
+          <a:srcRect l="0" r="0" t="0" b="0"/>
+          <a:stretch/>
+        </p:blipFill>
+        <p:spPr>
+          <a:xfrm>
+            <a:off x="557784" y="4398264"/>
+            <a:ext cx="11091672" cy="1033272"/>
+          </a:xfrm>
+          <a:prstGeom prst="rect">
+            <a:avLst/>
+          </a:prstGeom>
+        </p:spPr>
+      </p:pic>
+      <p:sp>
+        <p:nvSpPr>
+          <p:cNvPr id="31" name="Text 27"/>
+          <p:cNvSpPr/>
+          <p:nvPr/>
+        </p:nvSpPr>
+        <p:spPr>
+          <a:xfrm>
+            <a:off x="594360" y="5449824"/>
+            <a:ext cx="11018520" cy="274320"/>
+          </a:xfrm>
+          <a:prstGeom prst="rect">
+            <a:avLst/>
+          </a:prstGeom>
+          <a:noFill/>
+          <a:ln/>
+        </p:spPr>
+        <p:txBody>
+          <a:bodyPr wrap="square" rtlCol="0" anchor="ctr"/>
+          <a:lstStyle/>
+          <a:p>
+            <a:pPr indent="0" marL="0">
+              <a:buNone/>
+            </a:pPr>
+            <a:r>
+              <a:rPr lang="en-US" sz="950" i="1" dirty="0">
+                <a:solidFill>
+                  <a:srgbClr val="A1AEC2"/>
+                </a:solidFill>
+                <a:latin typeface="Arial" pitchFamily="34" charset="0"/>
+                <a:ea typeface="Arial" pitchFamily="34" charset="-122"/>
+                <a:cs typeface="Arial" pitchFamily="34" charset="-120"/>
+              </a:rPr>
+              <a:t>Laboratorio SCADA IoT en vivo — osciloscopio de potencia en tiempo real</a:t>
+            </a:r>
+            <a:endParaRPr lang="en-US" sz="950" dirty="0"/>
           </a:p>
         </p:txBody>
       </p:sp>
